--- a/media/module6/slides.pptx
+++ b/media/module6/slides.pptx
@@ -38,6 +38,14 @@
     <p:sldId id="286" r:id="rId38"/>
     <p:sldId id="287" r:id="rId39"/>
     <p:sldId id="288" r:id="rId40"/>
+    <p:sldId id="289" r:id="rId41"/>
+    <p:sldId id="290" r:id="rId42"/>
+    <p:sldId id="291" r:id="rId43"/>
+    <p:sldId id="292" r:id="rId44"/>
+    <p:sldId id="293" r:id="rId45"/>
+    <p:sldId id="294" r:id="rId46"/>
+    <p:sldId id="295" r:id="rId47"/>
+    <p:sldId id="296" r:id="rId48"/>
   </p:sldIdLst>
   <p:sldSz cx="12191695" cy="6858000" type="screen4x3"/>
   <p:notesSz cx="6858000" cy="9144000"/>
@@ -534,7 +542,7 @@
           <a:lstStyle/>
           <a:p>
             <a:r>
-              <a:t>From MODULE6 Design Architecture.</a:t>
+              <a:t>From docs/MODULE6.md — read guides before running demos.</a:t>
             </a:r>
           </a:p>
         </p:txBody>
@@ -674,7 +682,7 @@
           <a:lstStyle/>
           <a:p>
             <a:r>
-              <a:t>Run from course repository root.</a:t>
+              <a:t>From MODULE6 Topics Covered.</a:t>
             </a:r>
           </a:p>
         </p:txBody>
@@ -744,7 +752,7 @@
           <a:lstStyle/>
           <a:p>
             <a:r>
-              <a:t>Hands-on: module6/examples/protocol_plan/</a:t>
+              <a:t>From MODULE6 Topics Covered.</a:t>
             </a:r>
           </a:p>
         </p:txBody>
@@ -814,7 +822,7 @@
           <a:lstStyle/>
           <a:p>
             <a:r>
-              <a:t>Hands-on: module6/examples/multi_agent/</a:t>
+              <a:t>Full detail in docs/MODULE6.md command reference.</a:t>
             </a:r>
           </a:p>
         </p:txBody>
@@ -884,7 +892,7 @@
           <a:lstStyle/>
           <a:p>
             <a:r>
-              <a:t>Hands-on: module6/examples/integration/</a:t>
+              <a:t>Full detail in docs/MODULE6.md command reference.</a:t>
             </a:r>
           </a:p>
         </p:txBody>
@@ -954,7 +962,7 @@
           <a:lstStyle/>
           <a:p>
             <a:r>
-              <a:t>Hands-on: module6/examples/solutions/</a:t>
+              <a:t>Run from course repository root.</a:t>
             </a:r>
           </a:p>
         </p:txBody>
@@ -1024,7 +1032,7 @@
           <a:lstStyle/>
           <a:p>
             <a:r>
-              <a:t>Hands-on: module6/examples/validate/</a:t>
+              <a:t>Hands-on: module6/examples/protocol_plan/</a:t>
             </a:r>
           </a:p>
         </p:txBody>
@@ -1094,7 +1102,7 @@
           <a:lstStyle/>
           <a:p>
             <a:r>
-              <a:t>From MODULE6 Learning Outcomes.</a:t>
+              <a:t>Hands-on: module6/examples/multi_agent/</a:t>
             </a:r>
           </a:p>
         </p:txBody>
@@ -1164,7 +1172,77 @@
           <a:lstStyle/>
           <a:p>
             <a:r>
-              <a:t>From MODULE6 Learning Outcomes.</a:t>
+              <a:t>Hands-on: module6/examples/integration/</a:t>
+            </a:r>
+          </a:p>
+        </p:txBody>
+      </p:sp>
+      <p:sp>
+        <p:nvSpPr>
+          <p:cNvPr id="4" name="Slide Number Placeholder 3"/>
+          <p:cNvSpPr>
+            <a:spLocks noGrp="1"/>
+          </p:cNvSpPr>
+          <p:nvPr>
+            <p:ph type="sldNum" idx="5" sz="quarter"/>
+          </p:nvPr>
+        </p:nvSpPr>
+        <p:spPr/>
+      </p:sp>
+    </p:spTree>
+  </p:cSld>
+  <p:clrMapOvr>
+    <a:masterClrMapping/>
+  </p:clrMapOvr>
+</p:notes>
+</file>
+
+<file path=ppt/notesSlides/notesSlide19.xml><?xml version="1.0" encoding="utf-8"?>
+<p:notes xmlns:a="http://schemas.openxmlformats.org/drawingml/2006/main" xmlns:p="http://schemas.openxmlformats.org/presentationml/2006/main" xmlns:r="http://schemas.openxmlformats.org/officeDocument/2006/relationships">
+  <p:cSld>
+    <p:spTree>
+      <p:nvGrpSpPr>
+        <p:cNvPr id="1" name=""/>
+        <p:cNvGrpSpPr/>
+        <p:nvPr/>
+      </p:nvGrpSpPr>
+      <p:grpSpPr>
+        <a:xfrm>
+          <a:off x="0" y="0"/>
+          <a:ext cx="0" cy="0"/>
+          <a:chOff x="0" y="0"/>
+          <a:chExt cx="0" cy="0"/>
+        </a:xfrm>
+      </p:grpSpPr>
+      <p:sp>
+        <p:nvSpPr>
+          <p:cNvPr id="2" name="Slide Image Placeholder 1"/>
+          <p:cNvSpPr>
+            <a:spLocks noGrp="1"/>
+          </p:cNvSpPr>
+          <p:nvPr>
+            <p:ph type="sldImg" idx="2"/>
+          </p:nvPr>
+        </p:nvSpPr>
+        <p:spPr/>
+      </p:sp>
+      <p:sp>
+        <p:nvSpPr>
+          <p:cNvPr id="3" name="Notes Placeholder 2"/>
+          <p:cNvSpPr>
+            <a:spLocks noGrp="1"/>
+          </p:cNvSpPr>
+          <p:nvPr>
+            <p:ph type="body" idx="3" sz="quarter"/>
+          </p:nvPr>
+        </p:nvSpPr>
+        <p:spPr/>
+        <p:txBody>
+          <a:bodyPr/>
+          <a:lstStyle/>
+          <a:p>
+            <a:r>
+              <a:t>Hands-on: module6/examples/solutions/</a:t>
             </a:r>
           </a:p>
         </p:txBody>
@@ -1259,6 +1337,216 @@
 </p:notes>
 </file>
 
+<file path=ppt/notesSlides/notesSlide20.xml><?xml version="1.0" encoding="utf-8"?>
+<p:notes xmlns:a="http://schemas.openxmlformats.org/drawingml/2006/main" xmlns:p="http://schemas.openxmlformats.org/presentationml/2006/main" xmlns:r="http://schemas.openxmlformats.org/officeDocument/2006/relationships">
+  <p:cSld>
+    <p:spTree>
+      <p:nvGrpSpPr>
+        <p:cNvPr id="1" name=""/>
+        <p:cNvGrpSpPr/>
+        <p:nvPr/>
+      </p:nvGrpSpPr>
+      <p:grpSpPr>
+        <a:xfrm>
+          <a:off x="0" y="0"/>
+          <a:ext cx="0" cy="0"/>
+          <a:chOff x="0" y="0"/>
+          <a:chExt cx="0" cy="0"/>
+        </a:xfrm>
+      </p:grpSpPr>
+      <p:sp>
+        <p:nvSpPr>
+          <p:cNvPr id="2" name="Slide Image Placeholder 1"/>
+          <p:cNvSpPr>
+            <a:spLocks noGrp="1"/>
+          </p:cNvSpPr>
+          <p:nvPr>
+            <p:ph type="sldImg" idx="2"/>
+          </p:nvPr>
+        </p:nvSpPr>
+        <p:spPr/>
+      </p:sp>
+      <p:sp>
+        <p:nvSpPr>
+          <p:cNvPr id="3" name="Notes Placeholder 2"/>
+          <p:cNvSpPr>
+            <a:spLocks noGrp="1"/>
+          </p:cNvSpPr>
+          <p:nvPr>
+            <p:ph type="body" idx="3" sz="quarter"/>
+          </p:nvPr>
+        </p:nvSpPr>
+        <p:spPr/>
+        <p:txBody>
+          <a:bodyPr/>
+          <a:lstStyle/>
+          <a:p>
+            <a:r>
+              <a:t>Hands-on: module6/examples/validate/</a:t>
+            </a:r>
+          </a:p>
+        </p:txBody>
+      </p:sp>
+      <p:sp>
+        <p:nvSpPr>
+          <p:cNvPr id="4" name="Slide Number Placeholder 3"/>
+          <p:cNvSpPr>
+            <a:spLocks noGrp="1"/>
+          </p:cNvSpPr>
+          <p:nvPr>
+            <p:ph type="sldNum" idx="5" sz="quarter"/>
+          </p:nvPr>
+        </p:nvSpPr>
+        <p:spPr/>
+      </p:sp>
+    </p:spTree>
+  </p:cSld>
+  <p:clrMapOvr>
+    <a:masterClrMapping/>
+  </p:clrMapOvr>
+</p:notes>
+</file>
+
+<file path=ppt/notesSlides/notesSlide21.xml><?xml version="1.0" encoding="utf-8"?>
+<p:notes xmlns:a="http://schemas.openxmlformats.org/drawingml/2006/main" xmlns:p="http://schemas.openxmlformats.org/presentationml/2006/main" xmlns:r="http://schemas.openxmlformats.org/officeDocument/2006/relationships">
+  <p:cSld>
+    <p:spTree>
+      <p:nvGrpSpPr>
+        <p:cNvPr id="1" name=""/>
+        <p:cNvGrpSpPr/>
+        <p:nvPr/>
+      </p:nvGrpSpPr>
+      <p:grpSpPr>
+        <a:xfrm>
+          <a:off x="0" y="0"/>
+          <a:ext cx="0" cy="0"/>
+          <a:chOff x="0" y="0"/>
+          <a:chExt cx="0" cy="0"/>
+        </a:xfrm>
+      </p:grpSpPr>
+      <p:sp>
+        <p:nvSpPr>
+          <p:cNvPr id="2" name="Slide Image Placeholder 1"/>
+          <p:cNvSpPr>
+            <a:spLocks noGrp="1"/>
+          </p:cNvSpPr>
+          <p:nvPr>
+            <p:ph type="sldImg" idx="2"/>
+          </p:nvPr>
+        </p:nvSpPr>
+        <p:spPr/>
+      </p:sp>
+      <p:sp>
+        <p:nvSpPr>
+          <p:cNvPr id="3" name="Notes Placeholder 2"/>
+          <p:cNvSpPr>
+            <a:spLocks noGrp="1"/>
+          </p:cNvSpPr>
+          <p:nvPr>
+            <p:ph type="body" idx="3" sz="quarter"/>
+          </p:nvPr>
+        </p:nvSpPr>
+        <p:spPr/>
+        <p:txBody>
+          <a:bodyPr/>
+          <a:lstStyle/>
+          <a:p>
+            <a:r>
+              <a:t>From MODULE6 Learning Outcomes.</a:t>
+            </a:r>
+          </a:p>
+        </p:txBody>
+      </p:sp>
+      <p:sp>
+        <p:nvSpPr>
+          <p:cNvPr id="4" name="Slide Number Placeholder 3"/>
+          <p:cNvSpPr>
+            <a:spLocks noGrp="1"/>
+          </p:cNvSpPr>
+          <p:nvPr>
+            <p:ph type="sldNum" idx="5" sz="quarter"/>
+          </p:nvPr>
+        </p:nvSpPr>
+        <p:spPr/>
+      </p:sp>
+    </p:spTree>
+  </p:cSld>
+  <p:clrMapOvr>
+    <a:masterClrMapping/>
+  </p:clrMapOvr>
+</p:notes>
+</file>
+
+<file path=ppt/notesSlides/notesSlide22.xml><?xml version="1.0" encoding="utf-8"?>
+<p:notes xmlns:a="http://schemas.openxmlformats.org/drawingml/2006/main" xmlns:p="http://schemas.openxmlformats.org/presentationml/2006/main" xmlns:r="http://schemas.openxmlformats.org/officeDocument/2006/relationships">
+  <p:cSld>
+    <p:spTree>
+      <p:nvGrpSpPr>
+        <p:cNvPr id="1" name=""/>
+        <p:cNvGrpSpPr/>
+        <p:nvPr/>
+      </p:nvGrpSpPr>
+      <p:grpSpPr>
+        <a:xfrm>
+          <a:off x="0" y="0"/>
+          <a:ext cx="0" cy="0"/>
+          <a:chOff x="0" y="0"/>
+          <a:chExt cx="0" cy="0"/>
+        </a:xfrm>
+      </p:grpSpPr>
+      <p:sp>
+        <p:nvSpPr>
+          <p:cNvPr id="2" name="Slide Image Placeholder 1"/>
+          <p:cNvSpPr>
+            <a:spLocks noGrp="1"/>
+          </p:cNvSpPr>
+          <p:nvPr>
+            <p:ph type="sldImg" idx="2"/>
+          </p:nvPr>
+        </p:nvSpPr>
+        <p:spPr/>
+      </p:sp>
+      <p:sp>
+        <p:nvSpPr>
+          <p:cNvPr id="3" name="Notes Placeholder 2"/>
+          <p:cNvSpPr>
+            <a:spLocks noGrp="1"/>
+          </p:cNvSpPr>
+          <p:nvPr>
+            <p:ph type="body" idx="3" sz="quarter"/>
+          </p:nvPr>
+        </p:nvSpPr>
+        <p:spPr/>
+        <p:txBody>
+          <a:bodyPr/>
+          <a:lstStyle/>
+          <a:p>
+            <a:r>
+              <a:t>From MODULE6 Learning Outcomes.</a:t>
+            </a:r>
+          </a:p>
+        </p:txBody>
+      </p:sp>
+      <p:sp>
+        <p:nvSpPr>
+          <p:cNvPr id="4" name="Slide Number Placeholder 3"/>
+          <p:cNvSpPr>
+            <a:spLocks noGrp="1"/>
+          </p:cNvSpPr>
+          <p:nvPr>
+            <p:ph type="sldNum" idx="5" sz="quarter"/>
+          </p:nvPr>
+        </p:nvSpPr>
+        <p:spPr/>
+      </p:sp>
+    </p:spTree>
+  </p:cSld>
+  <p:clrMapOvr>
+    <a:masterClrMapping/>
+  </p:clrMapOvr>
+</p:notes>
+</file>
+
 <file path=ppt/notesSlides/notesSlide3.xml><?xml version="1.0" encoding="utf-8"?>
 <p:notes xmlns:a="http://schemas.openxmlformats.org/drawingml/2006/main" xmlns:p="http://schemas.openxmlformats.org/presentationml/2006/main" xmlns:r="http://schemas.openxmlformats.org/officeDocument/2006/relationships">
   <p:cSld>
@@ -1374,7 +1662,7 @@
           <a:lstStyle/>
           <a:p>
             <a:r>
-              <a:t>From MODULE6 Verification &amp; Testing Methods.</a:t>
+              <a:t>From MODULE6 Design Architecture.</a:t>
             </a:r>
           </a:p>
         </p:txBody>
@@ -1444,7 +1732,7 @@
           <a:lstStyle/>
           <a:p>
             <a:r>
-              <a:t>From MODULE6 Verification &amp; Testing Methods.</a:t>
+              <a:t>Trace while running module6/EXAMPLES.md labs.</a:t>
             </a:r>
           </a:p>
         </p:txBody>
@@ -1584,7 +1872,7 @@
           <a:lstStyle/>
           <a:p>
             <a:r>
-              <a:t>From MODULE6 Topics Covered.</a:t>
+              <a:t>From MODULE6 Verification &amp; Testing Methods.</a:t>
             </a:r>
           </a:p>
         </p:txBody>
@@ -1654,7 +1942,7 @@
           <a:lstStyle/>
           <a:p>
             <a:r>
-              <a:t>From MODULE6 Topics Covered.</a:t>
+              <a:t>From MODULE6 Verification &amp; Testing Methods.</a:t>
             </a:r>
           </a:p>
         </p:txBody>
@@ -4882,7 +5170,7 @@
               </a:defRPr>
             </a:pPr>
             <a:r>
-              <a:t>Monitor observes transactions</a:t>
+              <a:t>2. Protocol verification layer</a:t>
             </a:r>
           </a:p>
         </p:txBody>
@@ -4895,15 +5183,13 @@
         </p:nvSpPr>
         <p:spPr>
           <a:xfrm>
-            <a:off x="548640" y="1143000"/>
-            <a:ext cx="11064240" cy="5029200"/>
+            <a:off x="548640" y="1234440"/>
+            <a:ext cx="5303520" cy="4754880"/>
           </a:xfrm>
           <a:prstGeom prst="rect">
             <a:avLst/>
           </a:prstGeom>
-          <a:solidFill>
-            <a:srgbClr val="F4F4F4"/>
-          </a:solidFill>
+          <a:noFill/>
         </p:spPr>
         <p:txBody>
           <a:bodyPr wrap="square">
@@ -4916,313 +5202,143 @@
                 <a:spcPts val="2200"/>
               </a:lnSpc>
               <a:spcAft>
-                <a:spcPts val="400"/>
-              </a:spcAft>
-              <a:defRPr sz="2000" b="0">
-                <a:solidFill>
-                  <a:srgbClr val="333333"/>
-                </a:solidFill>
-                <a:latin typeface="Consolas"/>
-              </a:defRPr>
-            </a:pPr>
-            <a:r>
-              <a:t>class stream_monitor extends uvm_component;</a:t>
-            </a:r>
-          </a:p>
-          <a:p>
-            <a:pPr>
-              <a:lnSpc>
-                <a:spcPts val="2200"/>
-              </a:lnSpc>
-              <a:spcAft>
-                <a:spcPts val="400"/>
-              </a:spcAft>
-              <a:defRPr sz="2000" b="0">
-                <a:solidFill>
-                  <a:srgbClr val="333333"/>
-                </a:solidFill>
-                <a:latin typeface="Consolas"/>
-              </a:defRPr>
-            </a:pPr>
-          </a:p>
-          <a:p>
-            <a:pPr>
-              <a:lnSpc>
-                <a:spcPts val="2200"/>
-              </a:lnSpc>
-              <a:spcAft>
-                <a:spcPts val="400"/>
-              </a:spcAft>
-              <a:defRPr sz="2000" b="0">
-                <a:solidFill>
-                  <a:srgbClr val="333333"/>
-                </a:solidFill>
-                <a:latin typeface="Consolas"/>
-              </a:defRPr>
-            </a:pPr>
-            <a:r>
-              <a:t>  `uvm_component_utils(stream_monitor)</a:t>
-            </a:r>
-          </a:p>
-          <a:p>
-            <a:pPr>
-              <a:lnSpc>
-                <a:spcPts val="2200"/>
-              </a:lnSpc>
-              <a:spcAft>
-                <a:spcPts val="400"/>
-              </a:spcAft>
-              <a:defRPr sz="2000" b="0">
-                <a:solidFill>
-                  <a:srgbClr val="333333"/>
-                </a:solidFill>
-                <a:latin typeface="Consolas"/>
-              </a:defRPr>
-            </a:pPr>
-          </a:p>
-          <a:p>
-            <a:pPr>
-              <a:lnSpc>
-                <a:spcPts val="2200"/>
-              </a:lnSpc>
-              <a:spcAft>
-                <a:spcPts val="400"/>
-              </a:spcAft>
-              <a:defRPr sz="2000" b="0">
-                <a:solidFill>
-                  <a:srgbClr val="333333"/>
-                </a:solidFill>
-                <a:latin typeface="Consolas"/>
-              </a:defRPr>
-            </a:pPr>
-            <a:r>
-              <a:t>  virtual stream_if.slave vif;</a:t>
-            </a:r>
-          </a:p>
-          <a:p>
-            <a:pPr>
-              <a:lnSpc>
-                <a:spcPts val="2200"/>
-              </a:lnSpc>
-              <a:spcAft>
-                <a:spcPts val="400"/>
-              </a:spcAft>
-              <a:defRPr sz="2000" b="0">
-                <a:solidFill>
-                  <a:srgbClr val="333333"/>
-                </a:solidFill>
-                <a:latin typeface="Consolas"/>
-              </a:defRPr>
-            </a:pPr>
-            <a:r>
-              <a:t>  uvm_analysis_port #(stream_item) ap;</a:t>
-            </a:r>
-          </a:p>
-          <a:p>
-            <a:pPr>
-              <a:lnSpc>
-                <a:spcPts val="2200"/>
-              </a:lnSpc>
-              <a:spcAft>
-                <a:spcPts val="400"/>
-              </a:spcAft>
-              <a:defRPr sz="2000" b="0">
-                <a:solidFill>
-                  <a:srgbClr val="333333"/>
-                </a:solidFill>
-                <a:latin typeface="Consolas"/>
-              </a:defRPr>
-            </a:pPr>
-          </a:p>
-          <a:p>
-            <a:pPr>
-              <a:lnSpc>
-                <a:spcPts val="2200"/>
-              </a:lnSpc>
-              <a:spcAft>
-                <a:spcPts val="400"/>
-              </a:spcAft>
-              <a:defRPr sz="2000" b="0">
-                <a:solidFill>
-                  <a:srgbClr val="333333"/>
-                </a:solidFill>
-                <a:latin typeface="Consolas"/>
-              </a:defRPr>
-            </a:pPr>
-            <a:r>
-              <a:t>  function new(string name, uvm_component parent);</a:t>
-            </a:r>
-          </a:p>
-          <a:p>
-            <a:pPr>
-              <a:lnSpc>
-                <a:spcPts val="2200"/>
-              </a:lnSpc>
-              <a:spcAft>
-                <a:spcPts val="400"/>
-              </a:spcAft>
-              <a:defRPr sz="2000" b="0">
-                <a:solidFill>
-                  <a:srgbClr val="333333"/>
-                </a:solidFill>
-                <a:latin typeface="Consolas"/>
-              </a:defRPr>
-            </a:pPr>
-            <a:r>
-              <a:t>    super.new(name, parent);</a:t>
-            </a:r>
-          </a:p>
-          <a:p>
-            <a:pPr>
-              <a:lnSpc>
-                <a:spcPts val="2200"/>
-              </a:lnSpc>
-              <a:spcAft>
-                <a:spcPts val="400"/>
-              </a:spcAft>
-              <a:defRPr sz="2000" b="0">
-                <a:solidFill>
-                  <a:srgbClr val="333333"/>
-                </a:solidFill>
-                <a:latin typeface="Consolas"/>
-              </a:defRPr>
-            </a:pPr>
-            <a:r>
-              <a:t>    ap = new("ap", this);</a:t>
-            </a:r>
-          </a:p>
-          <a:p>
-            <a:pPr>
-              <a:lnSpc>
-                <a:spcPts val="2200"/>
-              </a:lnSpc>
-              <a:spcAft>
-                <a:spcPts val="400"/>
-              </a:spcAft>
-              <a:defRPr sz="2000" b="0">
-                <a:solidFill>
-                  <a:srgbClr val="333333"/>
-                </a:solidFill>
-                <a:latin typeface="Consolas"/>
-              </a:defRPr>
-            </a:pPr>
-            <a:r>
-              <a:t>  endfunction</a:t>
-            </a:r>
-          </a:p>
-          <a:p>
-            <a:pPr>
-              <a:lnSpc>
-                <a:spcPts val="2200"/>
-              </a:lnSpc>
-              <a:spcAft>
-                <a:spcPts val="400"/>
-              </a:spcAft>
-              <a:defRPr sz="2000" b="0">
-                <a:solidFill>
-                  <a:srgbClr val="333333"/>
-                </a:solidFill>
-                <a:latin typeface="Consolas"/>
-              </a:defRPr>
-            </a:pPr>
-          </a:p>
-          <a:p>
-            <a:pPr>
-              <a:lnSpc>
-                <a:spcPts val="2200"/>
-              </a:lnSpc>
-              <a:spcAft>
-                <a:spcPts val="400"/>
-              </a:spcAft>
-              <a:defRPr sz="2000" b="0">
-                <a:solidFill>
-                  <a:srgbClr val="333333"/>
-                </a:solidFill>
-                <a:latin typeface="Consolas"/>
-              </a:defRPr>
-            </a:pPr>
-            <a:r>
-              <a:t>  task run_phase(uvm_phase phase);</a:t>
-            </a:r>
-          </a:p>
-          <a:p>
-            <a:pPr>
-              <a:lnSpc>
-                <a:spcPts val="2200"/>
-              </a:lnSpc>
-              <a:spcAft>
-                <a:spcPts val="400"/>
-              </a:spcAft>
-              <a:defRPr sz="2000" b="0">
-                <a:solidFill>
-                  <a:srgbClr val="333333"/>
-                </a:solidFill>
-                <a:latin typeface="Consolas"/>
-              </a:defRPr>
-            </a:pPr>
-            <a:r>
-              <a:t>    stream_item tr;</a:t>
-            </a:r>
-          </a:p>
-          <a:p>
-            <a:pPr>
-              <a:lnSpc>
-                <a:spcPts val="2200"/>
-              </a:lnSpc>
-              <a:spcAft>
-                <a:spcPts val="400"/>
-              </a:spcAft>
-              <a:defRPr sz="2000" b="0">
-                <a:solidFill>
-                  <a:srgbClr val="333333"/>
-                </a:solidFill>
-                <a:latin typeface="Consolas"/>
-              </a:defRPr>
-            </a:pPr>
-          </a:p>
-          <a:p>
-            <a:pPr>
-              <a:lnSpc>
-                <a:spcPts val="2200"/>
-              </a:lnSpc>
-              <a:spcAft>
-                <a:spcPts val="400"/>
-              </a:spcAft>
-              <a:defRPr sz="2000" b="0">
-                <a:solidFill>
-                  <a:srgbClr val="333333"/>
-                </a:solidFill>
-                <a:latin typeface="Consolas"/>
-              </a:defRPr>
-            </a:pPr>
-            <a:r>
-              <a:t>    if (vif == null) begin</a:t>
-            </a:r>
-          </a:p>
-          <a:p>
-            <a:pPr>
-              <a:lnSpc>
-                <a:spcPts val="2200"/>
-              </a:lnSpc>
-              <a:spcAft>
-                <a:spcPts val="400"/>
-              </a:spcAft>
-              <a:defRPr sz="2000" b="0">
-                <a:solidFill>
-                  <a:srgbClr val="333333"/>
-                </a:solidFill>
-                <a:latin typeface="Consolas"/>
-              </a:defRPr>
-            </a:pPr>
-            <a:r>
-              <a:t># ...</a:t>
-            </a:r>
-          </a:p>
-        </p:txBody>
-      </p:sp>
-      <p:sp>
-        <p:nvSpPr>
-          <p:cNvPr id="4" name="TextBox 3"/>
+                <a:spcPts val="1000"/>
+              </a:spcAft>
+              <a:defRPr sz="2000" b="0">
+                <a:solidFill>
+                  <a:srgbClr val="333333"/>
+                </a:solidFill>
+                <a:latin typeface="Calibri"/>
+              </a:defRPr>
+            </a:pPr>
+            <a:r>
+              <a:t>• Dedicated protocol checker (SVA</a:t>
+            </a:r>
+          </a:p>
+          <a:p>
+            <a:pPr>
+              <a:lnSpc>
+                <a:spcPts val="2200"/>
+              </a:lnSpc>
+              <a:spcAft>
+                <a:spcPts val="1000"/>
+              </a:spcAft>
+              <a:defRPr sz="2000" b="0">
+                <a:solidFill>
+                  <a:srgbClr val="333333"/>
+                </a:solidFill>
+                <a:latin typeface="Calibri"/>
+              </a:defRPr>
+            </a:pPr>
+            <a:r>
+              <a:t>      or monitor-based) separate from</a:t>
+            </a:r>
+          </a:p>
+          <a:p>
+            <a:pPr>
+              <a:lnSpc>
+                <a:spcPts val="2200"/>
+              </a:lnSpc>
+              <a:spcAft>
+                <a:spcPts val="1000"/>
+              </a:spcAft>
+              <a:defRPr sz="2000" b="0">
+                <a:solidFill>
+                  <a:srgbClr val="333333"/>
+                </a:solidFill>
+                <a:latin typeface="Calibri"/>
+              </a:defRPr>
+            </a:pPr>
+            <a:r>
+              <a:t>      scoreboard data checks.</a:t>
+            </a:r>
+          </a:p>
+          <a:p>
+            <a:pPr>
+              <a:lnSpc>
+                <a:spcPts val="2200"/>
+              </a:lnSpc>
+              <a:spcAft>
+                <a:spcPts val="1000"/>
+              </a:spcAft>
+              <a:defRPr sz="2000" b="0">
+                <a:solidFill>
+                  <a:srgbClr val="333333"/>
+                </a:solidFill>
+                <a:latin typeface="Calibri"/>
+              </a:defRPr>
+            </a:pPr>
+            <a:r>
+              <a:t>• `PROTOCOL_VERIFICATION_PLAN.md`</a:t>
+            </a:r>
+          </a:p>
+          <a:p>
+            <a:pPr>
+              <a:lnSpc>
+                <a:spcPts val="2200"/>
+              </a:lnSpc>
+              <a:spcAft>
+                <a:spcPts val="1000"/>
+              </a:spcAft>
+              <a:defRPr sz="2000" b="0">
+                <a:solidFill>
+                  <a:srgbClr val="333333"/>
+                </a:solidFill>
+                <a:latin typeface="Calibri"/>
+              </a:defRPr>
+            </a:pPr>
+            <a:r>
+              <a:t>      lists rules, coverage, and</a:t>
+            </a:r>
+          </a:p>
+          <a:p>
+            <a:pPr>
+              <a:lnSpc>
+                <a:spcPts val="2200"/>
+              </a:lnSpc>
+              <a:spcAft>
+                <a:spcPts val="1000"/>
+              </a:spcAft>
+              <a:defRPr sz="2000" b="0">
+                <a:solidFill>
+                  <a:srgbClr val="333333"/>
+                </a:solidFill>
+                <a:latin typeface="Calibri"/>
+              </a:defRPr>
+            </a:pPr>
+            <a:r>
+              <a:t>      integration with agents.</a:t>
+            </a:r>
+          </a:p>
+        </p:txBody>
+      </p:sp>
+      <p:pic>
+        <p:nvPicPr>
+          <p:cNvPr id="4" name="Picture 3" descr="verification_architecture.png"/>
+          <p:cNvPicPr>
+            <a:picLocks noChangeAspect="1"/>
+          </p:cNvPicPr>
+          <p:nvPr/>
+        </p:nvPicPr>
+        <p:blipFill>
+          <a:blip r:embed="rId2"/>
+          <a:stretch>
+            <a:fillRect/>
+          </a:stretch>
+        </p:blipFill>
+        <p:spPr>
+          <a:xfrm>
+            <a:off x="6172200" y="2094547"/>
+            <a:ext cx="5394960" cy="3034665"/>
+          </a:xfrm>
+          <a:prstGeom prst="rect">
+            <a:avLst/>
+          </a:prstGeom>
+        </p:spPr>
+      </p:pic>
+      <p:sp>
+        <p:nvSpPr>
+          <p:cNvPr id="5" name="TextBox 4"/>
           <p:cNvSpPr txBox="1"/>
           <p:nvPr/>
         </p:nvSpPr>
@@ -5311,7 +5427,7 @@
               </a:defRPr>
             </a:pPr>
             <a:r>
-              <a:t>Multi-agent architecture template</a:t>
+              <a:t>3. System integration view</a:t>
             </a:r>
           </a:p>
         </p:txBody>
@@ -5324,15 +5440,13 @@
         </p:nvSpPr>
         <p:spPr>
           <a:xfrm>
-            <a:off x="548640" y="1143000"/>
-            <a:ext cx="11064240" cy="5029200"/>
+            <a:off x="548640" y="1234440"/>
+            <a:ext cx="11064240" cy="4937760"/>
           </a:xfrm>
           <a:prstGeom prst="rect">
             <a:avLst/>
           </a:prstGeom>
-          <a:solidFill>
-            <a:srgbClr val="F4F4F4"/>
-          </a:solidFill>
+          <a:noFill/>
         </p:spPr>
         <p:txBody>
           <a:bodyPr wrap="square">
@@ -5345,322 +5459,74 @@
                 <a:spcPts val="2200"/>
               </a:lnSpc>
               <a:spcAft>
-                <a:spcPts val="400"/>
-              </a:spcAft>
-              <a:defRPr sz="2000" b="0">
-                <a:solidFill>
-                  <a:srgbClr val="333333"/>
-                </a:solidFill>
-                <a:latin typeface="Consolas"/>
-              </a:defRPr>
-            </a:pPr>
-            <a:r>
-              <a:t># Multi-Agent &amp; Multi-Channel Architecture (Module 6)</a:t>
-            </a:r>
-          </a:p>
-          <a:p>
-            <a:pPr>
-              <a:lnSpc>
-                <a:spcPts val="2200"/>
-              </a:lnSpc>
-              <a:spcAft>
-                <a:spcPts val="400"/>
-              </a:spcAft>
-              <a:defRPr sz="2000" b="0">
-                <a:solidFill>
-                  <a:srgbClr val="333333"/>
-                </a:solidFill>
-                <a:latin typeface="Consolas"/>
-              </a:defRPr>
-            </a:pPr>
-          </a:p>
-          <a:p>
-            <a:pPr>
-              <a:lnSpc>
-                <a:spcPts val="2200"/>
-              </a:lnSpc>
-              <a:spcAft>
-                <a:spcPts val="400"/>
-              </a:spcAft>
-              <a:defRPr sz="2000" b="0">
-                <a:solidFill>
-                  <a:srgbClr val="333333"/>
-                </a:solidFill>
-                <a:latin typeface="Consolas"/>
-              </a:defRPr>
-            </a:pPr>
-            <a:r>
-              <a:t>&gt; **Purpose**: Describe the architecture and coordination of multi-</a:t>
-            </a:r>
-          </a:p>
-          <a:p>
-            <a:pPr>
-              <a:lnSpc>
-                <a:spcPts val="2200"/>
-              </a:lnSpc>
-              <a:spcAft>
-                <a:spcPts val="400"/>
-              </a:spcAft>
-              <a:defRPr sz="2000" b="0">
-                <a:solidFill>
-                  <a:srgbClr val="333333"/>
-                </a:solidFill>
-                <a:latin typeface="Consolas"/>
-              </a:defRPr>
-            </a:pPr>
-            <a:r>
-              <a:t>agent, multi-channel UVM environments for your DUT.</a:t>
-            </a:r>
-          </a:p>
-          <a:p>
-            <a:pPr>
-              <a:lnSpc>
-                <a:spcPts val="2200"/>
-              </a:lnSpc>
-              <a:spcAft>
-                <a:spcPts val="400"/>
-              </a:spcAft>
-              <a:defRPr sz="2000" b="0">
-                <a:solidFill>
-                  <a:srgbClr val="333333"/>
-                </a:solidFill>
-                <a:latin typeface="Consolas"/>
-              </a:defRPr>
-            </a:pPr>
-            <a:r>
-              <a:t>&gt; **Module**: 6 – Complex Multi-Agent &amp; Protocol Testbenches (SV/UVM)</a:t>
-            </a:r>
-          </a:p>
-          <a:p>
-            <a:pPr>
-              <a:lnSpc>
-                <a:spcPts val="2200"/>
-              </a:lnSpc>
-              <a:spcAft>
-                <a:spcPts val="400"/>
-              </a:spcAft>
-              <a:defRPr sz="2000" b="0">
-                <a:solidFill>
-                  <a:srgbClr val="333333"/>
-                </a:solidFill>
-                <a:latin typeface="Consolas"/>
-              </a:defRPr>
-            </a:pPr>
-          </a:p>
-          <a:p>
-            <a:pPr>
-              <a:lnSpc>
-                <a:spcPts val="2200"/>
-              </a:lnSpc>
-              <a:spcAft>
-                <a:spcPts val="400"/>
-              </a:spcAft>
-              <a:defRPr sz="2000" b="0">
-                <a:solidFill>
-                  <a:srgbClr val="333333"/>
-                </a:solidFill>
-                <a:latin typeface="Consolas"/>
-              </a:defRPr>
-            </a:pPr>
-            <a:r>
-              <a:t>&gt; **Instructions**: Fill in this document for your design. Copy from</a:t>
-            </a:r>
-          </a:p>
-          <a:p>
-            <a:pPr>
-              <a:lnSpc>
-                <a:spcPts val="2200"/>
-              </a:lnSpc>
-              <a:spcAft>
-                <a:spcPts val="400"/>
-              </a:spcAft>
-              <a:defRPr sz="2000" b="0">
-                <a:solidFill>
-                  <a:srgbClr val="333333"/>
-                </a:solidFill>
-                <a:latin typeface="Consolas"/>
-              </a:defRPr>
-            </a:pPr>
-            <a:r>
-              <a:t>`module6/templates/` if needed, or edit the file in `module6/` directly.</a:t>
-            </a:r>
-          </a:p>
-          <a:p>
-            <a:pPr>
-              <a:lnSpc>
-                <a:spcPts val="2200"/>
-              </a:lnSpc>
-              <a:spcAft>
-                <a:spcPts val="400"/>
-              </a:spcAft>
-              <a:defRPr sz="2000" b="0">
-                <a:solidFill>
-                  <a:srgbClr val="333333"/>
-                </a:solidFill>
-                <a:latin typeface="Consolas"/>
-              </a:defRPr>
-            </a:pPr>
-            <a:r>
-              <a:t>Reference: `module6/.solutions/`.</a:t>
-            </a:r>
-          </a:p>
-          <a:p>
-            <a:pPr>
-              <a:lnSpc>
-                <a:spcPts val="2200"/>
-              </a:lnSpc>
-              <a:spcAft>
-                <a:spcPts val="400"/>
-              </a:spcAft>
-              <a:defRPr sz="2000" b="0">
-                <a:solidFill>
-                  <a:srgbClr val="333333"/>
-                </a:solidFill>
-                <a:latin typeface="Consolas"/>
-              </a:defRPr>
-            </a:pPr>
-          </a:p>
-          <a:p>
-            <a:pPr>
-              <a:lnSpc>
-                <a:spcPts val="2200"/>
-              </a:lnSpc>
-              <a:spcAft>
-                <a:spcPts val="400"/>
-              </a:spcAft>
-              <a:defRPr sz="2000" b="0">
-                <a:solidFill>
-                  <a:srgbClr val="333333"/>
-                </a:solidFill>
-                <a:latin typeface="Consolas"/>
-              </a:defRPr>
-            </a:pPr>
-            <a:r>
-              <a:t>## 1. Context</a:t>
-            </a:r>
-          </a:p>
-          <a:p>
-            <a:pPr>
-              <a:lnSpc>
-                <a:spcPts val="2200"/>
-              </a:lnSpc>
-              <a:spcAft>
-                <a:spcPts val="400"/>
-              </a:spcAft>
-              <a:defRPr sz="2000" b="0">
-                <a:solidFill>
-                  <a:srgbClr val="333333"/>
-                </a:solidFill>
-                <a:latin typeface="Consolas"/>
-              </a:defRPr>
-            </a:pPr>
-          </a:p>
-          <a:p>
-            <a:pPr>
-              <a:lnSpc>
-                <a:spcPts val="2200"/>
-              </a:lnSpc>
-              <a:spcAft>
-                <a:spcPts val="400"/>
-              </a:spcAft>
-              <a:defRPr sz="2000" b="0">
-                <a:solidFill>
-                  <a:srgbClr val="333333"/>
-                </a:solidFill>
-                <a:latin typeface="Consolas"/>
-              </a:defRPr>
-            </a:pPr>
-            <a:r>
-              <a:t>&lt;!-- TODO: DUT/System, interfaces/channels, existing env. Why a multi-</a:t>
-            </a:r>
-          </a:p>
-          <a:p>
-            <a:pPr>
-              <a:lnSpc>
-                <a:spcPts val="2200"/>
-              </a:lnSpc>
-              <a:spcAft>
-                <a:spcPts val="400"/>
-              </a:spcAft>
-              <a:defRPr sz="2000" b="0">
-                <a:solidFill>
-                  <a:srgbClr val="333333"/>
-                </a:solidFill>
-                <a:latin typeface="Consolas"/>
-              </a:defRPr>
-            </a:pPr>
-            <a:r>
-              <a:t>agent design is required. --&gt;</a:t>
-            </a:r>
-          </a:p>
-          <a:p>
-            <a:pPr>
-              <a:lnSpc>
-                <a:spcPts val="2200"/>
-              </a:lnSpc>
-              <a:spcAft>
-                <a:spcPts val="400"/>
-              </a:spcAft>
-              <a:defRPr sz="2000" b="0">
-                <a:solidFill>
-                  <a:srgbClr val="333333"/>
-                </a:solidFill>
-                <a:latin typeface="Consolas"/>
-              </a:defRPr>
-            </a:pPr>
-          </a:p>
-          <a:p>
-            <a:pPr>
-              <a:lnSpc>
-                <a:spcPts val="2200"/>
-              </a:lnSpc>
-              <a:spcAft>
-                <a:spcPts val="400"/>
-              </a:spcAft>
-              <a:defRPr sz="2000" b="0">
-                <a:solidFill>
-                  <a:srgbClr val="333333"/>
-                </a:solidFill>
-                <a:latin typeface="Consolas"/>
-              </a:defRPr>
-            </a:pPr>
-            <a:r>
-              <a:t>## 2. High-Level Environment Diagram</a:t>
-            </a:r>
-          </a:p>
-          <a:p>
-            <a:pPr>
-              <a:lnSpc>
-                <a:spcPts val="2200"/>
-              </a:lnSpc>
-              <a:spcAft>
-                <a:spcPts val="400"/>
-              </a:spcAft>
-              <a:defRPr sz="2000" b="0">
-                <a:solidFill>
-                  <a:srgbClr val="333333"/>
-                </a:solidFill>
-                <a:latin typeface="Consolas"/>
-              </a:defRPr>
-            </a:pPr>
-          </a:p>
-          <a:p>
-            <a:pPr>
-              <a:lnSpc>
-                <a:spcPts val="2200"/>
-              </a:lnSpc>
-              <a:spcAft>
-                <a:spcPts val="400"/>
-              </a:spcAft>
-              <a:defRPr sz="2000" b="0">
-                <a:solidFill>
-                  <a:srgbClr val="333333"/>
-                </a:solidFill>
-                <a:latin typeface="Consolas"/>
-              </a:defRPr>
-            </a:pPr>
-            <a:r>
-              <a:t>&lt;!-- TODO: Describe multi-agent env hierarchy (uvm_test_top, env,</a:t>
+                <a:spcPts val="1000"/>
+              </a:spcAft>
+              <a:defRPr sz="2000" b="0">
+                <a:solidFill>
+                  <a:srgbClr val="333333"/>
+                </a:solidFill>
+                <a:latin typeface="Calibri"/>
+              </a:defRPr>
+            </a:pPr>
+            <a:r>
+              <a:t>• `INTEGRATION_PLAN.md` describes how block-level env</a:t>
+            </a:r>
+          </a:p>
+          <a:p>
+            <a:pPr>
+              <a:lnSpc>
+                <a:spcPts val="2200"/>
+              </a:lnSpc>
+              <a:spcAft>
+                <a:spcPts val="1000"/>
+              </a:spcAft>
+              <a:defRPr sz="2000" b="0">
+                <a:solidFill>
+                  <a:srgbClr val="333333"/>
+                </a:solidFill>
+                <a:latin typeface="Calibri"/>
+              </a:defRPr>
+            </a:pPr>
+            <a:r>
+              <a:t>      connects to subsystem tests.</a:t>
+            </a:r>
+          </a:p>
+          <a:p>
+            <a:pPr>
+              <a:lnSpc>
+                <a:spcPts val="2200"/>
+              </a:lnSpc>
+              <a:spcAft>
+                <a:spcPts val="1000"/>
+              </a:spcAft>
+              <a:defRPr sz="2000" b="0">
+                <a:solidFill>
+                  <a:srgbClr val="333333"/>
+                </a:solidFill>
+                <a:latin typeface="Calibri"/>
+              </a:defRPr>
+            </a:pPr>
+            <a:r>
+              <a:t>• Reuse agents/VIP across DUT variants via</a:t>
+            </a:r>
+          </a:p>
+          <a:p>
+            <a:pPr>
+              <a:lnSpc>
+                <a:spcPts val="2200"/>
+              </a:lnSpc>
+              <a:spcAft>
+                <a:spcPts val="1000"/>
+              </a:spcAft>
+              <a:defRPr sz="2000" b="0">
+                <a:solidFill>
+                  <a:srgbClr val="333333"/>
+                </a:solidFill>
+                <a:latin typeface="Calibri"/>
+              </a:defRPr>
+            </a:pPr>
+            <a:r>
+              <a:t>      configuration and factory overrides.</a:t>
             </a:r>
           </a:p>
         </p:txBody>
@@ -5730,8 +5596,8 @@
         </p:nvSpPr>
         <p:spPr>
           <a:xfrm>
-            <a:off x="548640" y="2743200"/>
-            <a:ext cx="11064240" cy="1371600"/>
+            <a:off x="548640" y="411480"/>
+            <a:ext cx="11064240" cy="777240"/>
           </a:xfrm>
           <a:prstGeom prst="rect">
             <a:avLst/>
@@ -5744,11 +5610,11 @@
           </a:bodyPr>
           <a:lstStyle/>
           <a:p>
-            <a:pPr algn="ctr">
-              <a:lnSpc>
-                <a:spcPts val="2200"/>
-              </a:lnSpc>
-              <a:defRPr sz="3600" b="1">
+            <a:pPr>
+              <a:lnSpc>
+                <a:spcPts val="2200"/>
+              </a:lnSpc>
+              <a:defRPr sz="2800" b="1">
                 <a:solidFill>
                   <a:srgbClr val="1A1A2E"/>
                 </a:solidFill>
@@ -5756,7 +5622,7 @@
               </a:defRPr>
             </a:pPr>
             <a:r>
-              <a:t>Verification &amp; testing methods</a:t>
+              <a:t>Monitor observes transactions</a:t>
             </a:r>
           </a:p>
         </p:txBody>
@@ -5764,6 +5630,339 @@
       <p:sp>
         <p:nvSpPr>
           <p:cNvPr id="3" name="TextBox 2"/>
+          <p:cNvSpPr txBox="1"/>
+          <p:nvPr/>
+        </p:nvSpPr>
+        <p:spPr>
+          <a:xfrm>
+            <a:off x="548640" y="1143000"/>
+            <a:ext cx="11064240" cy="5029200"/>
+          </a:xfrm>
+          <a:prstGeom prst="rect">
+            <a:avLst/>
+          </a:prstGeom>
+          <a:solidFill>
+            <a:srgbClr val="F4F4F4"/>
+          </a:solidFill>
+        </p:spPr>
+        <p:txBody>
+          <a:bodyPr wrap="square">
+            <a:noAutofit/>
+          </a:bodyPr>
+          <a:lstStyle/>
+          <a:p>
+            <a:pPr>
+              <a:lnSpc>
+                <a:spcPts val="2200"/>
+              </a:lnSpc>
+              <a:spcAft>
+                <a:spcPts val="400"/>
+              </a:spcAft>
+              <a:defRPr sz="2000" b="0">
+                <a:solidFill>
+                  <a:srgbClr val="333333"/>
+                </a:solidFill>
+                <a:latin typeface="Consolas"/>
+              </a:defRPr>
+            </a:pPr>
+            <a:r>
+              <a:t>class stream_monitor extends uvm_component;</a:t>
+            </a:r>
+          </a:p>
+          <a:p>
+            <a:pPr>
+              <a:lnSpc>
+                <a:spcPts val="2200"/>
+              </a:lnSpc>
+              <a:spcAft>
+                <a:spcPts val="400"/>
+              </a:spcAft>
+              <a:defRPr sz="2000" b="0">
+                <a:solidFill>
+                  <a:srgbClr val="333333"/>
+                </a:solidFill>
+                <a:latin typeface="Consolas"/>
+              </a:defRPr>
+            </a:pPr>
+          </a:p>
+          <a:p>
+            <a:pPr>
+              <a:lnSpc>
+                <a:spcPts val="2200"/>
+              </a:lnSpc>
+              <a:spcAft>
+                <a:spcPts val="400"/>
+              </a:spcAft>
+              <a:defRPr sz="2000" b="0">
+                <a:solidFill>
+                  <a:srgbClr val="333333"/>
+                </a:solidFill>
+                <a:latin typeface="Consolas"/>
+              </a:defRPr>
+            </a:pPr>
+            <a:r>
+              <a:t>  `uvm_component_utils(stream_monitor)</a:t>
+            </a:r>
+          </a:p>
+          <a:p>
+            <a:pPr>
+              <a:lnSpc>
+                <a:spcPts val="2200"/>
+              </a:lnSpc>
+              <a:spcAft>
+                <a:spcPts val="400"/>
+              </a:spcAft>
+              <a:defRPr sz="2000" b="0">
+                <a:solidFill>
+                  <a:srgbClr val="333333"/>
+                </a:solidFill>
+                <a:latin typeface="Consolas"/>
+              </a:defRPr>
+            </a:pPr>
+          </a:p>
+          <a:p>
+            <a:pPr>
+              <a:lnSpc>
+                <a:spcPts val="2200"/>
+              </a:lnSpc>
+              <a:spcAft>
+                <a:spcPts val="400"/>
+              </a:spcAft>
+              <a:defRPr sz="2000" b="0">
+                <a:solidFill>
+                  <a:srgbClr val="333333"/>
+                </a:solidFill>
+                <a:latin typeface="Consolas"/>
+              </a:defRPr>
+            </a:pPr>
+            <a:r>
+              <a:t>  virtual stream_if.slave vif;</a:t>
+            </a:r>
+          </a:p>
+          <a:p>
+            <a:pPr>
+              <a:lnSpc>
+                <a:spcPts val="2200"/>
+              </a:lnSpc>
+              <a:spcAft>
+                <a:spcPts val="400"/>
+              </a:spcAft>
+              <a:defRPr sz="2000" b="0">
+                <a:solidFill>
+                  <a:srgbClr val="333333"/>
+                </a:solidFill>
+                <a:latin typeface="Consolas"/>
+              </a:defRPr>
+            </a:pPr>
+            <a:r>
+              <a:t>  uvm_analysis_port #(stream_item) ap;</a:t>
+            </a:r>
+          </a:p>
+          <a:p>
+            <a:pPr>
+              <a:lnSpc>
+                <a:spcPts val="2200"/>
+              </a:lnSpc>
+              <a:spcAft>
+                <a:spcPts val="400"/>
+              </a:spcAft>
+              <a:defRPr sz="2000" b="0">
+                <a:solidFill>
+                  <a:srgbClr val="333333"/>
+                </a:solidFill>
+                <a:latin typeface="Consolas"/>
+              </a:defRPr>
+            </a:pPr>
+          </a:p>
+          <a:p>
+            <a:pPr>
+              <a:lnSpc>
+                <a:spcPts val="2200"/>
+              </a:lnSpc>
+              <a:spcAft>
+                <a:spcPts val="400"/>
+              </a:spcAft>
+              <a:defRPr sz="2000" b="0">
+                <a:solidFill>
+                  <a:srgbClr val="333333"/>
+                </a:solidFill>
+                <a:latin typeface="Consolas"/>
+              </a:defRPr>
+            </a:pPr>
+            <a:r>
+              <a:t>  function new(string name, uvm_component parent);</a:t>
+            </a:r>
+          </a:p>
+          <a:p>
+            <a:pPr>
+              <a:lnSpc>
+                <a:spcPts val="2200"/>
+              </a:lnSpc>
+              <a:spcAft>
+                <a:spcPts val="400"/>
+              </a:spcAft>
+              <a:defRPr sz="2000" b="0">
+                <a:solidFill>
+                  <a:srgbClr val="333333"/>
+                </a:solidFill>
+                <a:latin typeface="Consolas"/>
+              </a:defRPr>
+            </a:pPr>
+            <a:r>
+              <a:t>    super.new(name, parent);</a:t>
+            </a:r>
+          </a:p>
+          <a:p>
+            <a:pPr>
+              <a:lnSpc>
+                <a:spcPts val="2200"/>
+              </a:lnSpc>
+              <a:spcAft>
+                <a:spcPts val="400"/>
+              </a:spcAft>
+              <a:defRPr sz="2000" b="0">
+                <a:solidFill>
+                  <a:srgbClr val="333333"/>
+                </a:solidFill>
+                <a:latin typeface="Consolas"/>
+              </a:defRPr>
+            </a:pPr>
+            <a:r>
+              <a:t>    ap = new("ap", this);</a:t>
+            </a:r>
+          </a:p>
+          <a:p>
+            <a:pPr>
+              <a:lnSpc>
+                <a:spcPts val="2200"/>
+              </a:lnSpc>
+              <a:spcAft>
+                <a:spcPts val="400"/>
+              </a:spcAft>
+              <a:defRPr sz="2000" b="0">
+                <a:solidFill>
+                  <a:srgbClr val="333333"/>
+                </a:solidFill>
+                <a:latin typeface="Consolas"/>
+              </a:defRPr>
+            </a:pPr>
+            <a:r>
+              <a:t>  endfunction</a:t>
+            </a:r>
+          </a:p>
+          <a:p>
+            <a:pPr>
+              <a:lnSpc>
+                <a:spcPts val="2200"/>
+              </a:lnSpc>
+              <a:spcAft>
+                <a:spcPts val="400"/>
+              </a:spcAft>
+              <a:defRPr sz="2000" b="0">
+                <a:solidFill>
+                  <a:srgbClr val="333333"/>
+                </a:solidFill>
+                <a:latin typeface="Consolas"/>
+              </a:defRPr>
+            </a:pPr>
+          </a:p>
+          <a:p>
+            <a:pPr>
+              <a:lnSpc>
+                <a:spcPts val="2200"/>
+              </a:lnSpc>
+              <a:spcAft>
+                <a:spcPts val="400"/>
+              </a:spcAft>
+              <a:defRPr sz="2000" b="0">
+                <a:solidFill>
+                  <a:srgbClr val="333333"/>
+                </a:solidFill>
+                <a:latin typeface="Consolas"/>
+              </a:defRPr>
+            </a:pPr>
+            <a:r>
+              <a:t>  task run_phase(uvm_phase phase);</a:t>
+            </a:r>
+          </a:p>
+          <a:p>
+            <a:pPr>
+              <a:lnSpc>
+                <a:spcPts val="2200"/>
+              </a:lnSpc>
+              <a:spcAft>
+                <a:spcPts val="400"/>
+              </a:spcAft>
+              <a:defRPr sz="2000" b="0">
+                <a:solidFill>
+                  <a:srgbClr val="333333"/>
+                </a:solidFill>
+                <a:latin typeface="Consolas"/>
+              </a:defRPr>
+            </a:pPr>
+            <a:r>
+              <a:t>    stream_item tr;</a:t>
+            </a:r>
+          </a:p>
+          <a:p>
+            <a:pPr>
+              <a:lnSpc>
+                <a:spcPts val="2200"/>
+              </a:lnSpc>
+              <a:spcAft>
+                <a:spcPts val="400"/>
+              </a:spcAft>
+              <a:defRPr sz="2000" b="0">
+                <a:solidFill>
+                  <a:srgbClr val="333333"/>
+                </a:solidFill>
+                <a:latin typeface="Consolas"/>
+              </a:defRPr>
+            </a:pPr>
+          </a:p>
+          <a:p>
+            <a:pPr>
+              <a:lnSpc>
+                <a:spcPts val="2200"/>
+              </a:lnSpc>
+              <a:spcAft>
+                <a:spcPts val="400"/>
+              </a:spcAft>
+              <a:defRPr sz="2000" b="0">
+                <a:solidFill>
+                  <a:srgbClr val="333333"/>
+                </a:solidFill>
+                <a:latin typeface="Consolas"/>
+              </a:defRPr>
+            </a:pPr>
+            <a:r>
+              <a:t>    if (vif == null) begin</a:t>
+            </a:r>
+          </a:p>
+          <a:p>
+            <a:pPr>
+              <a:lnSpc>
+                <a:spcPts val="2200"/>
+              </a:lnSpc>
+              <a:spcAft>
+                <a:spcPts val="400"/>
+              </a:spcAft>
+              <a:defRPr sz="2000" b="0">
+                <a:solidFill>
+                  <a:srgbClr val="333333"/>
+                </a:solidFill>
+                <a:latin typeface="Consolas"/>
+              </a:defRPr>
+            </a:pPr>
+            <a:r>
+              <a:t># ...</a:t>
+            </a:r>
+          </a:p>
+        </p:txBody>
+      </p:sp>
+      <p:sp>
+        <p:nvSpPr>
+          <p:cNvPr id="4" name="TextBox 3"/>
           <p:cNvSpPr txBox="1"/>
           <p:nvPr/>
         </p:nvSpPr>
@@ -5852,7 +6051,7 @@
               </a:defRPr>
             </a:pPr>
             <a:r>
-              <a:t>1. Protocol rule testing</a:t>
+              <a:t>Multi-agent architecture template</a:t>
             </a:r>
           </a:p>
         </p:txBody>
@@ -5865,13 +6064,15 @@
         </p:nvSpPr>
         <p:spPr>
           <a:xfrm>
-            <a:off x="548640" y="1234440"/>
-            <a:ext cx="5303520" cy="4754880"/>
+            <a:off x="548640" y="1143000"/>
+            <a:ext cx="11064240" cy="5029200"/>
           </a:xfrm>
           <a:prstGeom prst="rect">
             <a:avLst/>
           </a:prstGeom>
-          <a:noFill/>
+          <a:solidFill>
+            <a:srgbClr val="F4F4F4"/>
+          </a:solidFill>
         </p:spPr>
         <p:txBody>
           <a:bodyPr wrap="square">
@@ -5884,162 +6085,329 @@
                 <a:spcPts val="2200"/>
               </a:lnSpc>
               <a:spcAft>
-                <a:spcPts val="1000"/>
-              </a:spcAft>
-              <a:defRPr sz="2000" b="0">
-                <a:solidFill>
-                  <a:srgbClr val="333333"/>
-                </a:solidFill>
-                <a:latin typeface="Calibri"/>
-              </a:defRPr>
-            </a:pPr>
-            <a:r>
-              <a:t>• Each protocol rule maps to</a:t>
-            </a:r>
-          </a:p>
-          <a:p>
-            <a:pPr>
-              <a:lnSpc>
-                <a:spcPts val="2200"/>
-              </a:lnSpc>
-              <a:spcAft>
-                <a:spcPts val="1000"/>
-              </a:spcAft>
-              <a:defRPr sz="2000" b="0">
-                <a:solidFill>
-                  <a:srgbClr val="333333"/>
-                </a:solidFill>
-                <a:latin typeface="Calibri"/>
-              </a:defRPr>
-            </a:pPr>
-            <a:r>
-              <a:t>      checker fires, coverpoints, and</a:t>
-            </a:r>
-          </a:p>
-          <a:p>
-            <a:pPr>
-              <a:lnSpc>
-                <a:spcPts val="2200"/>
-              </a:lnSpc>
-              <a:spcAft>
-                <a:spcPts val="1000"/>
-              </a:spcAft>
-              <a:defRPr sz="2000" b="0">
-                <a:solidFill>
-                  <a:srgbClr val="333333"/>
-                </a:solidFill>
-                <a:latin typeface="Calibri"/>
-              </a:defRPr>
-            </a:pPr>
-            <a:r>
-              <a:t>      at least one directed or random</a:t>
-            </a:r>
-          </a:p>
-          <a:p>
-            <a:pPr>
-              <a:lnSpc>
-                <a:spcPts val="2200"/>
-              </a:lnSpc>
-              <a:spcAft>
-                <a:spcPts val="1000"/>
-              </a:spcAft>
-              <a:defRPr sz="2000" b="0">
-                <a:solidFill>
-                  <a:srgbClr val="333333"/>
-                </a:solidFill>
-                <a:latin typeface="Calibri"/>
-              </a:defRPr>
-            </a:pPr>
-            <a:r>
-              <a:t>      test.</a:t>
-            </a:r>
-          </a:p>
-          <a:p>
-            <a:pPr>
-              <a:lnSpc>
-                <a:spcPts val="2200"/>
-              </a:lnSpc>
-              <a:spcAft>
-                <a:spcPts val="1000"/>
-              </a:spcAft>
-              <a:defRPr sz="2000" b="0">
-                <a:solidFill>
-                  <a:srgbClr val="333333"/>
-                </a:solidFill>
-                <a:latin typeface="Calibri"/>
-              </a:defRPr>
-            </a:pPr>
-            <a:r>
-              <a:t>• Illegal sequences and corner</a:t>
-            </a:r>
-          </a:p>
-          <a:p>
-            <a:pPr>
-              <a:lnSpc>
-                <a:spcPts val="2200"/>
-              </a:lnSpc>
-              <a:spcAft>
-                <a:spcPts val="1000"/>
-              </a:spcAft>
-              <a:defRPr sz="2000" b="0">
-                <a:solidFill>
-                  <a:srgbClr val="333333"/>
-                </a:solidFill>
-                <a:latin typeface="Calibri"/>
-              </a:defRPr>
-            </a:pPr>
-            <a:r>
-              <a:t>      timing documented with expected</a:t>
-            </a:r>
-          </a:p>
-          <a:p>
-            <a:pPr>
-              <a:lnSpc>
-                <a:spcPts val="2200"/>
-              </a:lnSpc>
-              <a:spcAft>
-                <a:spcPts val="1000"/>
-              </a:spcAft>
-              <a:defRPr sz="2000" b="0">
-                <a:solidFill>
-                  <a:srgbClr val="333333"/>
-                </a:solidFill>
-                <a:latin typeface="Calibri"/>
-              </a:defRPr>
-            </a:pPr>
-            <a:r>
-              <a:t>      checker behavior.</a:t>
-            </a:r>
-          </a:p>
-        </p:txBody>
-      </p:sp>
-      <p:pic>
-        <p:nvPicPr>
-          <p:cNvPr id="4" name="Picture 3" descr="testing_methods.png"/>
-          <p:cNvPicPr>
-            <a:picLocks noChangeAspect="1"/>
-          </p:cNvPicPr>
-          <p:nvPr/>
-        </p:nvPicPr>
-        <p:blipFill>
-          <a:blip r:embed="rId2"/>
-          <a:stretch>
-            <a:fillRect/>
-          </a:stretch>
-        </p:blipFill>
-        <p:spPr>
-          <a:xfrm>
-            <a:off x="6172200" y="2094547"/>
-            <a:ext cx="5394960" cy="3034665"/>
-          </a:xfrm>
-          <a:prstGeom prst="rect">
-            <a:avLst/>
-          </a:prstGeom>
-        </p:spPr>
-      </p:pic>
-      <p:sp>
-        <p:nvSpPr>
-          <p:cNvPr id="5" name="TextBox 4"/>
+                <a:spcPts val="400"/>
+              </a:spcAft>
+              <a:defRPr sz="2000" b="0">
+                <a:solidFill>
+                  <a:srgbClr val="333333"/>
+                </a:solidFill>
+                <a:latin typeface="Consolas"/>
+              </a:defRPr>
+            </a:pPr>
+            <a:r>
+              <a:t># Multi-Agent &amp; Multi-Channel Architecture (Module 6)</a:t>
+            </a:r>
+          </a:p>
+          <a:p>
+            <a:pPr>
+              <a:lnSpc>
+                <a:spcPts val="2200"/>
+              </a:lnSpc>
+              <a:spcAft>
+                <a:spcPts val="400"/>
+              </a:spcAft>
+              <a:defRPr sz="2000" b="0">
+                <a:solidFill>
+                  <a:srgbClr val="333333"/>
+                </a:solidFill>
+                <a:latin typeface="Consolas"/>
+              </a:defRPr>
+            </a:pPr>
+          </a:p>
+          <a:p>
+            <a:pPr>
+              <a:lnSpc>
+                <a:spcPts val="2200"/>
+              </a:lnSpc>
+              <a:spcAft>
+                <a:spcPts val="400"/>
+              </a:spcAft>
+              <a:defRPr sz="2000" b="0">
+                <a:solidFill>
+                  <a:srgbClr val="333333"/>
+                </a:solidFill>
+                <a:latin typeface="Consolas"/>
+              </a:defRPr>
+            </a:pPr>
+            <a:r>
+              <a:t>&gt; **Purpose**: Describe the architecture and coordination of multi-</a:t>
+            </a:r>
+          </a:p>
+          <a:p>
+            <a:pPr>
+              <a:lnSpc>
+                <a:spcPts val="2200"/>
+              </a:lnSpc>
+              <a:spcAft>
+                <a:spcPts val="400"/>
+              </a:spcAft>
+              <a:defRPr sz="2000" b="0">
+                <a:solidFill>
+                  <a:srgbClr val="333333"/>
+                </a:solidFill>
+                <a:latin typeface="Consolas"/>
+              </a:defRPr>
+            </a:pPr>
+            <a:r>
+              <a:t>agent, multi-channel UVM environments for your DUT.</a:t>
+            </a:r>
+          </a:p>
+          <a:p>
+            <a:pPr>
+              <a:lnSpc>
+                <a:spcPts val="2200"/>
+              </a:lnSpc>
+              <a:spcAft>
+                <a:spcPts val="400"/>
+              </a:spcAft>
+              <a:defRPr sz="2000" b="0">
+                <a:solidFill>
+                  <a:srgbClr val="333333"/>
+                </a:solidFill>
+                <a:latin typeface="Consolas"/>
+              </a:defRPr>
+            </a:pPr>
+            <a:r>
+              <a:t>&gt; **Module**: 6 – Complex Multi-Agent &amp; Protocol Testbenches (SV/UVM)</a:t>
+            </a:r>
+          </a:p>
+          <a:p>
+            <a:pPr>
+              <a:lnSpc>
+                <a:spcPts val="2200"/>
+              </a:lnSpc>
+              <a:spcAft>
+                <a:spcPts val="400"/>
+              </a:spcAft>
+              <a:defRPr sz="2000" b="0">
+                <a:solidFill>
+                  <a:srgbClr val="333333"/>
+                </a:solidFill>
+                <a:latin typeface="Consolas"/>
+              </a:defRPr>
+            </a:pPr>
+          </a:p>
+          <a:p>
+            <a:pPr>
+              <a:lnSpc>
+                <a:spcPts val="2200"/>
+              </a:lnSpc>
+              <a:spcAft>
+                <a:spcPts val="400"/>
+              </a:spcAft>
+              <a:defRPr sz="2000" b="0">
+                <a:solidFill>
+                  <a:srgbClr val="333333"/>
+                </a:solidFill>
+                <a:latin typeface="Consolas"/>
+              </a:defRPr>
+            </a:pPr>
+            <a:r>
+              <a:t>&gt; **Instructions**: Fill in this document for your design. Copy from</a:t>
+            </a:r>
+          </a:p>
+          <a:p>
+            <a:pPr>
+              <a:lnSpc>
+                <a:spcPts val="2200"/>
+              </a:lnSpc>
+              <a:spcAft>
+                <a:spcPts val="400"/>
+              </a:spcAft>
+              <a:defRPr sz="2000" b="0">
+                <a:solidFill>
+                  <a:srgbClr val="333333"/>
+                </a:solidFill>
+                <a:latin typeface="Consolas"/>
+              </a:defRPr>
+            </a:pPr>
+            <a:r>
+              <a:t>`module6/templates/` if needed, or edit the file in `module6/` directly.</a:t>
+            </a:r>
+          </a:p>
+          <a:p>
+            <a:pPr>
+              <a:lnSpc>
+                <a:spcPts val="2200"/>
+              </a:lnSpc>
+              <a:spcAft>
+                <a:spcPts val="400"/>
+              </a:spcAft>
+              <a:defRPr sz="2000" b="0">
+                <a:solidFill>
+                  <a:srgbClr val="333333"/>
+                </a:solidFill>
+                <a:latin typeface="Consolas"/>
+              </a:defRPr>
+            </a:pPr>
+            <a:r>
+              <a:t>Reference: `module6/.solutions/`.</a:t>
+            </a:r>
+          </a:p>
+          <a:p>
+            <a:pPr>
+              <a:lnSpc>
+                <a:spcPts val="2200"/>
+              </a:lnSpc>
+              <a:spcAft>
+                <a:spcPts val="400"/>
+              </a:spcAft>
+              <a:defRPr sz="2000" b="0">
+                <a:solidFill>
+                  <a:srgbClr val="333333"/>
+                </a:solidFill>
+                <a:latin typeface="Consolas"/>
+              </a:defRPr>
+            </a:pPr>
+          </a:p>
+          <a:p>
+            <a:pPr>
+              <a:lnSpc>
+                <a:spcPts val="2200"/>
+              </a:lnSpc>
+              <a:spcAft>
+                <a:spcPts val="400"/>
+              </a:spcAft>
+              <a:defRPr sz="2000" b="0">
+                <a:solidFill>
+                  <a:srgbClr val="333333"/>
+                </a:solidFill>
+                <a:latin typeface="Consolas"/>
+              </a:defRPr>
+            </a:pPr>
+            <a:r>
+              <a:t>## 1. Context</a:t>
+            </a:r>
+          </a:p>
+          <a:p>
+            <a:pPr>
+              <a:lnSpc>
+                <a:spcPts val="2200"/>
+              </a:lnSpc>
+              <a:spcAft>
+                <a:spcPts val="400"/>
+              </a:spcAft>
+              <a:defRPr sz="2000" b="0">
+                <a:solidFill>
+                  <a:srgbClr val="333333"/>
+                </a:solidFill>
+                <a:latin typeface="Consolas"/>
+              </a:defRPr>
+            </a:pPr>
+          </a:p>
+          <a:p>
+            <a:pPr>
+              <a:lnSpc>
+                <a:spcPts val="2200"/>
+              </a:lnSpc>
+              <a:spcAft>
+                <a:spcPts val="400"/>
+              </a:spcAft>
+              <a:defRPr sz="2000" b="0">
+                <a:solidFill>
+                  <a:srgbClr val="333333"/>
+                </a:solidFill>
+                <a:latin typeface="Consolas"/>
+              </a:defRPr>
+            </a:pPr>
+            <a:r>
+              <a:t>&lt;!-- TODO: DUT/System, interfaces/channels, existing env. Why a multi-</a:t>
+            </a:r>
+          </a:p>
+          <a:p>
+            <a:pPr>
+              <a:lnSpc>
+                <a:spcPts val="2200"/>
+              </a:lnSpc>
+              <a:spcAft>
+                <a:spcPts val="400"/>
+              </a:spcAft>
+              <a:defRPr sz="2000" b="0">
+                <a:solidFill>
+                  <a:srgbClr val="333333"/>
+                </a:solidFill>
+                <a:latin typeface="Consolas"/>
+              </a:defRPr>
+            </a:pPr>
+            <a:r>
+              <a:t>agent design is required. --&gt;</a:t>
+            </a:r>
+          </a:p>
+          <a:p>
+            <a:pPr>
+              <a:lnSpc>
+                <a:spcPts val="2200"/>
+              </a:lnSpc>
+              <a:spcAft>
+                <a:spcPts val="400"/>
+              </a:spcAft>
+              <a:defRPr sz="2000" b="0">
+                <a:solidFill>
+                  <a:srgbClr val="333333"/>
+                </a:solidFill>
+                <a:latin typeface="Consolas"/>
+              </a:defRPr>
+            </a:pPr>
+          </a:p>
+          <a:p>
+            <a:pPr>
+              <a:lnSpc>
+                <a:spcPts val="2200"/>
+              </a:lnSpc>
+              <a:spcAft>
+                <a:spcPts val="400"/>
+              </a:spcAft>
+              <a:defRPr sz="2000" b="0">
+                <a:solidFill>
+                  <a:srgbClr val="333333"/>
+                </a:solidFill>
+                <a:latin typeface="Consolas"/>
+              </a:defRPr>
+            </a:pPr>
+            <a:r>
+              <a:t>## 2. High-Level Environment Diagram</a:t>
+            </a:r>
+          </a:p>
+          <a:p>
+            <a:pPr>
+              <a:lnSpc>
+                <a:spcPts val="2200"/>
+              </a:lnSpc>
+              <a:spcAft>
+                <a:spcPts val="400"/>
+              </a:spcAft>
+              <a:defRPr sz="2000" b="0">
+                <a:solidFill>
+                  <a:srgbClr val="333333"/>
+                </a:solidFill>
+                <a:latin typeface="Consolas"/>
+              </a:defRPr>
+            </a:pPr>
+          </a:p>
+          <a:p>
+            <a:pPr>
+              <a:lnSpc>
+                <a:spcPts val="2200"/>
+              </a:lnSpc>
+              <a:spcAft>
+                <a:spcPts val="400"/>
+              </a:spcAft>
+              <a:defRPr sz="2000" b="0">
+                <a:solidFill>
+                  <a:srgbClr val="333333"/>
+                </a:solidFill>
+                <a:latin typeface="Consolas"/>
+              </a:defRPr>
+            </a:pPr>
+            <a:r>
+              <a:t>&lt;!-- TODO: Describe multi-agent env hierarchy (uvm_test_top, env,</a:t>
+            </a:r>
+          </a:p>
+        </p:txBody>
+      </p:sp>
+      <p:sp>
+        <p:nvSpPr>
+          <p:cNvPr id="4" name="TextBox 3"/>
           <p:cNvSpPr txBox="1"/>
           <p:nvPr/>
         </p:nvSpPr>
@@ -6102,8 +6470,8 @@
         </p:nvSpPr>
         <p:spPr>
           <a:xfrm>
-            <a:off x="548640" y="411480"/>
-            <a:ext cx="11064240" cy="777240"/>
+            <a:off x="548640" y="2743200"/>
+            <a:ext cx="11064240" cy="1371600"/>
           </a:xfrm>
           <a:prstGeom prst="rect">
             <a:avLst/>
@@ -6116,11 +6484,11 @@
           </a:bodyPr>
           <a:lstStyle/>
           <a:p>
-            <a:pPr>
-              <a:lnSpc>
-                <a:spcPts val="2200"/>
-              </a:lnSpc>
-              <a:defRPr sz="2800" b="1">
+            <a:pPr algn="ctr">
+              <a:lnSpc>
+                <a:spcPts val="2200"/>
+              </a:lnSpc>
+              <a:defRPr sz="3600" b="1">
                 <a:solidFill>
                   <a:srgbClr val="1A1A2E"/>
                 </a:solidFill>
@@ -6128,7 +6496,7 @@
               </a:defRPr>
             </a:pPr>
             <a:r>
-              <a:t>2. Multi-agent scenario testing</a:t>
+              <a:t>Key files to study</a:t>
             </a:r>
           </a:p>
         </p:txBody>
@@ -6136,105 +6504,6 @@
       <p:sp>
         <p:nvSpPr>
           <p:cNvPr id="3" name="TextBox 2"/>
-          <p:cNvSpPr txBox="1"/>
-          <p:nvPr/>
-        </p:nvSpPr>
-        <p:spPr>
-          <a:xfrm>
-            <a:off x="548640" y="1234440"/>
-            <a:ext cx="11064240" cy="4937760"/>
-          </a:xfrm>
-          <a:prstGeom prst="rect">
-            <a:avLst/>
-          </a:prstGeom>
-          <a:noFill/>
-        </p:spPr>
-        <p:txBody>
-          <a:bodyPr wrap="square">
-            <a:noAutofit/>
-          </a:bodyPr>
-          <a:lstStyle/>
-          <a:p>
-            <a:pPr>
-              <a:lnSpc>
-                <a:spcPts val="2200"/>
-              </a:lnSpc>
-              <a:spcAft>
-                <a:spcPts val="1000"/>
-              </a:spcAft>
-              <a:defRPr sz="2000" b="0">
-                <a:solidFill>
-                  <a:srgbClr val="333333"/>
-                </a:solidFill>
-                <a:latin typeface="Calibri"/>
-              </a:defRPr>
-            </a:pPr>
-            <a:r>
-              <a:t>• Virtual sequences stress cross-agent ordering,</a:t>
-            </a:r>
-          </a:p>
-          <a:p>
-            <a:pPr>
-              <a:lnSpc>
-                <a:spcPts val="2200"/>
-              </a:lnSpc>
-              <a:spcAft>
-                <a:spcPts val="1000"/>
-              </a:spcAft>
-              <a:defRPr sz="2000" b="0">
-                <a:solidFill>
-                  <a:srgbClr val="333333"/>
-                </a:solidFill>
-                <a:latin typeface="Calibri"/>
-              </a:defRPr>
-            </a:pPr>
-            <a:r>
-              <a:t>      arbitration, and backpressure.</a:t>
-            </a:r>
-          </a:p>
-          <a:p>
-            <a:pPr>
-              <a:lnSpc>
-                <a:spcPts val="2200"/>
-              </a:lnSpc>
-              <a:spcAft>
-                <a:spcPts val="1000"/>
-              </a:spcAft>
-              <a:defRPr sz="2000" b="0">
-                <a:solidFill>
-                  <a:srgbClr val="333333"/>
-                </a:solidFill>
-                <a:latin typeface="Calibri"/>
-              </a:defRPr>
-            </a:pPr>
-            <a:r>
-              <a:t>• System scoreboard validates end-to-end data and</a:t>
-            </a:r>
-          </a:p>
-          <a:p>
-            <a:pPr>
-              <a:lnSpc>
-                <a:spcPts val="2200"/>
-              </a:lnSpc>
-              <a:spcAft>
-                <a:spcPts val="1000"/>
-              </a:spcAft>
-              <a:defRPr sz="2000" b="0">
-                <a:solidFill>
-                  <a:srgbClr val="333333"/>
-                </a:solidFill>
-                <a:latin typeface="Calibri"/>
-              </a:defRPr>
-            </a:pPr>
-            <a:r>
-              <a:t>      sideband signals.</a:t>
-            </a:r>
-          </a:p>
-        </p:txBody>
-      </p:sp>
-      <p:sp>
-        <p:nvSpPr>
-          <p:cNvPr id="4" name="TextBox 3"/>
           <p:cNvSpPr txBox="1"/>
           <p:nvPr/>
         </p:nvSpPr>
@@ -6323,7 +6592,7 @@
               </a:defRPr>
             </a:pPr>
             <a:r>
-              <a:t>3. Maintainability reviews</a:t>
+              <a:t>Open these in the repo</a:t>
             </a:r>
           </a:p>
         </p:txBody>
@@ -6365,7 +6634,7 @@
               </a:defRPr>
             </a:pPr>
             <a:r>
-              <a:t>• Architecture review before adding agents — avoid</a:t>
+              <a:t>• `module6/MULTI_AGENT_ARCHITECTURE.md` — multi-</a:t>
             </a:r>
           </a:p>
           <a:p>
@@ -6384,7 +6653,7 @@
               </a:defRPr>
             </a:pPr>
             <a:r>
-              <a:t>      duplicate monitors and conflicting checkers.</a:t>
+              <a:t>      channel env and virtual sequence coordination</a:t>
             </a:r>
           </a:p>
           <a:p>
@@ -6403,7 +6672,7 @@
               </a:defRPr>
             </a:pPr>
             <a:r>
-              <a:t>• `./scripts/module6.sh --check` validates multi-agent</a:t>
+              <a:t>• `module6/PROTOCOL_VERIFICATION_PLAN.md` — protocol</a:t>
             </a:r>
           </a:p>
           <a:p>
@@ -6422,7 +6691,121 @@
               </a:defRPr>
             </a:pPr>
             <a:r>
-              <a:t>      and protocol planning artifacts.</a:t>
+              <a:t>      rules, checkers, and coverage</a:t>
+            </a:r>
+          </a:p>
+          <a:p>
+            <a:pPr>
+              <a:lnSpc>
+                <a:spcPts val="2200"/>
+              </a:lnSpc>
+              <a:spcAft>
+                <a:spcPts val="1000"/>
+              </a:spcAft>
+              <a:defRPr sz="2000" b="0">
+                <a:solidFill>
+                  <a:srgbClr val="333333"/>
+                </a:solidFill>
+                <a:latin typeface="Calibri"/>
+              </a:defRPr>
+            </a:pPr>
+            <a:r>
+              <a:t>• `module6/INTEGRATION_PLAN.md` — block-to-subsystem</a:t>
+            </a:r>
+          </a:p>
+          <a:p>
+            <a:pPr>
+              <a:lnSpc>
+                <a:spcPts val="2200"/>
+              </a:lnSpc>
+              <a:spcAft>
+                <a:spcPts val="1000"/>
+              </a:spcAft>
+              <a:defRPr sz="2000" b="0">
+                <a:solidFill>
+                  <a:srgbClr val="333333"/>
+                </a:solidFill>
+                <a:latin typeface="Calibri"/>
+              </a:defRPr>
+            </a:pPr>
+            <a:r>
+              <a:t>      integration strategy</a:t>
+            </a:r>
+          </a:p>
+          <a:p>
+            <a:pPr>
+              <a:lnSpc>
+                <a:spcPts val="2200"/>
+              </a:lnSpc>
+              <a:spcAft>
+                <a:spcPts val="1000"/>
+              </a:spcAft>
+              <a:defRPr sz="2000" b="0">
+                <a:solidFill>
+                  <a:srgbClr val="333333"/>
+                </a:solidFill>
+                <a:latin typeface="Calibri"/>
+              </a:defRPr>
+            </a:pPr>
+            <a:r>
+              <a:t>• `module4/tb/stream_pkg.sv` — monitor and agent</a:t>
+            </a:r>
+          </a:p>
+          <a:p>
+            <a:pPr>
+              <a:lnSpc>
+                <a:spcPts val="2200"/>
+              </a:lnSpc>
+              <a:spcAft>
+                <a:spcPts val="1000"/>
+              </a:spcAft>
+              <a:defRPr sz="2000" b="0">
+                <a:solidFill>
+                  <a:srgbClr val="333333"/>
+                </a:solidFill>
+                <a:latin typeface="Calibri"/>
+              </a:defRPr>
+            </a:pPr>
+            <a:r>
+              <a:t>      patterns to extend</a:t>
+            </a:r>
+          </a:p>
+          <a:p>
+            <a:pPr>
+              <a:lnSpc>
+                <a:spcPts val="2200"/>
+              </a:lnSpc>
+              <a:spcAft>
+                <a:spcPts val="1000"/>
+              </a:spcAft>
+              <a:defRPr sz="2000" b="0">
+                <a:solidFill>
+                  <a:srgbClr val="333333"/>
+                </a:solidFill>
+                <a:latin typeface="Calibri"/>
+              </a:defRPr>
+            </a:pPr>
+            <a:r>
+              <a:t>• `scripts/module6.sh` — multi-agent and protocol doc</a:t>
+            </a:r>
+          </a:p>
+          <a:p>
+            <a:pPr>
+              <a:lnSpc>
+                <a:spcPts val="2200"/>
+              </a:lnSpc>
+              <a:spcAft>
+                <a:spcPts val="1000"/>
+              </a:spcAft>
+              <a:defRPr sz="2000" b="0">
+                <a:solidFill>
+                  <a:srgbClr val="333333"/>
+                </a:solidFill>
+                <a:latin typeface="Calibri"/>
+              </a:defRPr>
+            </a:pPr>
+            <a:r>
+              <a:t>      checks</a:t>
             </a:r>
           </a:p>
         </p:txBody>
@@ -6518,7 +6901,7 @@
               </a:defRPr>
             </a:pPr>
             <a:r>
-              <a:t>Syllabus topics</a:t>
+              <a:t>Verification &amp; testing methods</a:t>
             </a:r>
           </a:p>
         </p:txBody>
@@ -6614,7 +6997,7 @@
               </a:defRPr>
             </a:pPr>
             <a:r>
-              <a:t>1. Multi-Agent Environment Design</a:t>
+              <a:t>1. Protocol rule testing</a:t>
             </a:r>
           </a:p>
         </p:txBody>
@@ -6628,7 +7011,7 @@
         <p:spPr>
           <a:xfrm>
             <a:off x="548640" y="1234440"/>
-            <a:ext cx="11064240" cy="4937760"/>
+            <a:ext cx="5303520" cy="4754880"/>
           </a:xfrm>
           <a:prstGeom prst="rect">
             <a:avLst/>
@@ -6656,7 +7039,7 @@
               </a:defRPr>
             </a:pPr>
             <a:r>
-              <a:t>• Multi-agent and multi-channel environment design.</a:t>
+              <a:t>• Each protocol rule maps to</a:t>
             </a:r>
           </a:p>
           <a:p>
@@ -6675,7 +7058,7 @@
               </a:defRPr>
             </a:pPr>
             <a:r>
-              <a:t>• Layered and reusable testbench architecture</a:t>
+              <a:t>      checker fires, coverpoints, and</a:t>
             </a:r>
           </a:p>
           <a:p>
@@ -6694,14 +7077,114 @@
               </a:defRPr>
             </a:pPr>
             <a:r>
-              <a:t>      patterns.</a:t>
-            </a:r>
-          </a:p>
-        </p:txBody>
-      </p:sp>
-      <p:sp>
-        <p:nvSpPr>
-          <p:cNvPr id="4" name="TextBox 3"/>
+              <a:t>      at least one directed or random</a:t>
+            </a:r>
+          </a:p>
+          <a:p>
+            <a:pPr>
+              <a:lnSpc>
+                <a:spcPts val="2200"/>
+              </a:lnSpc>
+              <a:spcAft>
+                <a:spcPts val="1000"/>
+              </a:spcAft>
+              <a:defRPr sz="2000" b="0">
+                <a:solidFill>
+                  <a:srgbClr val="333333"/>
+                </a:solidFill>
+                <a:latin typeface="Calibri"/>
+              </a:defRPr>
+            </a:pPr>
+            <a:r>
+              <a:t>      test.</a:t>
+            </a:r>
+          </a:p>
+          <a:p>
+            <a:pPr>
+              <a:lnSpc>
+                <a:spcPts val="2200"/>
+              </a:lnSpc>
+              <a:spcAft>
+                <a:spcPts val="1000"/>
+              </a:spcAft>
+              <a:defRPr sz="2000" b="0">
+                <a:solidFill>
+                  <a:srgbClr val="333333"/>
+                </a:solidFill>
+                <a:latin typeface="Calibri"/>
+              </a:defRPr>
+            </a:pPr>
+            <a:r>
+              <a:t>• Illegal sequences and corner</a:t>
+            </a:r>
+          </a:p>
+          <a:p>
+            <a:pPr>
+              <a:lnSpc>
+                <a:spcPts val="2200"/>
+              </a:lnSpc>
+              <a:spcAft>
+                <a:spcPts val="1000"/>
+              </a:spcAft>
+              <a:defRPr sz="2000" b="0">
+                <a:solidFill>
+                  <a:srgbClr val="333333"/>
+                </a:solidFill>
+                <a:latin typeface="Calibri"/>
+              </a:defRPr>
+            </a:pPr>
+            <a:r>
+              <a:t>      timing documented with expected</a:t>
+            </a:r>
+          </a:p>
+          <a:p>
+            <a:pPr>
+              <a:lnSpc>
+                <a:spcPts val="2200"/>
+              </a:lnSpc>
+              <a:spcAft>
+                <a:spcPts val="1000"/>
+              </a:spcAft>
+              <a:defRPr sz="2000" b="0">
+                <a:solidFill>
+                  <a:srgbClr val="333333"/>
+                </a:solidFill>
+                <a:latin typeface="Calibri"/>
+              </a:defRPr>
+            </a:pPr>
+            <a:r>
+              <a:t>      checker behavior.</a:t>
+            </a:r>
+          </a:p>
+        </p:txBody>
+      </p:sp>
+      <p:pic>
+        <p:nvPicPr>
+          <p:cNvPr id="4" name="Picture 3" descr="testing_methods.png"/>
+          <p:cNvPicPr>
+            <a:picLocks noChangeAspect="1"/>
+          </p:cNvPicPr>
+          <p:nvPr/>
+        </p:nvPicPr>
+        <p:blipFill>
+          <a:blip r:embed="rId2"/>
+          <a:stretch>
+            <a:fillRect/>
+          </a:stretch>
+        </p:blipFill>
+        <p:spPr>
+          <a:xfrm>
+            <a:off x="6172200" y="2094547"/>
+            <a:ext cx="5394960" cy="3034665"/>
+          </a:xfrm>
+          <a:prstGeom prst="rect">
+            <a:avLst/>
+          </a:prstGeom>
+        </p:spPr>
+      </p:pic>
+      <p:sp>
+        <p:nvSpPr>
+          <p:cNvPr id="5" name="TextBox 4"/>
           <p:cNvSpPr txBox="1"/>
           <p:nvPr/>
         </p:nvSpPr>
@@ -6790,7 +7273,7 @@
               </a:defRPr>
             </a:pPr>
             <a:r>
-              <a:t>2. Protocol Agents and Checkers</a:t>
+              <a:t>2. Multi-agent scenario testing</a:t>
             </a:r>
           </a:p>
         </p:txBody>
@@ -6832,7 +7315,64 @@
               </a:defRPr>
             </a:pPr>
             <a:r>
-              <a:t>• Protocol agent and protocol checker design.</a:t>
+              <a:t>• Virtual sequences stress cross-agent ordering,</a:t>
+            </a:r>
+          </a:p>
+          <a:p>
+            <a:pPr>
+              <a:lnSpc>
+                <a:spcPts val="2200"/>
+              </a:lnSpc>
+              <a:spcAft>
+                <a:spcPts val="1000"/>
+              </a:spcAft>
+              <a:defRPr sz="2000" b="0">
+                <a:solidFill>
+                  <a:srgbClr val="333333"/>
+                </a:solidFill>
+                <a:latin typeface="Calibri"/>
+              </a:defRPr>
+            </a:pPr>
+            <a:r>
+              <a:t>      arbitration, and backpressure.</a:t>
+            </a:r>
+          </a:p>
+          <a:p>
+            <a:pPr>
+              <a:lnSpc>
+                <a:spcPts val="2200"/>
+              </a:lnSpc>
+              <a:spcAft>
+                <a:spcPts val="1000"/>
+              </a:spcAft>
+              <a:defRPr sz="2000" b="0">
+                <a:solidFill>
+                  <a:srgbClr val="333333"/>
+                </a:solidFill>
+                <a:latin typeface="Calibri"/>
+              </a:defRPr>
+            </a:pPr>
+            <a:r>
+              <a:t>• System scoreboard validates end-to-end data and</a:t>
+            </a:r>
+          </a:p>
+          <a:p>
+            <a:pPr>
+              <a:lnSpc>
+                <a:spcPts val="2200"/>
+              </a:lnSpc>
+              <a:spcAft>
+                <a:spcPts val="1000"/>
+              </a:spcAft>
+              <a:defRPr sz="2000" b="0">
+                <a:solidFill>
+                  <a:srgbClr val="333333"/>
+                </a:solidFill>
+                <a:latin typeface="Calibri"/>
+              </a:defRPr>
+            </a:pPr>
+            <a:r>
+              <a:t>      sideband signals.</a:t>
             </a:r>
           </a:p>
         </p:txBody>
@@ -6928,7 +7468,7 @@
               </a:defRPr>
             </a:pPr>
             <a:r>
-              <a:t>3. Scoreboards and Integration</a:t>
+              <a:t>3. Maintainability reviews</a:t>
             </a:r>
           </a:p>
         </p:txBody>
@@ -6970,7 +7510,7 @@
               </a:defRPr>
             </a:pPr>
             <a:r>
-              <a:t>• Integration of complex scoreboards and time-based</a:t>
+              <a:t>• Architecture review before adding agents — avoid</a:t>
             </a:r>
           </a:p>
           <a:p>
@@ -6989,7 +7529,45 @@
               </a:defRPr>
             </a:pPr>
             <a:r>
-              <a:t>      matching.</a:t>
+              <a:t>      duplicate monitors and conflicting checkers.</a:t>
+            </a:r>
+          </a:p>
+          <a:p>
+            <a:pPr>
+              <a:lnSpc>
+                <a:spcPts val="2200"/>
+              </a:lnSpc>
+              <a:spcAft>
+                <a:spcPts val="1000"/>
+              </a:spcAft>
+              <a:defRPr sz="2000" b="0">
+                <a:solidFill>
+                  <a:srgbClr val="333333"/>
+                </a:solidFill>
+                <a:latin typeface="Calibri"/>
+              </a:defRPr>
+            </a:pPr>
+            <a:r>
+              <a:t>• `./scripts/module6.sh --check` validates multi-agent</a:t>
+            </a:r>
+          </a:p>
+          <a:p>
+            <a:pPr>
+              <a:lnSpc>
+                <a:spcPts val="2200"/>
+              </a:lnSpc>
+              <a:spcAft>
+                <a:spcPts val="1000"/>
+              </a:spcAft>
+              <a:defRPr sz="2000" b="0">
+                <a:solidFill>
+                  <a:srgbClr val="333333"/>
+                </a:solidFill>
+                <a:latin typeface="Calibri"/>
+              </a:defRPr>
+            </a:pPr>
+            <a:r>
+              <a:t>      and protocol planning artifacts.</a:t>
             </a:r>
           </a:p>
         </p:txBody>
@@ -7242,7 +7820,7 @@
               </a:defRPr>
             </a:pPr>
             <a:r>
-              <a:t>4. Debug and Analysis</a:t>
+              <a:t>Protocol verification plan excerpt</a:t>
             </a:r>
           </a:p>
         </p:txBody>
@@ -7255,13 +7833,15 @@
         </p:nvSpPr>
         <p:spPr>
           <a:xfrm>
-            <a:off x="548640" y="1234440"/>
-            <a:ext cx="11064240" cy="4937760"/>
+            <a:off x="548640" y="1143000"/>
+            <a:ext cx="11064240" cy="5029200"/>
           </a:xfrm>
           <a:prstGeom prst="rect">
             <a:avLst/>
           </a:prstGeom>
-          <a:noFill/>
+          <a:solidFill>
+            <a:srgbClr val="F4F4F4"/>
+          </a:solidFill>
         </p:spPr>
         <p:txBody>
           <a:bodyPr wrap="square">
@@ -7274,37 +7854,323 @@
                 <a:spcPts val="2200"/>
               </a:lnSpc>
               <a:spcAft>
-                <a:spcPts val="1000"/>
-              </a:spcAft>
-              <a:defRPr sz="2000" b="0">
-                <a:solidFill>
-                  <a:srgbClr val="333333"/>
-                </a:solidFill>
-                <a:latin typeface="Calibri"/>
-              </a:defRPr>
-            </a:pPr>
-            <a:r>
-              <a:t>• Debugging and analyzing complex, protocol-heavy</a:t>
-            </a:r>
-          </a:p>
-          <a:p>
-            <a:pPr>
-              <a:lnSpc>
-                <a:spcPts val="2200"/>
-              </a:lnSpc>
-              <a:spcAft>
-                <a:spcPts val="1000"/>
-              </a:spcAft>
-              <a:defRPr sz="2000" b="0">
-                <a:solidFill>
-                  <a:srgbClr val="333333"/>
-                </a:solidFill>
-                <a:latin typeface="Calibri"/>
-              </a:defRPr>
-            </a:pPr>
-            <a:r>
-              <a:t>      simulations.</a:t>
-            </a:r>
+                <a:spcPts val="400"/>
+              </a:spcAft>
+              <a:defRPr sz="2000" b="0">
+                <a:solidFill>
+                  <a:srgbClr val="333333"/>
+                </a:solidFill>
+                <a:latin typeface="Consolas"/>
+              </a:defRPr>
+            </a:pPr>
+            <a:r>
+              <a:t># Protocol Verification Plan (Module 6)</a:t>
+            </a:r>
+          </a:p>
+          <a:p>
+            <a:pPr>
+              <a:lnSpc>
+                <a:spcPts val="2200"/>
+              </a:lnSpc>
+              <a:spcAft>
+                <a:spcPts val="400"/>
+              </a:spcAft>
+              <a:defRPr sz="2000" b="0">
+                <a:solidFill>
+                  <a:srgbClr val="333333"/>
+                </a:solidFill>
+                <a:latin typeface="Consolas"/>
+              </a:defRPr>
+            </a:pPr>
+          </a:p>
+          <a:p>
+            <a:pPr>
+              <a:lnSpc>
+                <a:spcPts val="2200"/>
+              </a:lnSpc>
+              <a:spcAft>
+                <a:spcPts val="400"/>
+              </a:spcAft>
+              <a:defRPr sz="2000" b="0">
+                <a:solidFill>
+                  <a:srgbClr val="333333"/>
+                </a:solidFill>
+                <a:latin typeface="Consolas"/>
+              </a:defRPr>
+            </a:pPr>
+            <a:r>
+              <a:t>&gt; **Purpose**: Define how you will verify protocol correctness (e.g.,</a:t>
+            </a:r>
+          </a:p>
+          <a:p>
+            <a:pPr>
+              <a:lnSpc>
+                <a:spcPts val="2200"/>
+              </a:lnSpc>
+              <a:spcAft>
+                <a:spcPts val="400"/>
+              </a:spcAft>
+              <a:defRPr sz="2000" b="0">
+                <a:solidFill>
+                  <a:srgbClr val="333333"/>
+                </a:solidFill>
+                <a:latin typeface="Consolas"/>
+              </a:defRPr>
+            </a:pPr>
+            <a:r>
+              <a:t>AXI-like, custom bus) using agents, checkers, coverage, and tests.</a:t>
+            </a:r>
+          </a:p>
+          <a:p>
+            <a:pPr>
+              <a:lnSpc>
+                <a:spcPts val="2200"/>
+              </a:lnSpc>
+              <a:spcAft>
+                <a:spcPts val="400"/>
+              </a:spcAft>
+              <a:defRPr sz="2000" b="0">
+                <a:solidFill>
+                  <a:srgbClr val="333333"/>
+                </a:solidFill>
+                <a:latin typeface="Consolas"/>
+              </a:defRPr>
+            </a:pPr>
+            <a:r>
+              <a:t>&gt; **Module**: 6 – Complex Multi-Agent &amp; Protocol Testbenches (SV/UVM)</a:t>
+            </a:r>
+          </a:p>
+          <a:p>
+            <a:pPr>
+              <a:lnSpc>
+                <a:spcPts val="2200"/>
+              </a:lnSpc>
+              <a:spcAft>
+                <a:spcPts val="400"/>
+              </a:spcAft>
+              <a:defRPr sz="2000" b="0">
+                <a:solidFill>
+                  <a:srgbClr val="333333"/>
+                </a:solidFill>
+                <a:latin typeface="Consolas"/>
+              </a:defRPr>
+            </a:pPr>
+          </a:p>
+          <a:p>
+            <a:pPr>
+              <a:lnSpc>
+                <a:spcPts val="2200"/>
+              </a:lnSpc>
+              <a:spcAft>
+                <a:spcPts val="400"/>
+              </a:spcAft>
+              <a:defRPr sz="2000" b="0">
+                <a:solidFill>
+                  <a:srgbClr val="333333"/>
+                </a:solidFill>
+                <a:latin typeface="Consolas"/>
+              </a:defRPr>
+            </a:pPr>
+            <a:r>
+              <a:t>&gt; **Instructions**: Fill in this document for your design. Copy from</a:t>
+            </a:r>
+          </a:p>
+          <a:p>
+            <a:pPr>
+              <a:lnSpc>
+                <a:spcPts val="2200"/>
+              </a:lnSpc>
+              <a:spcAft>
+                <a:spcPts val="400"/>
+              </a:spcAft>
+              <a:defRPr sz="2000" b="0">
+                <a:solidFill>
+                  <a:srgbClr val="333333"/>
+                </a:solidFill>
+                <a:latin typeface="Consolas"/>
+              </a:defRPr>
+            </a:pPr>
+            <a:r>
+              <a:t>`module6/templates/` if needed, or edit the file in `module6/` directly.</a:t>
+            </a:r>
+          </a:p>
+          <a:p>
+            <a:pPr>
+              <a:lnSpc>
+                <a:spcPts val="2200"/>
+              </a:lnSpc>
+              <a:spcAft>
+                <a:spcPts val="400"/>
+              </a:spcAft>
+              <a:defRPr sz="2000" b="0">
+                <a:solidFill>
+                  <a:srgbClr val="333333"/>
+                </a:solidFill>
+                <a:latin typeface="Consolas"/>
+              </a:defRPr>
+            </a:pPr>
+            <a:r>
+              <a:t>Reference: `module6/.solutions/`.</a:t>
+            </a:r>
+          </a:p>
+          <a:p>
+            <a:pPr>
+              <a:lnSpc>
+                <a:spcPts val="2200"/>
+              </a:lnSpc>
+              <a:spcAft>
+                <a:spcPts val="400"/>
+              </a:spcAft>
+              <a:defRPr sz="2000" b="0">
+                <a:solidFill>
+                  <a:srgbClr val="333333"/>
+                </a:solidFill>
+                <a:latin typeface="Consolas"/>
+              </a:defRPr>
+            </a:pPr>
+          </a:p>
+          <a:p>
+            <a:pPr>
+              <a:lnSpc>
+                <a:spcPts val="2200"/>
+              </a:lnSpc>
+              <a:spcAft>
+                <a:spcPts val="400"/>
+              </a:spcAft>
+              <a:defRPr sz="2000" b="0">
+                <a:solidFill>
+                  <a:srgbClr val="333333"/>
+                </a:solidFill>
+                <a:latin typeface="Consolas"/>
+              </a:defRPr>
+            </a:pPr>
+            <a:r>
+              <a:t>## 1. Protocol Overview</a:t>
+            </a:r>
+          </a:p>
+          <a:p>
+            <a:pPr>
+              <a:lnSpc>
+                <a:spcPts val="2200"/>
+              </a:lnSpc>
+              <a:spcAft>
+                <a:spcPts val="400"/>
+              </a:spcAft>
+              <a:defRPr sz="2000" b="0">
+                <a:solidFill>
+                  <a:srgbClr val="333333"/>
+                </a:solidFill>
+                <a:latin typeface="Consolas"/>
+              </a:defRPr>
+            </a:pPr>
+          </a:p>
+          <a:p>
+            <a:pPr>
+              <a:lnSpc>
+                <a:spcPts val="2200"/>
+              </a:lnSpc>
+              <a:spcAft>
+                <a:spcPts val="400"/>
+              </a:spcAft>
+              <a:defRPr sz="2000" b="0">
+                <a:solidFill>
+                  <a:srgbClr val="333333"/>
+                </a:solidFill>
+                <a:latin typeface="Consolas"/>
+              </a:defRPr>
+            </a:pPr>
+            <a:r>
+              <a:t>&lt;!-- TODO: Protocol name, key characteristics (channels, handshakes,</a:t>
+            </a:r>
+          </a:p>
+          <a:p>
+            <a:pPr>
+              <a:lnSpc>
+                <a:spcPts val="2200"/>
+              </a:lnSpc>
+              <a:spcAft>
+                <a:spcPts val="400"/>
+              </a:spcAft>
+              <a:defRPr sz="2000" b="0">
+                <a:solidFill>
+                  <a:srgbClr val="333333"/>
+                </a:solidFill>
+                <a:latin typeface="Consolas"/>
+              </a:defRPr>
+            </a:pPr>
+            <a:r>
+              <a:t>ordering, error/response semantics). How the protocol is used by the DUT</a:t>
+            </a:r>
+          </a:p>
+          <a:p>
+            <a:pPr>
+              <a:lnSpc>
+                <a:spcPts val="2200"/>
+              </a:lnSpc>
+              <a:spcAft>
+                <a:spcPts val="400"/>
+              </a:spcAft>
+              <a:defRPr sz="2000" b="0">
+                <a:solidFill>
+                  <a:srgbClr val="333333"/>
+                </a:solidFill>
+                <a:latin typeface="Consolas"/>
+              </a:defRPr>
+            </a:pPr>
+            <a:r>
+              <a:t>(roles, traffic patterns). --&gt;</a:t>
+            </a:r>
+          </a:p>
+          <a:p>
+            <a:pPr>
+              <a:lnSpc>
+                <a:spcPts val="2200"/>
+              </a:lnSpc>
+              <a:spcAft>
+                <a:spcPts val="400"/>
+              </a:spcAft>
+              <a:defRPr sz="2000" b="0">
+                <a:solidFill>
+                  <a:srgbClr val="333333"/>
+                </a:solidFill>
+                <a:latin typeface="Consolas"/>
+              </a:defRPr>
+            </a:pPr>
+          </a:p>
+          <a:p>
+            <a:pPr>
+              <a:lnSpc>
+                <a:spcPts val="2200"/>
+              </a:lnSpc>
+              <a:spcAft>
+                <a:spcPts val="400"/>
+              </a:spcAft>
+              <a:defRPr sz="2000" b="0">
+                <a:solidFill>
+                  <a:srgbClr val="333333"/>
+                </a:solidFill>
+                <a:latin typeface="Consolas"/>
+              </a:defRPr>
+            </a:pPr>
+            <a:r>
+              <a:t>## 2. Protocol Agent Strategy</a:t>
+            </a:r>
+          </a:p>
+          <a:p>
+            <a:pPr>
+              <a:lnSpc>
+                <a:spcPts val="2200"/>
+              </a:lnSpc>
+              <a:spcAft>
+                <a:spcPts val="400"/>
+              </a:spcAft>
+              <a:defRPr sz="2000" b="0">
+                <a:solidFill>
+                  <a:srgbClr val="333333"/>
+                </a:solidFill>
+                <a:latin typeface="Consolas"/>
+              </a:defRPr>
+            </a:pPr>
           </a:p>
         </p:txBody>
       </p:sp>
@@ -7399,7 +8265,7 @@
               </a:defRPr>
             </a:pPr>
             <a:r>
-              <a:t>Hands-on examples</a:t>
+              <a:t>Syllabus topics</a:t>
             </a:r>
           </a:p>
         </p:txBody>
@@ -7495,7 +8361,7 @@
               </a:defRPr>
             </a:pPr>
             <a:r>
-              <a:t>Module 6 self-check</a:t>
+              <a:t>1. Multi-Agent Environment Design</a:t>
             </a:r>
           </a:p>
         </p:txBody>
@@ -7508,15 +8374,13 @@
         </p:nvSpPr>
         <p:spPr>
           <a:xfrm>
-            <a:off x="548640" y="1051560"/>
-            <a:ext cx="11064240" cy="914400"/>
+            <a:off x="548640" y="1234440"/>
+            <a:ext cx="11064240" cy="4937760"/>
           </a:xfrm>
           <a:prstGeom prst="rect">
             <a:avLst/>
           </a:prstGeom>
-          <a:solidFill>
-            <a:srgbClr val="F4F4F4"/>
-          </a:solidFill>
+          <a:noFill/>
         </p:spPr>
         <p:txBody>
           <a:bodyPr wrap="square">
@@ -7529,48 +8393,62 @@
                 <a:spcPts val="2200"/>
               </a:lnSpc>
               <a:spcAft>
-                <a:spcPts val="200"/>
-              </a:spcAft>
-              <a:defRPr sz="2000" b="0">
-                <a:solidFill>
-                  <a:srgbClr val="333333"/>
-                </a:solidFill>
-                <a:latin typeface="Consolas"/>
-              </a:defRPr>
-            </a:pPr>
-            <a:r>
-              <a:t>$ ./scripts/module6.sh --help</a:t>
-            </a:r>
-          </a:p>
-        </p:txBody>
-      </p:sp>
-      <p:pic>
-        <p:nvPicPr>
-          <p:cNvPr id="4" name="Picture 3" descr="module6_check.png"/>
-          <p:cNvPicPr>
-            <a:picLocks noChangeAspect="1"/>
-          </p:cNvPicPr>
-          <p:nvPr/>
-        </p:nvPicPr>
-        <p:blipFill>
-          <a:blip r:embed="rId2"/>
-          <a:stretch>
-            <a:fillRect/>
-          </a:stretch>
-        </p:blipFill>
-        <p:spPr>
-          <a:xfrm>
-            <a:off x="548640" y="1965960"/>
-            <a:ext cx="7071358" cy="3977639"/>
-          </a:xfrm>
-          <a:prstGeom prst="rect">
-            <a:avLst/>
-          </a:prstGeom>
-        </p:spPr>
-      </p:pic>
-      <p:sp>
-        <p:nvSpPr>
-          <p:cNvPr id="5" name="TextBox 4"/>
+                <a:spcPts val="1000"/>
+              </a:spcAft>
+              <a:defRPr sz="2000" b="0">
+                <a:solidFill>
+                  <a:srgbClr val="333333"/>
+                </a:solidFill>
+                <a:latin typeface="Calibri"/>
+              </a:defRPr>
+            </a:pPr>
+            <a:r>
+              <a:t>• Multi-agent and multi-channel environment design.</a:t>
+            </a:r>
+          </a:p>
+          <a:p>
+            <a:pPr>
+              <a:lnSpc>
+                <a:spcPts val="2200"/>
+              </a:lnSpc>
+              <a:spcAft>
+                <a:spcPts val="1000"/>
+              </a:spcAft>
+              <a:defRPr sz="2000" b="0">
+                <a:solidFill>
+                  <a:srgbClr val="333333"/>
+                </a:solidFill>
+                <a:latin typeface="Calibri"/>
+              </a:defRPr>
+            </a:pPr>
+            <a:r>
+              <a:t>• Layered and reusable testbench architecture</a:t>
+            </a:r>
+          </a:p>
+          <a:p>
+            <a:pPr>
+              <a:lnSpc>
+                <a:spcPts val="2200"/>
+              </a:lnSpc>
+              <a:spcAft>
+                <a:spcPts val="1000"/>
+              </a:spcAft>
+              <a:defRPr sz="2000" b="0">
+                <a:solidFill>
+                  <a:srgbClr val="333333"/>
+                </a:solidFill>
+                <a:latin typeface="Calibri"/>
+              </a:defRPr>
+            </a:pPr>
+            <a:r>
+              <a:t>      patterns.</a:t>
+            </a:r>
+          </a:p>
+        </p:txBody>
+      </p:sp>
+      <p:sp>
+        <p:nvSpPr>
+          <p:cNvPr id="4" name="TextBox 3"/>
           <p:cNvSpPr txBox="1"/>
           <p:nvPr/>
         </p:nvSpPr>
@@ -7659,7 +8537,7 @@
               </a:defRPr>
             </a:pPr>
             <a:r>
-              <a:t>Exercise scaffold</a:t>
+              <a:t>2. Protocol Agents and Checkers</a:t>
             </a:r>
           </a:p>
         </p:txBody>
@@ -7672,15 +8550,13 @@
         </p:nvSpPr>
         <p:spPr>
           <a:xfrm>
-            <a:off x="548640" y="1143000"/>
-            <a:ext cx="11064240" cy="5029200"/>
+            <a:off x="548640" y="1234440"/>
+            <a:ext cx="11064240" cy="4937760"/>
           </a:xfrm>
           <a:prstGeom prst="rect">
             <a:avLst/>
           </a:prstGeom>
-          <a:solidFill>
-            <a:srgbClr val="F4F4F4"/>
-          </a:solidFill>
+          <a:noFill/>
         </p:spPr>
         <p:txBody>
           <a:bodyPr wrap="square">
@@ -7693,17 +8569,17 @@
                 <a:spcPts val="2200"/>
               </a:lnSpc>
               <a:spcAft>
-                <a:spcPts val="400"/>
-              </a:spcAft>
-              <a:defRPr sz="2000" b="0">
-                <a:solidFill>
-                  <a:srgbClr val="333333"/>
-                </a:solidFill>
-                <a:latin typeface="Consolas"/>
-              </a:defRPr>
-            </a:pPr>
-            <a:r>
-              <a:t>./scripts/module6.sh --scaffold</a:t>
+                <a:spcPts val="1000"/>
+              </a:spcAft>
+              <a:defRPr sz="2000" b="0">
+                <a:solidFill>
+                  <a:srgbClr val="333333"/>
+                </a:solidFill>
+                <a:latin typeface="Calibri"/>
+              </a:defRPr>
+            </a:pPr>
+            <a:r>
+              <a:t>• Protocol agent and protocol checker design.</a:t>
             </a:r>
           </a:p>
         </p:txBody>
@@ -7799,7 +8675,7 @@
               </a:defRPr>
             </a:pPr>
             <a:r>
-              <a:t>Demo: Protocol verification plan</a:t>
+              <a:t>3. Scoreboards and Integration</a:t>
             </a:r>
           </a:p>
         </p:txBody>
@@ -7812,15 +8688,13 @@
         </p:nvSpPr>
         <p:spPr>
           <a:xfrm>
-            <a:off x="548640" y="1051560"/>
-            <a:ext cx="11064240" cy="914400"/>
+            <a:off x="548640" y="1234440"/>
+            <a:ext cx="11064240" cy="4937760"/>
           </a:xfrm>
           <a:prstGeom prst="rect">
             <a:avLst/>
           </a:prstGeom>
-          <a:solidFill>
-            <a:srgbClr val="F4F4F4"/>
-          </a:solidFill>
+          <a:noFill/>
         </p:spPr>
         <p:txBody>
           <a:bodyPr wrap="square">
@@ -7833,48 +8707,43 @@
                 <a:spcPts val="2200"/>
               </a:lnSpc>
               <a:spcAft>
-                <a:spcPts val="200"/>
-              </a:spcAft>
-              <a:defRPr sz="2000" b="0">
-                <a:solidFill>
-                  <a:srgbClr val="333333"/>
-                </a:solidFill>
-                <a:latin typeface="Consolas"/>
-              </a:defRPr>
-            </a:pPr>
-            <a:r>
-              <a:t>$ head -30 module6/templates/PROTOCOL_VERIFICATION_PLAN.md</a:t>
-            </a:r>
-          </a:p>
-        </p:txBody>
-      </p:sp>
-      <p:pic>
-        <p:nvPicPr>
-          <p:cNvPr id="4" name="Picture 3" descr="ex01_protocol_plan.png"/>
-          <p:cNvPicPr>
-            <a:picLocks noChangeAspect="1"/>
-          </p:cNvPicPr>
-          <p:nvPr/>
-        </p:nvPicPr>
-        <p:blipFill>
-          <a:blip r:embed="rId2"/>
-          <a:stretch>
-            <a:fillRect/>
-          </a:stretch>
-        </p:blipFill>
-        <p:spPr>
-          <a:xfrm>
-            <a:off x="548640" y="1965960"/>
-            <a:ext cx="7071358" cy="3977639"/>
-          </a:xfrm>
-          <a:prstGeom prst="rect">
-            <a:avLst/>
-          </a:prstGeom>
-        </p:spPr>
-      </p:pic>
-      <p:sp>
-        <p:nvSpPr>
-          <p:cNvPr id="5" name="TextBox 4"/>
+                <a:spcPts val="1000"/>
+              </a:spcAft>
+              <a:defRPr sz="2000" b="0">
+                <a:solidFill>
+                  <a:srgbClr val="333333"/>
+                </a:solidFill>
+                <a:latin typeface="Calibri"/>
+              </a:defRPr>
+            </a:pPr>
+            <a:r>
+              <a:t>• Integration of complex scoreboards and time-based</a:t>
+            </a:r>
+          </a:p>
+          <a:p>
+            <a:pPr>
+              <a:lnSpc>
+                <a:spcPts val="2200"/>
+              </a:lnSpc>
+              <a:spcAft>
+                <a:spcPts val="1000"/>
+              </a:spcAft>
+              <a:defRPr sz="2000" b="0">
+                <a:solidFill>
+                  <a:srgbClr val="333333"/>
+                </a:solidFill>
+                <a:latin typeface="Calibri"/>
+              </a:defRPr>
+            </a:pPr>
+            <a:r>
+              <a:t>      matching.</a:t>
+            </a:r>
+          </a:p>
+        </p:txBody>
+      </p:sp>
+      <p:sp>
+        <p:nvSpPr>
+          <p:cNvPr id="4" name="TextBox 3"/>
           <p:cNvSpPr txBox="1"/>
           <p:nvPr/>
         </p:nvSpPr>
@@ -7963,7 +8832,7 @@
               </a:defRPr>
             </a:pPr>
             <a:r>
-              <a:t>Demo: Multi-agent architecture</a:t>
+              <a:t>4. Debug and Analysis</a:t>
             </a:r>
           </a:p>
         </p:txBody>
@@ -7976,15 +8845,13 @@
         </p:nvSpPr>
         <p:spPr>
           <a:xfrm>
-            <a:off x="548640" y="1051560"/>
-            <a:ext cx="11064240" cy="914400"/>
+            <a:off x="548640" y="1234440"/>
+            <a:ext cx="11064240" cy="4937760"/>
           </a:xfrm>
           <a:prstGeom prst="rect">
             <a:avLst/>
           </a:prstGeom>
-          <a:solidFill>
-            <a:srgbClr val="F4F4F4"/>
-          </a:solidFill>
+          <a:noFill/>
         </p:spPr>
         <p:txBody>
           <a:bodyPr wrap="square">
@@ -7997,48 +8864,43 @@
                 <a:spcPts val="2200"/>
               </a:lnSpc>
               <a:spcAft>
-                <a:spcPts val="200"/>
-              </a:spcAft>
-              <a:defRPr sz="2000" b="0">
-                <a:solidFill>
-                  <a:srgbClr val="333333"/>
-                </a:solidFill>
-                <a:latin typeface="Consolas"/>
-              </a:defRPr>
-            </a:pPr>
-            <a:r>
-              <a:t>$ head -25 module6/templates/MULTI_AGENT_ARCHITECTURE.md</a:t>
-            </a:r>
-          </a:p>
-        </p:txBody>
-      </p:sp>
-      <p:pic>
-        <p:nvPicPr>
-          <p:cNvPr id="4" name="Picture 3" descr="ex02_multi_agent.png"/>
-          <p:cNvPicPr>
-            <a:picLocks noChangeAspect="1"/>
-          </p:cNvPicPr>
-          <p:nvPr/>
-        </p:nvPicPr>
-        <p:blipFill>
-          <a:blip r:embed="rId2"/>
-          <a:stretch>
-            <a:fillRect/>
-          </a:stretch>
-        </p:blipFill>
-        <p:spPr>
-          <a:xfrm>
-            <a:off x="548640" y="1965960"/>
-            <a:ext cx="7071358" cy="3977639"/>
-          </a:xfrm>
-          <a:prstGeom prst="rect">
-            <a:avLst/>
-          </a:prstGeom>
-        </p:spPr>
-      </p:pic>
-      <p:sp>
-        <p:nvSpPr>
-          <p:cNvPr id="5" name="TextBox 4"/>
+                <a:spcPts val="1000"/>
+              </a:spcAft>
+              <a:defRPr sz="2000" b="0">
+                <a:solidFill>
+                  <a:srgbClr val="333333"/>
+                </a:solidFill>
+                <a:latin typeface="Calibri"/>
+              </a:defRPr>
+            </a:pPr>
+            <a:r>
+              <a:t>• Debugging and analyzing complex, protocol-heavy</a:t>
+            </a:r>
+          </a:p>
+          <a:p>
+            <a:pPr>
+              <a:lnSpc>
+                <a:spcPts val="2200"/>
+              </a:lnSpc>
+              <a:spcAft>
+                <a:spcPts val="1000"/>
+              </a:spcAft>
+              <a:defRPr sz="2000" b="0">
+                <a:solidFill>
+                  <a:srgbClr val="333333"/>
+                </a:solidFill>
+                <a:latin typeface="Calibri"/>
+              </a:defRPr>
+            </a:pPr>
+            <a:r>
+              <a:t>      simulations.</a:t>
+            </a:r>
+          </a:p>
+        </p:txBody>
+      </p:sp>
+      <p:sp>
+        <p:nvSpPr>
+          <p:cNvPr id="4" name="TextBox 3"/>
           <p:cNvSpPr txBox="1"/>
           <p:nvPr/>
         </p:nvSpPr>
@@ -8101,8 +8963,8 @@
         </p:nvSpPr>
         <p:spPr>
           <a:xfrm>
-            <a:off x="548640" y="411480"/>
-            <a:ext cx="11064240" cy="777240"/>
+            <a:off x="548640" y="2743200"/>
+            <a:ext cx="11064240" cy="1371600"/>
           </a:xfrm>
           <a:prstGeom prst="rect">
             <a:avLst/>
@@ -8115,11 +8977,11 @@
           </a:bodyPr>
           <a:lstStyle/>
           <a:p>
-            <a:pPr>
-              <a:lnSpc>
-                <a:spcPts val="2200"/>
-              </a:lnSpc>
-              <a:defRPr sz="2800" b="1">
+            <a:pPr algn="ctr">
+              <a:lnSpc>
+                <a:spcPts val="2200"/>
+              </a:lnSpc>
+              <a:defRPr sz="3600" b="1">
                 <a:solidFill>
                   <a:srgbClr val="1A1A2E"/>
                 </a:solidFill>
@@ -8127,7 +8989,7 @@
               </a:defRPr>
             </a:pPr>
             <a:r>
-              <a:t>Demo: Integration plan</a:t>
+              <a:t>Command reference highlights</a:t>
             </a:r>
           </a:p>
         </p:txBody>
@@ -8135,74 +8997,6 @@
       <p:sp>
         <p:nvSpPr>
           <p:cNvPr id="3" name="TextBox 2"/>
-          <p:cNvSpPr txBox="1"/>
-          <p:nvPr/>
-        </p:nvSpPr>
-        <p:spPr>
-          <a:xfrm>
-            <a:off x="548640" y="1051560"/>
-            <a:ext cx="11064240" cy="914400"/>
-          </a:xfrm>
-          <a:prstGeom prst="rect">
-            <a:avLst/>
-          </a:prstGeom>
-          <a:solidFill>
-            <a:srgbClr val="F4F4F4"/>
-          </a:solidFill>
-        </p:spPr>
-        <p:txBody>
-          <a:bodyPr wrap="square">
-            <a:noAutofit/>
-          </a:bodyPr>
-          <a:lstStyle/>
-          <a:p>
-            <a:pPr>
-              <a:lnSpc>
-                <a:spcPts val="2200"/>
-              </a:lnSpc>
-              <a:spcAft>
-                <a:spcPts val="200"/>
-              </a:spcAft>
-              <a:defRPr sz="2000" b="0">
-                <a:solidFill>
-                  <a:srgbClr val="333333"/>
-                </a:solidFill>
-                <a:latin typeface="Consolas"/>
-              </a:defRPr>
-            </a:pPr>
-            <a:r>
-              <a:t>$ head -25 module6/templates/INTEGRATION_PLAN.md</a:t>
-            </a:r>
-          </a:p>
-        </p:txBody>
-      </p:sp>
-      <p:pic>
-        <p:nvPicPr>
-          <p:cNvPr id="4" name="Picture 3" descr="ex03_integration.png"/>
-          <p:cNvPicPr>
-            <a:picLocks noChangeAspect="1"/>
-          </p:cNvPicPr>
-          <p:nvPr/>
-        </p:nvPicPr>
-        <p:blipFill>
-          <a:blip r:embed="rId2"/>
-          <a:stretch>
-            <a:fillRect/>
-          </a:stretch>
-        </p:blipFill>
-        <p:spPr>
-          <a:xfrm>
-            <a:off x="548640" y="1965960"/>
-            <a:ext cx="7071358" cy="3977639"/>
-          </a:xfrm>
-          <a:prstGeom prst="rect">
-            <a:avLst/>
-          </a:prstGeom>
-        </p:spPr>
-      </p:pic>
-      <p:sp>
-        <p:nvSpPr>
-          <p:cNvPr id="5" name="TextBox 4"/>
           <p:cNvSpPr txBox="1"/>
           <p:nvPr/>
         </p:nvSpPr>
@@ -8291,7 +9085,7 @@
               </a:defRPr>
             </a:pPr>
             <a:r>
-              <a:t>Demo: Reference protocol plan</a:t>
+              <a:t>Scaffold and validate Module 6</a:t>
             </a:r>
           </a:p>
         </p:txBody>
@@ -8304,15 +9098,13 @@
         </p:nvSpPr>
         <p:spPr>
           <a:xfrm>
-            <a:off x="548640" y="1051560"/>
-            <a:ext cx="11064240" cy="914400"/>
+            <a:off x="548640" y="1234440"/>
+            <a:ext cx="11064240" cy="4937760"/>
           </a:xfrm>
           <a:prstGeom prst="rect">
             <a:avLst/>
           </a:prstGeom>
-          <a:solidFill>
-            <a:srgbClr val="F4F4F4"/>
-          </a:solidFill>
+          <a:noFill/>
         </p:spPr>
         <p:txBody>
           <a:bodyPr wrap="square">
@@ -8325,48 +9117,24 @@
                 <a:spcPts val="2200"/>
               </a:lnSpc>
               <a:spcAft>
-                <a:spcPts val="200"/>
-              </a:spcAft>
-              <a:defRPr sz="2000" b="0">
-                <a:solidFill>
-                  <a:srgbClr val="333333"/>
-                </a:solidFill>
-                <a:latin typeface="Consolas"/>
-              </a:defRPr>
-            </a:pPr>
-            <a:r>
-              <a:t>$ head -20 module6/.solutions/PROTOCOL_VERIFICATION_PLAN.md</a:t>
-            </a:r>
-          </a:p>
-        </p:txBody>
-      </p:sp>
-      <p:pic>
-        <p:nvPicPr>
-          <p:cNvPr id="4" name="Picture 3" descr="ex04_solutions.png"/>
-          <p:cNvPicPr>
-            <a:picLocks noChangeAspect="1"/>
-          </p:cNvPicPr>
-          <p:nvPr/>
-        </p:nvPicPr>
-        <p:blipFill>
-          <a:blip r:embed="rId2"/>
-          <a:stretch>
-            <a:fillRect/>
-          </a:stretch>
-        </p:blipFill>
-        <p:spPr>
-          <a:xfrm>
-            <a:off x="548640" y="1965960"/>
-            <a:ext cx="7071358" cy="3977639"/>
-          </a:xfrm>
-          <a:prstGeom prst="rect">
-            <a:avLst/>
-          </a:prstGeom>
-        </p:spPr>
-      </p:pic>
-      <p:sp>
-        <p:nvSpPr>
-          <p:cNvPr id="5" name="TextBox 4"/>
+                <a:spcPts val="1000"/>
+              </a:spcAft>
+              <a:defRPr sz="2000" b="0">
+                <a:solidFill>
+                  <a:srgbClr val="333333"/>
+                </a:solidFill>
+                <a:latin typeface="Calibri"/>
+              </a:defRPr>
+            </a:pPr>
+            <a:r>
+              <a:t>• ./scripts/module6.sh --scaffold</a:t>
+            </a:r>
+          </a:p>
+        </p:txBody>
+      </p:sp>
+      <p:sp>
+        <p:nvSpPr>
+          <p:cNvPr id="4" name="TextBox 3"/>
           <p:cNvSpPr txBox="1"/>
           <p:nvPr/>
         </p:nvSpPr>
@@ -8455,7 +9223,7 @@
               </a:defRPr>
             </a:pPr>
             <a:r>
-              <a:t>Demo: Module validation</a:t>
+              <a:t>Review multi-agent architecture template</a:t>
             </a:r>
           </a:p>
         </p:txBody>
@@ -8468,15 +9236,13 @@
         </p:nvSpPr>
         <p:spPr>
           <a:xfrm>
-            <a:off x="548640" y="1051560"/>
-            <a:ext cx="11064240" cy="914400"/>
+            <a:off x="548640" y="1234440"/>
+            <a:ext cx="11064240" cy="4937760"/>
           </a:xfrm>
           <a:prstGeom prst="rect">
             <a:avLst/>
           </a:prstGeom>
-          <a:solidFill>
-            <a:srgbClr val="F4F4F4"/>
-          </a:solidFill>
+          <a:noFill/>
         </p:spPr>
         <p:txBody>
           <a:bodyPr wrap="square">
@@ -8489,48 +9255,43 @@
                 <a:spcPts val="2200"/>
               </a:lnSpc>
               <a:spcAft>
-                <a:spcPts val="200"/>
-              </a:spcAft>
-              <a:defRPr sz="2000" b="0">
-                <a:solidFill>
-                  <a:srgbClr val="333333"/>
-                </a:solidFill>
-                <a:latin typeface="Consolas"/>
-              </a:defRPr>
-            </a:pPr>
-            <a:r>
-              <a:t>$ ./scripts/module6.sh --check</a:t>
-            </a:r>
-          </a:p>
-        </p:txBody>
-      </p:sp>
-      <p:pic>
-        <p:nvPicPr>
-          <p:cNvPr id="4" name="Picture 3" descr="ex05_validate.png"/>
-          <p:cNvPicPr>
-            <a:picLocks noChangeAspect="1"/>
-          </p:cNvPicPr>
-          <p:nvPr/>
-        </p:nvPicPr>
-        <p:blipFill>
-          <a:blip r:embed="rId2"/>
-          <a:stretch>
-            <a:fillRect/>
-          </a:stretch>
-        </p:blipFill>
-        <p:spPr>
-          <a:xfrm>
-            <a:off x="548640" y="1965960"/>
-            <a:ext cx="7071358" cy="3977639"/>
-          </a:xfrm>
-          <a:prstGeom prst="rect">
-            <a:avLst/>
-          </a:prstGeom>
-        </p:spPr>
-      </p:pic>
-      <p:sp>
-        <p:nvSpPr>
-          <p:cNvPr id="5" name="TextBox 4"/>
+                <a:spcPts val="1000"/>
+              </a:spcAft>
+              <a:defRPr sz="2000" b="0">
+                <a:solidFill>
+                  <a:srgbClr val="333333"/>
+                </a:solidFill>
+                <a:latin typeface="Calibri"/>
+              </a:defRPr>
+            </a:pPr>
+            <a:r>
+              <a:t>• head -40</a:t>
+            </a:r>
+          </a:p>
+          <a:p>
+            <a:pPr>
+              <a:lnSpc>
+                <a:spcPts val="2200"/>
+              </a:lnSpc>
+              <a:spcAft>
+                <a:spcPts val="1000"/>
+              </a:spcAft>
+              <a:defRPr sz="2000" b="0">
+                <a:solidFill>
+                  <a:srgbClr val="333333"/>
+                </a:solidFill>
+                <a:latin typeface="Calibri"/>
+              </a:defRPr>
+            </a:pPr>
+            <a:r>
+              <a:t>      module6/templates/MULTI_AGENT_ARCHITECTURE.md</a:t>
+            </a:r>
+          </a:p>
+        </p:txBody>
+      </p:sp>
+      <p:sp>
+        <p:nvSpPr>
+          <p:cNvPr id="4" name="TextBox 3"/>
           <p:cNvSpPr txBox="1"/>
           <p:nvPr/>
         </p:nvSpPr>
@@ -8619,7 +9380,7 @@
               </a:defRPr>
             </a:pPr>
             <a:r>
-              <a:t>Practice &amp; assessment</a:t>
+              <a:t>Hands-on examples</a:t>
             </a:r>
           </a:p>
         </p:txBody>
@@ -8853,7 +9614,7 @@
               </a:defRPr>
             </a:pPr>
             <a:r>
-              <a:t>What you should know (1/2)</a:t>
+              <a:t>Module 6 self-check</a:t>
             </a:r>
           </a:p>
         </p:txBody>
@@ -8866,13 +9627,15 @@
         </p:nvSpPr>
         <p:spPr>
           <a:xfrm>
-            <a:off x="548640" y="1234440"/>
-            <a:ext cx="11064240" cy="4937760"/>
+            <a:off x="548640" y="1051560"/>
+            <a:ext cx="11064240" cy="914400"/>
           </a:xfrm>
           <a:prstGeom prst="rect">
             <a:avLst/>
           </a:prstGeom>
-          <a:noFill/>
+          <a:solidFill>
+            <a:srgbClr val="F4F4F4"/>
+          </a:solidFill>
         </p:spPr>
         <p:txBody>
           <a:bodyPr wrap="square">
@@ -8885,233 +9648,48 @@
                 <a:spcPts val="2200"/>
               </a:lnSpc>
               <a:spcAft>
-                <a:spcPts val="1000"/>
-              </a:spcAft>
-              <a:defRPr sz="2000" b="0">
-                <a:solidFill>
-                  <a:srgbClr val="333333"/>
-                </a:solidFill>
-                <a:latin typeface="Calibri"/>
-              </a:defRPr>
-            </a:pPr>
-            <a:r>
-              <a:t>• Design and document multi-agent UVM environments for</a:t>
-            </a:r>
-          </a:p>
-          <a:p>
-            <a:pPr>
-              <a:lnSpc>
-                <a:spcPts val="2200"/>
-              </a:lnSpc>
-              <a:spcAft>
-                <a:spcPts val="1000"/>
-              </a:spcAft>
-              <a:defRPr sz="2000" b="0">
-                <a:solidFill>
-                  <a:srgbClr val="333333"/>
-                </a:solidFill>
-                <a:latin typeface="Calibri"/>
-              </a:defRPr>
-            </a:pPr>
-            <a:r>
-              <a:t>      protocol-based DUTs.</a:t>
-            </a:r>
-          </a:p>
-          <a:p>
-            <a:pPr>
-              <a:lnSpc>
-                <a:spcPts val="2200"/>
-              </a:lnSpc>
-              <a:spcAft>
-                <a:spcPts val="1000"/>
-              </a:spcAft>
-              <a:defRPr sz="2000" b="0">
-                <a:solidFill>
-                  <a:srgbClr val="333333"/>
-                </a:solidFill>
-                <a:latin typeface="Calibri"/>
-              </a:defRPr>
-            </a:pPr>
-            <a:r>
-              <a:t>• Implement and integrate protocol agents and protocol</a:t>
-            </a:r>
-          </a:p>
-          <a:p>
-            <a:pPr>
-              <a:lnSpc>
-                <a:spcPts val="2200"/>
-              </a:lnSpc>
-              <a:spcAft>
-                <a:spcPts val="1000"/>
-              </a:spcAft>
-              <a:defRPr sz="2000" b="0">
-                <a:solidFill>
-                  <a:srgbClr val="333333"/>
-                </a:solidFill>
-                <a:latin typeface="Calibri"/>
-              </a:defRPr>
-            </a:pPr>
-            <a:r>
-              <a:t>      checkers.</a:t>
-            </a:r>
-          </a:p>
-          <a:p>
-            <a:pPr>
-              <a:lnSpc>
-                <a:spcPts val="2200"/>
-              </a:lnSpc>
-              <a:spcAft>
-                <a:spcPts val="1000"/>
-              </a:spcAft>
-              <a:defRPr sz="2000" b="0">
-                <a:solidFill>
-                  <a:srgbClr val="333333"/>
-                </a:solidFill>
-                <a:latin typeface="Calibri"/>
-              </a:defRPr>
-            </a:pPr>
-            <a:r>
-              <a:t>• Apply layered architecture patterns to keep complex</a:t>
-            </a:r>
-          </a:p>
-          <a:p>
-            <a:pPr>
-              <a:lnSpc>
-                <a:spcPts val="2200"/>
-              </a:lnSpc>
-              <a:spcAft>
-                <a:spcPts val="1000"/>
-              </a:spcAft>
-              <a:defRPr sz="2000" b="0">
-                <a:solidFill>
-                  <a:srgbClr val="333333"/>
-                </a:solidFill>
-                <a:latin typeface="Calibri"/>
-              </a:defRPr>
-            </a:pPr>
-            <a:r>
-              <a:t>      benches maintainable.</a:t>
-            </a:r>
-          </a:p>
-          <a:p>
-            <a:pPr>
-              <a:lnSpc>
-                <a:spcPts val="2200"/>
-              </a:lnSpc>
-              <a:spcAft>
-                <a:spcPts val="1000"/>
-              </a:spcAft>
-              <a:defRPr sz="2000" b="0">
-                <a:solidFill>
-                  <a:srgbClr val="333333"/>
-                </a:solidFill>
-                <a:latin typeface="Calibri"/>
-              </a:defRPr>
-            </a:pPr>
-            <a:r>
-              <a:t>• Analyze and debug multi-channel, protocol-level</a:t>
-            </a:r>
-          </a:p>
-          <a:p>
-            <a:pPr>
-              <a:lnSpc>
-                <a:spcPts val="2200"/>
-              </a:lnSpc>
-              <a:spcAft>
-                <a:spcPts val="1000"/>
-              </a:spcAft>
-              <a:defRPr sz="2000" b="0">
-                <a:solidFill>
-                  <a:srgbClr val="333333"/>
-                </a:solidFill>
-                <a:latin typeface="Calibri"/>
-              </a:defRPr>
-            </a:pPr>
-            <a:r>
-              <a:t>      behavior in simulations.</a:t>
-            </a:r>
-          </a:p>
-          <a:p>
-            <a:pPr>
-              <a:lnSpc>
-                <a:spcPts val="2200"/>
-              </a:lnSpc>
-              <a:spcAft>
-                <a:spcPts val="1000"/>
-              </a:spcAft>
-              <a:defRPr sz="2000" b="0">
-                <a:solidFill>
-                  <a:srgbClr val="333333"/>
-                </a:solidFill>
-                <a:latin typeface="Calibri"/>
-              </a:defRPr>
-            </a:pPr>
-            <a:r>
-              <a:t>• Multi-agent/multi-channel environment design</a:t>
-            </a:r>
-          </a:p>
-          <a:p>
-            <a:pPr>
-              <a:lnSpc>
-                <a:spcPts val="2200"/>
-              </a:lnSpc>
-              <a:spcAft>
-                <a:spcPts val="1000"/>
-              </a:spcAft>
-              <a:defRPr sz="2000" b="0">
-                <a:solidFill>
-                  <a:srgbClr val="333333"/>
-                </a:solidFill>
-                <a:latin typeface="Calibri"/>
-              </a:defRPr>
-            </a:pPr>
-            <a:r>
-              <a:t>      documented in `module6/MULTI_AGENT_ARCHITECTURE.md`.</a:t>
-            </a:r>
-          </a:p>
-          <a:p>
-            <a:pPr>
-              <a:lnSpc>
-                <a:spcPts val="2200"/>
-              </a:lnSpc>
-              <a:spcAft>
-                <a:spcPts val="1000"/>
-              </a:spcAft>
-              <a:defRPr sz="2000" b="0">
-                <a:solidFill>
-                  <a:srgbClr val="333333"/>
-                </a:solidFill>
-                <a:latin typeface="Calibri"/>
-              </a:defRPr>
-            </a:pPr>
-            <a:r>
-              <a:t>• Protocol verification strategy documented in</a:t>
-            </a:r>
-          </a:p>
-          <a:p>
-            <a:pPr>
-              <a:lnSpc>
-                <a:spcPts val="2200"/>
-              </a:lnSpc>
-              <a:spcAft>
-                <a:spcPts val="1000"/>
-              </a:spcAft>
-              <a:defRPr sz="2000" b="0">
-                <a:solidFill>
-                  <a:srgbClr val="333333"/>
-                </a:solidFill>
-                <a:latin typeface="Calibri"/>
-              </a:defRPr>
-            </a:pPr>
-            <a:r>
-              <a:t>      `module6/PROTOCOL_VERIFICATION_PLAN.md`.</a:t>
-            </a:r>
-          </a:p>
-        </p:txBody>
-      </p:sp>
-      <p:sp>
-        <p:nvSpPr>
-          <p:cNvPr id="4" name="TextBox 3"/>
+                <a:spcPts val="200"/>
+              </a:spcAft>
+              <a:defRPr sz="2000" b="0">
+                <a:solidFill>
+                  <a:srgbClr val="333333"/>
+                </a:solidFill>
+                <a:latin typeface="Consolas"/>
+              </a:defRPr>
+            </a:pPr>
+            <a:r>
+              <a:t>$ ./scripts/module6.sh --help</a:t>
+            </a:r>
+          </a:p>
+        </p:txBody>
+      </p:sp>
+      <p:pic>
+        <p:nvPicPr>
+          <p:cNvPr id="4" name="Picture 3" descr="module6_check.png"/>
+          <p:cNvPicPr>
+            <a:picLocks noChangeAspect="1"/>
+          </p:cNvPicPr>
+          <p:nvPr/>
+        </p:nvPicPr>
+        <p:blipFill>
+          <a:blip r:embed="rId2"/>
+          <a:stretch>
+            <a:fillRect/>
+          </a:stretch>
+        </p:blipFill>
+        <p:spPr>
+          <a:xfrm>
+            <a:off x="548640" y="1965960"/>
+            <a:ext cx="7071358" cy="3977639"/>
+          </a:xfrm>
+          <a:prstGeom prst="rect">
+            <a:avLst/>
+          </a:prstGeom>
+        </p:spPr>
+      </p:pic>
+      <p:sp>
+        <p:nvSpPr>
+          <p:cNvPr id="5" name="TextBox 4"/>
           <p:cNvSpPr txBox="1"/>
           <p:nvPr/>
         </p:nvSpPr>
@@ -9200,7 +9778,7 @@
               </a:defRPr>
             </a:pPr>
             <a:r>
-              <a:t>What you should know (2/2)</a:t>
+              <a:t>Exercise scaffold</a:t>
             </a:r>
           </a:p>
         </p:txBody>
@@ -9213,13 +9791,15 @@
         </p:nvSpPr>
         <p:spPr>
           <a:xfrm>
-            <a:off x="548640" y="1234440"/>
-            <a:ext cx="11064240" cy="4937760"/>
+            <a:off x="548640" y="1143000"/>
+            <a:ext cx="11064240" cy="5029200"/>
           </a:xfrm>
           <a:prstGeom prst="rect">
             <a:avLst/>
           </a:prstGeom>
-          <a:noFill/>
+          <a:solidFill>
+            <a:srgbClr val="F4F4F4"/>
+          </a:solidFill>
         </p:spPr>
         <p:txBody>
           <a:bodyPr wrap="square">
@@ -9232,74 +9812,17 @@
                 <a:spcPts val="2200"/>
               </a:lnSpc>
               <a:spcAft>
-                <a:spcPts val="1000"/>
-              </a:spcAft>
-              <a:defRPr sz="2000" b="0">
-                <a:solidFill>
-                  <a:srgbClr val="333333"/>
-                </a:solidFill>
-                <a:latin typeface="Calibri"/>
-              </a:defRPr>
-            </a:pPr>
-            <a:r>
-              <a:t>• Integration patterns and system-level scenarios</a:t>
-            </a:r>
-          </a:p>
-          <a:p>
-            <a:pPr>
-              <a:lnSpc>
-                <a:spcPts val="2200"/>
-              </a:lnSpc>
-              <a:spcAft>
-                <a:spcPts val="1000"/>
-              </a:spcAft>
-              <a:defRPr sz="2000" b="0">
-                <a:solidFill>
-                  <a:srgbClr val="333333"/>
-                </a:solidFill>
-                <a:latin typeface="Calibri"/>
-              </a:defRPr>
-            </a:pPr>
-            <a:r>
-              <a:t>      documented in `module6/INTEGRATION_PLAN.md`.</a:t>
-            </a:r>
-          </a:p>
-          <a:p>
-            <a:pPr>
-              <a:lnSpc>
-                <a:spcPts val="2200"/>
-              </a:lnSpc>
-              <a:spcAft>
-                <a:spcPts val="1000"/>
-              </a:spcAft>
-              <a:defRPr sz="2000" b="0">
-                <a:solidFill>
-                  <a:srgbClr val="333333"/>
-                </a:solidFill>
-                <a:latin typeface="Calibri"/>
-              </a:defRPr>
-            </a:pPr>
-            <a:r>
-              <a:t>• Complex bench design reviewed; action items captured</a:t>
-            </a:r>
-          </a:p>
-          <a:p>
-            <a:pPr>
-              <a:lnSpc>
-                <a:spcPts val="2200"/>
-              </a:lnSpc>
-              <a:spcAft>
-                <a:spcPts val="1000"/>
-              </a:spcAft>
-              <a:defRPr sz="2000" b="0">
-                <a:solidFill>
-                  <a:srgbClr val="333333"/>
-                </a:solidFill>
-                <a:latin typeface="Calibri"/>
-              </a:defRPr>
-            </a:pPr>
-            <a:r>
-              <a:t>      in the docs.</a:t>
+                <a:spcPts val="400"/>
+              </a:spcAft>
+              <a:defRPr sz="2000" b="0">
+                <a:solidFill>
+                  <a:srgbClr val="333333"/>
+                </a:solidFill>
+                <a:latin typeface="Consolas"/>
+              </a:defRPr>
+            </a:pPr>
+            <a:r>
+              <a:t>./scripts/module6.sh --scaffold</a:t>
             </a:r>
           </a:p>
         </p:txBody>
@@ -9395,7 +9918,7 @@
               </a:defRPr>
             </a:pPr>
             <a:r>
-              <a:t>Assessment checklist</a:t>
+              <a:t>Demo: Protocol verification plan</a:t>
             </a:r>
           </a:p>
         </p:txBody>
@@ -9408,13 +9931,15 @@
         </p:nvSpPr>
         <p:spPr>
           <a:xfrm>
-            <a:off x="548640" y="1234440"/>
-            <a:ext cx="11064240" cy="4937760"/>
+            <a:off x="548640" y="1051560"/>
+            <a:ext cx="11064240" cy="914400"/>
           </a:xfrm>
           <a:prstGeom prst="rect">
             <a:avLst/>
           </a:prstGeom>
-          <a:noFill/>
+          <a:solidFill>
+            <a:srgbClr val="F4F4F4"/>
+          </a:solidFill>
         </p:spPr>
         <p:txBody>
           <a:bodyPr wrap="square">
@@ -9427,157 +9952,48 @@
                 <a:spcPts val="2200"/>
               </a:lnSpc>
               <a:spcAft>
-                <a:spcPts val="1000"/>
-              </a:spcAft>
-              <a:defRPr sz="2000" b="0">
-                <a:solidFill>
-                  <a:srgbClr val="333333"/>
-                </a:solidFill>
-                <a:latin typeface="Calibri"/>
-              </a:defRPr>
-            </a:pPr>
-            <a:r>
-              <a:t>• Multi-agent/multi-channel environment design</a:t>
-            </a:r>
-          </a:p>
-          <a:p>
-            <a:pPr>
-              <a:lnSpc>
-                <a:spcPts val="2200"/>
-              </a:lnSpc>
-              <a:spcAft>
-                <a:spcPts val="1000"/>
-              </a:spcAft>
-              <a:defRPr sz="2000" b="0">
-                <a:solidFill>
-                  <a:srgbClr val="333333"/>
-                </a:solidFill>
-                <a:latin typeface="Calibri"/>
-              </a:defRPr>
-            </a:pPr>
-            <a:r>
-              <a:t>      documented in `module6/MULTI_AGENT_ARCHITECTURE.md`.</a:t>
-            </a:r>
-          </a:p>
-          <a:p>
-            <a:pPr>
-              <a:lnSpc>
-                <a:spcPts val="2200"/>
-              </a:lnSpc>
-              <a:spcAft>
-                <a:spcPts val="1000"/>
-              </a:spcAft>
-              <a:defRPr sz="2000" b="0">
-                <a:solidFill>
-                  <a:srgbClr val="333333"/>
-                </a:solidFill>
-                <a:latin typeface="Calibri"/>
-              </a:defRPr>
-            </a:pPr>
-            <a:r>
-              <a:t>• Protocol verification strategy documented in</a:t>
-            </a:r>
-          </a:p>
-          <a:p>
-            <a:pPr>
-              <a:lnSpc>
-                <a:spcPts val="2200"/>
-              </a:lnSpc>
-              <a:spcAft>
-                <a:spcPts val="1000"/>
-              </a:spcAft>
-              <a:defRPr sz="2000" b="0">
-                <a:solidFill>
-                  <a:srgbClr val="333333"/>
-                </a:solidFill>
-                <a:latin typeface="Calibri"/>
-              </a:defRPr>
-            </a:pPr>
-            <a:r>
-              <a:t>      `module6/PROTOCOL_VERIFICATION_PLAN.md`.</a:t>
-            </a:r>
-          </a:p>
-          <a:p>
-            <a:pPr>
-              <a:lnSpc>
-                <a:spcPts val="2200"/>
-              </a:lnSpc>
-              <a:spcAft>
-                <a:spcPts val="1000"/>
-              </a:spcAft>
-              <a:defRPr sz="2000" b="0">
-                <a:solidFill>
-                  <a:srgbClr val="333333"/>
-                </a:solidFill>
-                <a:latin typeface="Calibri"/>
-              </a:defRPr>
-            </a:pPr>
-            <a:r>
-              <a:t>• Integration patterns and system-level scenarios</a:t>
-            </a:r>
-          </a:p>
-          <a:p>
-            <a:pPr>
-              <a:lnSpc>
-                <a:spcPts val="2200"/>
-              </a:lnSpc>
-              <a:spcAft>
-                <a:spcPts val="1000"/>
-              </a:spcAft>
-              <a:defRPr sz="2000" b="0">
-                <a:solidFill>
-                  <a:srgbClr val="333333"/>
-                </a:solidFill>
-                <a:latin typeface="Calibri"/>
-              </a:defRPr>
-            </a:pPr>
-            <a:r>
-              <a:t>      documented in `module6/INTEGRATION_PLAN.md`.</a:t>
-            </a:r>
-          </a:p>
-          <a:p>
-            <a:pPr>
-              <a:lnSpc>
-                <a:spcPts val="2200"/>
-              </a:lnSpc>
-              <a:spcAft>
-                <a:spcPts val="1000"/>
-              </a:spcAft>
-              <a:defRPr sz="2000" b="0">
-                <a:solidFill>
-                  <a:srgbClr val="333333"/>
-                </a:solidFill>
-                <a:latin typeface="Calibri"/>
-              </a:defRPr>
-            </a:pPr>
-            <a:r>
-              <a:t>• Complex bench design reviewed; action items captured</a:t>
-            </a:r>
-          </a:p>
-          <a:p>
-            <a:pPr>
-              <a:lnSpc>
-                <a:spcPts val="2200"/>
-              </a:lnSpc>
-              <a:spcAft>
-                <a:spcPts val="1000"/>
-              </a:spcAft>
-              <a:defRPr sz="2000" b="0">
-                <a:solidFill>
-                  <a:srgbClr val="333333"/>
-                </a:solidFill>
-                <a:latin typeface="Calibri"/>
-              </a:defRPr>
-            </a:pPr>
-            <a:r>
-              <a:t>      in the docs.</a:t>
-            </a:r>
-          </a:p>
-        </p:txBody>
-      </p:sp>
-      <p:sp>
-        <p:nvSpPr>
-          <p:cNvPr id="4" name="TextBox 3"/>
+                <a:spcPts val="200"/>
+              </a:spcAft>
+              <a:defRPr sz="2000" b="0">
+                <a:solidFill>
+                  <a:srgbClr val="333333"/>
+                </a:solidFill>
+                <a:latin typeface="Consolas"/>
+              </a:defRPr>
+            </a:pPr>
+            <a:r>
+              <a:t>$ head -30 module6/templates/PROTOCOL_VERIFICATION_PLAN.md</a:t>
+            </a:r>
+          </a:p>
+        </p:txBody>
+      </p:sp>
+      <p:pic>
+        <p:nvPicPr>
+          <p:cNvPr id="4" name="Picture 3" descr="ex01_protocol_plan.png"/>
+          <p:cNvPicPr>
+            <a:picLocks noChangeAspect="1"/>
+          </p:cNvPicPr>
+          <p:nvPr/>
+        </p:nvPicPr>
+        <p:blipFill>
+          <a:blip r:embed="rId2"/>
+          <a:stretch>
+            <a:fillRect/>
+          </a:stretch>
+        </p:blipFill>
+        <p:spPr>
+          <a:xfrm>
+            <a:off x="548640" y="1965960"/>
+            <a:ext cx="7071358" cy="3977639"/>
+          </a:xfrm>
+          <a:prstGeom prst="rect">
+            <a:avLst/>
+          </a:prstGeom>
+        </p:spPr>
+      </p:pic>
+      <p:sp>
+        <p:nvSpPr>
+          <p:cNvPr id="5" name="TextBox 4"/>
           <p:cNvSpPr txBox="1"/>
           <p:nvPr/>
         </p:nvSpPr>
@@ -9666,7 +10082,7 @@
               </a:defRPr>
             </a:pPr>
             <a:r>
-              <a:t>Summary &amp; next steps</a:t>
+              <a:t>Demo: Multi-agent architecture</a:t>
             </a:r>
           </a:p>
         </p:txBody>
@@ -9679,8 +10095,76 @@
         </p:nvSpPr>
         <p:spPr>
           <a:xfrm>
-            <a:off x="548640" y="1234440"/>
-            <a:ext cx="11064240" cy="4937760"/>
+            <a:off x="548640" y="1051560"/>
+            <a:ext cx="11064240" cy="914400"/>
+          </a:xfrm>
+          <a:prstGeom prst="rect">
+            <a:avLst/>
+          </a:prstGeom>
+          <a:solidFill>
+            <a:srgbClr val="F4F4F4"/>
+          </a:solidFill>
+        </p:spPr>
+        <p:txBody>
+          <a:bodyPr wrap="square">
+            <a:noAutofit/>
+          </a:bodyPr>
+          <a:lstStyle/>
+          <a:p>
+            <a:pPr>
+              <a:lnSpc>
+                <a:spcPts val="2200"/>
+              </a:lnSpc>
+              <a:spcAft>
+                <a:spcPts val="200"/>
+              </a:spcAft>
+              <a:defRPr sz="2000" b="0">
+                <a:solidFill>
+                  <a:srgbClr val="333333"/>
+                </a:solidFill>
+                <a:latin typeface="Consolas"/>
+              </a:defRPr>
+            </a:pPr>
+            <a:r>
+              <a:t>$ head -25 module6/templates/MULTI_AGENT_ARCHITECTURE.md</a:t>
+            </a:r>
+          </a:p>
+        </p:txBody>
+      </p:sp>
+      <p:pic>
+        <p:nvPicPr>
+          <p:cNvPr id="4" name="Picture 3" descr="ex02_multi_agent.png"/>
+          <p:cNvPicPr>
+            <a:picLocks noChangeAspect="1"/>
+          </p:cNvPicPr>
+          <p:nvPr/>
+        </p:nvPicPr>
+        <p:blipFill>
+          <a:blip r:embed="rId2"/>
+          <a:stretch>
+            <a:fillRect/>
+          </a:stretch>
+        </p:blipFill>
+        <p:spPr>
+          <a:xfrm>
+            <a:off x="548640" y="1965960"/>
+            <a:ext cx="7071358" cy="3977639"/>
+          </a:xfrm>
+          <a:prstGeom prst="rect">
+            <a:avLst/>
+          </a:prstGeom>
+        </p:spPr>
+      </p:pic>
+      <p:sp>
+        <p:nvSpPr>
+          <p:cNvPr id="5" name="TextBox 4"/>
+          <p:cNvSpPr txBox="1"/>
+          <p:nvPr/>
+        </p:nvSpPr>
+        <p:spPr>
+          <a:xfrm>
+            <a:off x="548640" y="6355080"/>
+            <a:ext cx="11064240" cy="320040"/>
           </a:xfrm>
           <a:prstGeom prst="rect">
             <a:avLst/>
@@ -9693,6 +10177,690 @@
           </a:bodyPr>
           <a:lstStyle/>
           <a:p>
+            <a:pPr algn="r">
+              <a:lnSpc>
+                <a:spcPts val="2200"/>
+              </a:lnSpc>
+              <a:defRPr sz="1000" b="0">
+                <a:solidFill>
+                  <a:srgbClr val="666666"/>
+                </a:solidFill>
+                <a:latin typeface="Calibri"/>
+              </a:defRPr>
+            </a:pPr>
+            <a:r>
+              <a:t>verification_planning_management / Module 6</a:t>
+            </a:r>
+          </a:p>
+        </p:txBody>
+      </p:sp>
+    </p:spTree>
+  </p:cSld>
+  <p:clrMapOvr>
+    <a:masterClrMapping/>
+  </p:clrMapOvr>
+</p:sld>
+</file>
+
+<file path=ppt/slides/slide34.xml><?xml version="1.0" encoding="utf-8"?>
+<p:sld xmlns:a="http://schemas.openxmlformats.org/drawingml/2006/main" xmlns:p="http://schemas.openxmlformats.org/presentationml/2006/main" xmlns:r="http://schemas.openxmlformats.org/officeDocument/2006/relationships">
+  <p:cSld>
+    <p:spTree>
+      <p:nvGrpSpPr>
+        <p:cNvPr id="1" name=""/>
+        <p:cNvGrpSpPr/>
+        <p:nvPr/>
+      </p:nvGrpSpPr>
+      <p:grpSpPr/>
+      <p:sp>
+        <p:nvSpPr>
+          <p:cNvPr id="2" name="TextBox 1"/>
+          <p:cNvSpPr txBox="1"/>
+          <p:nvPr/>
+        </p:nvSpPr>
+        <p:spPr>
+          <a:xfrm>
+            <a:off x="548640" y="411480"/>
+            <a:ext cx="11064240" cy="777240"/>
+          </a:xfrm>
+          <a:prstGeom prst="rect">
+            <a:avLst/>
+          </a:prstGeom>
+          <a:noFill/>
+        </p:spPr>
+        <p:txBody>
+          <a:bodyPr wrap="square">
+            <a:noAutofit/>
+          </a:bodyPr>
+          <a:lstStyle/>
+          <a:p>
+            <a:pPr>
+              <a:lnSpc>
+                <a:spcPts val="2200"/>
+              </a:lnSpc>
+              <a:defRPr sz="2800" b="1">
+                <a:solidFill>
+                  <a:srgbClr val="1A1A2E"/>
+                </a:solidFill>
+                <a:latin typeface="Calibri"/>
+              </a:defRPr>
+            </a:pPr>
+            <a:r>
+              <a:t>Demo: Integration plan</a:t>
+            </a:r>
+          </a:p>
+        </p:txBody>
+      </p:sp>
+      <p:sp>
+        <p:nvSpPr>
+          <p:cNvPr id="3" name="TextBox 2"/>
+          <p:cNvSpPr txBox="1"/>
+          <p:nvPr/>
+        </p:nvSpPr>
+        <p:spPr>
+          <a:xfrm>
+            <a:off x="548640" y="1051560"/>
+            <a:ext cx="11064240" cy="914400"/>
+          </a:xfrm>
+          <a:prstGeom prst="rect">
+            <a:avLst/>
+          </a:prstGeom>
+          <a:solidFill>
+            <a:srgbClr val="F4F4F4"/>
+          </a:solidFill>
+        </p:spPr>
+        <p:txBody>
+          <a:bodyPr wrap="square">
+            <a:noAutofit/>
+          </a:bodyPr>
+          <a:lstStyle/>
+          <a:p>
+            <a:pPr>
+              <a:lnSpc>
+                <a:spcPts val="2200"/>
+              </a:lnSpc>
+              <a:spcAft>
+                <a:spcPts val="200"/>
+              </a:spcAft>
+              <a:defRPr sz="2000" b="0">
+                <a:solidFill>
+                  <a:srgbClr val="333333"/>
+                </a:solidFill>
+                <a:latin typeface="Consolas"/>
+              </a:defRPr>
+            </a:pPr>
+            <a:r>
+              <a:t>$ head -25 module6/templates/INTEGRATION_PLAN.md</a:t>
+            </a:r>
+          </a:p>
+        </p:txBody>
+      </p:sp>
+      <p:pic>
+        <p:nvPicPr>
+          <p:cNvPr id="4" name="Picture 3" descr="ex03_integration.png"/>
+          <p:cNvPicPr>
+            <a:picLocks noChangeAspect="1"/>
+          </p:cNvPicPr>
+          <p:nvPr/>
+        </p:nvPicPr>
+        <p:blipFill>
+          <a:blip r:embed="rId2"/>
+          <a:stretch>
+            <a:fillRect/>
+          </a:stretch>
+        </p:blipFill>
+        <p:spPr>
+          <a:xfrm>
+            <a:off x="548640" y="1965960"/>
+            <a:ext cx="7071358" cy="3977639"/>
+          </a:xfrm>
+          <a:prstGeom prst="rect">
+            <a:avLst/>
+          </a:prstGeom>
+        </p:spPr>
+      </p:pic>
+      <p:sp>
+        <p:nvSpPr>
+          <p:cNvPr id="5" name="TextBox 4"/>
+          <p:cNvSpPr txBox="1"/>
+          <p:nvPr/>
+        </p:nvSpPr>
+        <p:spPr>
+          <a:xfrm>
+            <a:off x="548640" y="6355080"/>
+            <a:ext cx="11064240" cy="320040"/>
+          </a:xfrm>
+          <a:prstGeom prst="rect">
+            <a:avLst/>
+          </a:prstGeom>
+          <a:noFill/>
+        </p:spPr>
+        <p:txBody>
+          <a:bodyPr wrap="square">
+            <a:noAutofit/>
+          </a:bodyPr>
+          <a:lstStyle/>
+          <a:p>
+            <a:pPr algn="r">
+              <a:lnSpc>
+                <a:spcPts val="2200"/>
+              </a:lnSpc>
+              <a:defRPr sz="1000" b="0">
+                <a:solidFill>
+                  <a:srgbClr val="666666"/>
+                </a:solidFill>
+                <a:latin typeface="Calibri"/>
+              </a:defRPr>
+            </a:pPr>
+            <a:r>
+              <a:t>verification_planning_management / Module 6</a:t>
+            </a:r>
+          </a:p>
+        </p:txBody>
+      </p:sp>
+    </p:spTree>
+  </p:cSld>
+  <p:clrMapOvr>
+    <a:masterClrMapping/>
+  </p:clrMapOvr>
+</p:sld>
+</file>
+
+<file path=ppt/slides/slide35.xml><?xml version="1.0" encoding="utf-8"?>
+<p:sld xmlns:a="http://schemas.openxmlformats.org/drawingml/2006/main" xmlns:p="http://schemas.openxmlformats.org/presentationml/2006/main" xmlns:r="http://schemas.openxmlformats.org/officeDocument/2006/relationships">
+  <p:cSld>
+    <p:spTree>
+      <p:nvGrpSpPr>
+        <p:cNvPr id="1" name=""/>
+        <p:cNvGrpSpPr/>
+        <p:nvPr/>
+      </p:nvGrpSpPr>
+      <p:grpSpPr/>
+      <p:sp>
+        <p:nvSpPr>
+          <p:cNvPr id="2" name="TextBox 1"/>
+          <p:cNvSpPr txBox="1"/>
+          <p:nvPr/>
+        </p:nvSpPr>
+        <p:spPr>
+          <a:xfrm>
+            <a:off x="548640" y="411480"/>
+            <a:ext cx="11064240" cy="777240"/>
+          </a:xfrm>
+          <a:prstGeom prst="rect">
+            <a:avLst/>
+          </a:prstGeom>
+          <a:noFill/>
+        </p:spPr>
+        <p:txBody>
+          <a:bodyPr wrap="square">
+            <a:noAutofit/>
+          </a:bodyPr>
+          <a:lstStyle/>
+          <a:p>
+            <a:pPr>
+              <a:lnSpc>
+                <a:spcPts val="2200"/>
+              </a:lnSpc>
+              <a:defRPr sz="2800" b="1">
+                <a:solidFill>
+                  <a:srgbClr val="1A1A2E"/>
+                </a:solidFill>
+                <a:latin typeface="Calibri"/>
+              </a:defRPr>
+            </a:pPr>
+            <a:r>
+              <a:t>Demo: Reference protocol plan</a:t>
+            </a:r>
+          </a:p>
+        </p:txBody>
+      </p:sp>
+      <p:sp>
+        <p:nvSpPr>
+          <p:cNvPr id="3" name="TextBox 2"/>
+          <p:cNvSpPr txBox="1"/>
+          <p:nvPr/>
+        </p:nvSpPr>
+        <p:spPr>
+          <a:xfrm>
+            <a:off x="548640" y="1051560"/>
+            <a:ext cx="11064240" cy="914400"/>
+          </a:xfrm>
+          <a:prstGeom prst="rect">
+            <a:avLst/>
+          </a:prstGeom>
+          <a:solidFill>
+            <a:srgbClr val="F4F4F4"/>
+          </a:solidFill>
+        </p:spPr>
+        <p:txBody>
+          <a:bodyPr wrap="square">
+            <a:noAutofit/>
+          </a:bodyPr>
+          <a:lstStyle/>
+          <a:p>
+            <a:pPr>
+              <a:lnSpc>
+                <a:spcPts val="2200"/>
+              </a:lnSpc>
+              <a:spcAft>
+                <a:spcPts val="200"/>
+              </a:spcAft>
+              <a:defRPr sz="2000" b="0">
+                <a:solidFill>
+                  <a:srgbClr val="333333"/>
+                </a:solidFill>
+                <a:latin typeface="Consolas"/>
+              </a:defRPr>
+            </a:pPr>
+            <a:r>
+              <a:t>$ head -20 module6/.solutions/PROTOCOL_VERIFICATION_PLAN.md</a:t>
+            </a:r>
+          </a:p>
+        </p:txBody>
+      </p:sp>
+      <p:pic>
+        <p:nvPicPr>
+          <p:cNvPr id="4" name="Picture 3" descr="ex04_solutions.png"/>
+          <p:cNvPicPr>
+            <a:picLocks noChangeAspect="1"/>
+          </p:cNvPicPr>
+          <p:nvPr/>
+        </p:nvPicPr>
+        <p:blipFill>
+          <a:blip r:embed="rId2"/>
+          <a:stretch>
+            <a:fillRect/>
+          </a:stretch>
+        </p:blipFill>
+        <p:spPr>
+          <a:xfrm>
+            <a:off x="548640" y="1965960"/>
+            <a:ext cx="7071358" cy="3977639"/>
+          </a:xfrm>
+          <a:prstGeom prst="rect">
+            <a:avLst/>
+          </a:prstGeom>
+        </p:spPr>
+      </p:pic>
+      <p:sp>
+        <p:nvSpPr>
+          <p:cNvPr id="5" name="TextBox 4"/>
+          <p:cNvSpPr txBox="1"/>
+          <p:nvPr/>
+        </p:nvSpPr>
+        <p:spPr>
+          <a:xfrm>
+            <a:off x="548640" y="6355080"/>
+            <a:ext cx="11064240" cy="320040"/>
+          </a:xfrm>
+          <a:prstGeom prst="rect">
+            <a:avLst/>
+          </a:prstGeom>
+          <a:noFill/>
+        </p:spPr>
+        <p:txBody>
+          <a:bodyPr wrap="square">
+            <a:noAutofit/>
+          </a:bodyPr>
+          <a:lstStyle/>
+          <a:p>
+            <a:pPr algn="r">
+              <a:lnSpc>
+                <a:spcPts val="2200"/>
+              </a:lnSpc>
+              <a:defRPr sz="1000" b="0">
+                <a:solidFill>
+                  <a:srgbClr val="666666"/>
+                </a:solidFill>
+                <a:latin typeface="Calibri"/>
+              </a:defRPr>
+            </a:pPr>
+            <a:r>
+              <a:t>verification_planning_management / Module 6</a:t>
+            </a:r>
+          </a:p>
+        </p:txBody>
+      </p:sp>
+    </p:spTree>
+  </p:cSld>
+  <p:clrMapOvr>
+    <a:masterClrMapping/>
+  </p:clrMapOvr>
+</p:sld>
+</file>
+
+<file path=ppt/slides/slide36.xml><?xml version="1.0" encoding="utf-8"?>
+<p:sld xmlns:a="http://schemas.openxmlformats.org/drawingml/2006/main" xmlns:p="http://schemas.openxmlformats.org/presentationml/2006/main" xmlns:r="http://schemas.openxmlformats.org/officeDocument/2006/relationships">
+  <p:cSld>
+    <p:spTree>
+      <p:nvGrpSpPr>
+        <p:cNvPr id="1" name=""/>
+        <p:cNvGrpSpPr/>
+        <p:nvPr/>
+      </p:nvGrpSpPr>
+      <p:grpSpPr/>
+      <p:sp>
+        <p:nvSpPr>
+          <p:cNvPr id="2" name="TextBox 1"/>
+          <p:cNvSpPr txBox="1"/>
+          <p:nvPr/>
+        </p:nvSpPr>
+        <p:spPr>
+          <a:xfrm>
+            <a:off x="548640" y="411480"/>
+            <a:ext cx="11064240" cy="777240"/>
+          </a:xfrm>
+          <a:prstGeom prst="rect">
+            <a:avLst/>
+          </a:prstGeom>
+          <a:noFill/>
+        </p:spPr>
+        <p:txBody>
+          <a:bodyPr wrap="square">
+            <a:noAutofit/>
+          </a:bodyPr>
+          <a:lstStyle/>
+          <a:p>
+            <a:pPr>
+              <a:lnSpc>
+                <a:spcPts val="2200"/>
+              </a:lnSpc>
+              <a:defRPr sz="2800" b="1">
+                <a:solidFill>
+                  <a:srgbClr val="1A1A2E"/>
+                </a:solidFill>
+                <a:latin typeface="Calibri"/>
+              </a:defRPr>
+            </a:pPr>
+            <a:r>
+              <a:t>Demo: Module validation</a:t>
+            </a:r>
+          </a:p>
+        </p:txBody>
+      </p:sp>
+      <p:sp>
+        <p:nvSpPr>
+          <p:cNvPr id="3" name="TextBox 2"/>
+          <p:cNvSpPr txBox="1"/>
+          <p:nvPr/>
+        </p:nvSpPr>
+        <p:spPr>
+          <a:xfrm>
+            <a:off x="548640" y="1051560"/>
+            <a:ext cx="11064240" cy="914400"/>
+          </a:xfrm>
+          <a:prstGeom prst="rect">
+            <a:avLst/>
+          </a:prstGeom>
+          <a:solidFill>
+            <a:srgbClr val="F4F4F4"/>
+          </a:solidFill>
+        </p:spPr>
+        <p:txBody>
+          <a:bodyPr wrap="square">
+            <a:noAutofit/>
+          </a:bodyPr>
+          <a:lstStyle/>
+          <a:p>
+            <a:pPr>
+              <a:lnSpc>
+                <a:spcPts val="2200"/>
+              </a:lnSpc>
+              <a:spcAft>
+                <a:spcPts val="200"/>
+              </a:spcAft>
+              <a:defRPr sz="2000" b="0">
+                <a:solidFill>
+                  <a:srgbClr val="333333"/>
+                </a:solidFill>
+                <a:latin typeface="Consolas"/>
+              </a:defRPr>
+            </a:pPr>
+            <a:r>
+              <a:t>$ ./scripts/module6.sh --check</a:t>
+            </a:r>
+          </a:p>
+        </p:txBody>
+      </p:sp>
+      <p:pic>
+        <p:nvPicPr>
+          <p:cNvPr id="4" name="Picture 3" descr="ex05_validate.png"/>
+          <p:cNvPicPr>
+            <a:picLocks noChangeAspect="1"/>
+          </p:cNvPicPr>
+          <p:nvPr/>
+        </p:nvPicPr>
+        <p:blipFill>
+          <a:blip r:embed="rId2"/>
+          <a:stretch>
+            <a:fillRect/>
+          </a:stretch>
+        </p:blipFill>
+        <p:spPr>
+          <a:xfrm>
+            <a:off x="548640" y="1965960"/>
+            <a:ext cx="7071358" cy="3977639"/>
+          </a:xfrm>
+          <a:prstGeom prst="rect">
+            <a:avLst/>
+          </a:prstGeom>
+        </p:spPr>
+      </p:pic>
+      <p:sp>
+        <p:nvSpPr>
+          <p:cNvPr id="5" name="TextBox 4"/>
+          <p:cNvSpPr txBox="1"/>
+          <p:nvPr/>
+        </p:nvSpPr>
+        <p:spPr>
+          <a:xfrm>
+            <a:off x="548640" y="6355080"/>
+            <a:ext cx="11064240" cy="320040"/>
+          </a:xfrm>
+          <a:prstGeom prst="rect">
+            <a:avLst/>
+          </a:prstGeom>
+          <a:noFill/>
+        </p:spPr>
+        <p:txBody>
+          <a:bodyPr wrap="square">
+            <a:noAutofit/>
+          </a:bodyPr>
+          <a:lstStyle/>
+          <a:p>
+            <a:pPr algn="r">
+              <a:lnSpc>
+                <a:spcPts val="2200"/>
+              </a:lnSpc>
+              <a:defRPr sz="1000" b="0">
+                <a:solidFill>
+                  <a:srgbClr val="666666"/>
+                </a:solidFill>
+                <a:latin typeface="Calibri"/>
+              </a:defRPr>
+            </a:pPr>
+            <a:r>
+              <a:t>verification_planning_management / Module 6</a:t>
+            </a:r>
+          </a:p>
+        </p:txBody>
+      </p:sp>
+    </p:spTree>
+  </p:cSld>
+  <p:clrMapOvr>
+    <a:masterClrMapping/>
+  </p:clrMapOvr>
+</p:sld>
+</file>
+
+<file path=ppt/slides/slide37.xml><?xml version="1.0" encoding="utf-8"?>
+<p:sld xmlns:a="http://schemas.openxmlformats.org/drawingml/2006/main" xmlns:p="http://schemas.openxmlformats.org/presentationml/2006/main" xmlns:r="http://schemas.openxmlformats.org/officeDocument/2006/relationships">
+  <p:cSld>
+    <p:spTree>
+      <p:nvGrpSpPr>
+        <p:cNvPr id="1" name=""/>
+        <p:cNvGrpSpPr/>
+        <p:nvPr/>
+      </p:nvGrpSpPr>
+      <p:grpSpPr/>
+      <p:sp>
+        <p:nvSpPr>
+          <p:cNvPr id="2" name="TextBox 1"/>
+          <p:cNvSpPr txBox="1"/>
+          <p:nvPr/>
+        </p:nvSpPr>
+        <p:spPr>
+          <a:xfrm>
+            <a:off x="548640" y="2743200"/>
+            <a:ext cx="11064240" cy="1371600"/>
+          </a:xfrm>
+          <a:prstGeom prst="rect">
+            <a:avLst/>
+          </a:prstGeom>
+          <a:noFill/>
+        </p:spPr>
+        <p:txBody>
+          <a:bodyPr wrap="square">
+            <a:noAutofit/>
+          </a:bodyPr>
+          <a:lstStyle/>
+          <a:p>
+            <a:pPr algn="ctr">
+              <a:lnSpc>
+                <a:spcPts val="2200"/>
+              </a:lnSpc>
+              <a:defRPr sz="3600" b="1">
+                <a:solidFill>
+                  <a:srgbClr val="1A1A2E"/>
+                </a:solidFill>
+                <a:latin typeface="Calibri"/>
+              </a:defRPr>
+            </a:pPr>
+            <a:r>
+              <a:t>Practice &amp; assessment</a:t>
+            </a:r>
+          </a:p>
+        </p:txBody>
+      </p:sp>
+      <p:sp>
+        <p:nvSpPr>
+          <p:cNvPr id="3" name="TextBox 2"/>
+          <p:cNvSpPr txBox="1"/>
+          <p:nvPr/>
+        </p:nvSpPr>
+        <p:spPr>
+          <a:xfrm>
+            <a:off x="548640" y="6355080"/>
+            <a:ext cx="11064240" cy="320040"/>
+          </a:xfrm>
+          <a:prstGeom prst="rect">
+            <a:avLst/>
+          </a:prstGeom>
+          <a:noFill/>
+        </p:spPr>
+        <p:txBody>
+          <a:bodyPr wrap="square">
+            <a:noAutofit/>
+          </a:bodyPr>
+          <a:lstStyle/>
+          <a:p>
+            <a:pPr algn="r">
+              <a:lnSpc>
+                <a:spcPts val="2200"/>
+              </a:lnSpc>
+              <a:defRPr sz="1000" b="0">
+                <a:solidFill>
+                  <a:srgbClr val="666666"/>
+                </a:solidFill>
+                <a:latin typeface="Calibri"/>
+              </a:defRPr>
+            </a:pPr>
+            <a:r>
+              <a:t>verification_planning_management / Module 6</a:t>
+            </a:r>
+          </a:p>
+        </p:txBody>
+      </p:sp>
+    </p:spTree>
+  </p:cSld>
+  <p:clrMapOvr>
+    <a:masterClrMapping/>
+  </p:clrMapOvr>
+</p:sld>
+</file>
+
+<file path=ppt/slides/slide38.xml><?xml version="1.0" encoding="utf-8"?>
+<p:sld xmlns:a="http://schemas.openxmlformats.org/drawingml/2006/main" xmlns:p="http://schemas.openxmlformats.org/presentationml/2006/main" xmlns:r="http://schemas.openxmlformats.org/officeDocument/2006/relationships">
+  <p:cSld>
+    <p:spTree>
+      <p:nvGrpSpPr>
+        <p:cNvPr id="1" name=""/>
+        <p:cNvGrpSpPr/>
+        <p:nvPr/>
+      </p:nvGrpSpPr>
+      <p:grpSpPr/>
+      <p:sp>
+        <p:nvSpPr>
+          <p:cNvPr id="2" name="TextBox 1"/>
+          <p:cNvSpPr txBox="1"/>
+          <p:nvPr/>
+        </p:nvSpPr>
+        <p:spPr>
+          <a:xfrm>
+            <a:off x="548640" y="411480"/>
+            <a:ext cx="11064240" cy="777240"/>
+          </a:xfrm>
+          <a:prstGeom prst="rect">
+            <a:avLst/>
+          </a:prstGeom>
+          <a:noFill/>
+        </p:spPr>
+        <p:txBody>
+          <a:bodyPr wrap="square">
+            <a:noAutofit/>
+          </a:bodyPr>
+          <a:lstStyle/>
+          <a:p>
+            <a:pPr>
+              <a:lnSpc>
+                <a:spcPts val="2200"/>
+              </a:lnSpc>
+              <a:defRPr sz="2800" b="1">
+                <a:solidFill>
+                  <a:srgbClr val="1A1A2E"/>
+                </a:solidFill>
+                <a:latin typeface="Calibri"/>
+              </a:defRPr>
+            </a:pPr>
+            <a:r>
+              <a:t>What you should know (1/2)</a:t>
+            </a:r>
+          </a:p>
+        </p:txBody>
+      </p:sp>
+      <p:sp>
+        <p:nvSpPr>
+          <p:cNvPr id="3" name="TextBox 2"/>
+          <p:cNvSpPr txBox="1"/>
+          <p:nvPr/>
+        </p:nvSpPr>
+        <p:spPr>
+          <a:xfrm>
+            <a:off x="548640" y="1234440"/>
+            <a:ext cx="11064240" cy="4937760"/>
+          </a:xfrm>
+          <a:prstGeom prst="rect">
+            <a:avLst/>
+          </a:prstGeom>
+          <a:noFill/>
+        </p:spPr>
+        <p:txBody>
+          <a:bodyPr wrap="square">
+            <a:noAutofit/>
+          </a:bodyPr>
+          <a:lstStyle/>
+          <a:p>
             <a:pPr>
               <a:lnSpc>
                 <a:spcPts val="2200"/>
@@ -9708,7 +10876,7 @@
               </a:defRPr>
             </a:pPr>
             <a:r>
-              <a:t>• Apply your planning, environment, and regression</a:t>
+              <a:t>• Design and document multi-agent UVM environments for</a:t>
             </a:r>
           </a:p>
           <a:p>
@@ -9727,7 +10895,7 @@
               </a:defRPr>
             </a:pPr>
             <a:r>
-              <a:t>      skills to **complex multi-agent, protocol-heavy te…</a:t>
+              <a:t>      protocol-based DUTs.</a:t>
             </a:r>
           </a:p>
           <a:p>
@@ -9746,7 +10914,7 @@
               </a:defRPr>
             </a:pPr>
             <a:r>
-              <a:t>• Complete module6/CHECKLIST.md</a:t>
+              <a:t>• Implement and integrate protocol agents and protocol</a:t>
             </a:r>
           </a:p>
           <a:p>
@@ -9765,7 +10933,7 @@
               </a:defRPr>
             </a:pPr>
             <a:r>
-              <a:t>• Review module6/EXAMPLES.md and run each lab</a:t>
+              <a:t>      checkers.</a:t>
             </a:r>
           </a:p>
           <a:p>
@@ -9784,7 +10952,335 @@
               </a:defRPr>
             </a:pPr>
             <a:r>
-              <a:t>• Next: Next module in course</a:t>
+              <a:t>• Apply layered architecture patterns to keep complex</a:t>
+            </a:r>
+          </a:p>
+          <a:p>
+            <a:pPr>
+              <a:lnSpc>
+                <a:spcPts val="2200"/>
+              </a:lnSpc>
+              <a:spcAft>
+                <a:spcPts val="1000"/>
+              </a:spcAft>
+              <a:defRPr sz="2000" b="0">
+                <a:solidFill>
+                  <a:srgbClr val="333333"/>
+                </a:solidFill>
+                <a:latin typeface="Calibri"/>
+              </a:defRPr>
+            </a:pPr>
+            <a:r>
+              <a:t>      benches maintainable.</a:t>
+            </a:r>
+          </a:p>
+          <a:p>
+            <a:pPr>
+              <a:lnSpc>
+                <a:spcPts val="2200"/>
+              </a:lnSpc>
+              <a:spcAft>
+                <a:spcPts val="1000"/>
+              </a:spcAft>
+              <a:defRPr sz="2000" b="0">
+                <a:solidFill>
+                  <a:srgbClr val="333333"/>
+                </a:solidFill>
+                <a:latin typeface="Calibri"/>
+              </a:defRPr>
+            </a:pPr>
+            <a:r>
+              <a:t>• Analyze and debug multi-channel, protocol-level</a:t>
+            </a:r>
+          </a:p>
+          <a:p>
+            <a:pPr>
+              <a:lnSpc>
+                <a:spcPts val="2200"/>
+              </a:lnSpc>
+              <a:spcAft>
+                <a:spcPts val="1000"/>
+              </a:spcAft>
+              <a:defRPr sz="2000" b="0">
+                <a:solidFill>
+                  <a:srgbClr val="333333"/>
+                </a:solidFill>
+                <a:latin typeface="Calibri"/>
+              </a:defRPr>
+            </a:pPr>
+            <a:r>
+              <a:t>      behavior in simulations.</a:t>
+            </a:r>
+          </a:p>
+          <a:p>
+            <a:pPr>
+              <a:lnSpc>
+                <a:spcPts val="2200"/>
+              </a:lnSpc>
+              <a:spcAft>
+                <a:spcPts val="1000"/>
+              </a:spcAft>
+              <a:defRPr sz="2000" b="0">
+                <a:solidFill>
+                  <a:srgbClr val="333333"/>
+                </a:solidFill>
+                <a:latin typeface="Calibri"/>
+              </a:defRPr>
+            </a:pPr>
+            <a:r>
+              <a:t>• Multi-agent/multi-channel environment design</a:t>
+            </a:r>
+          </a:p>
+          <a:p>
+            <a:pPr>
+              <a:lnSpc>
+                <a:spcPts val="2200"/>
+              </a:lnSpc>
+              <a:spcAft>
+                <a:spcPts val="1000"/>
+              </a:spcAft>
+              <a:defRPr sz="2000" b="0">
+                <a:solidFill>
+                  <a:srgbClr val="333333"/>
+                </a:solidFill>
+                <a:latin typeface="Calibri"/>
+              </a:defRPr>
+            </a:pPr>
+            <a:r>
+              <a:t>      documented in `module6/MULTI_AGENT_ARCHITECTURE.md`.</a:t>
+            </a:r>
+          </a:p>
+          <a:p>
+            <a:pPr>
+              <a:lnSpc>
+                <a:spcPts val="2200"/>
+              </a:lnSpc>
+              <a:spcAft>
+                <a:spcPts val="1000"/>
+              </a:spcAft>
+              <a:defRPr sz="2000" b="0">
+                <a:solidFill>
+                  <a:srgbClr val="333333"/>
+                </a:solidFill>
+                <a:latin typeface="Calibri"/>
+              </a:defRPr>
+            </a:pPr>
+            <a:r>
+              <a:t>• Protocol verification strategy documented in</a:t>
+            </a:r>
+          </a:p>
+          <a:p>
+            <a:pPr>
+              <a:lnSpc>
+                <a:spcPts val="2200"/>
+              </a:lnSpc>
+              <a:spcAft>
+                <a:spcPts val="1000"/>
+              </a:spcAft>
+              <a:defRPr sz="2000" b="0">
+                <a:solidFill>
+                  <a:srgbClr val="333333"/>
+                </a:solidFill>
+                <a:latin typeface="Calibri"/>
+              </a:defRPr>
+            </a:pPr>
+            <a:r>
+              <a:t>      `module6/PROTOCOL_VERIFICATION_PLAN.md`.</a:t>
+            </a:r>
+          </a:p>
+        </p:txBody>
+      </p:sp>
+      <p:sp>
+        <p:nvSpPr>
+          <p:cNvPr id="4" name="TextBox 3"/>
+          <p:cNvSpPr txBox="1"/>
+          <p:nvPr/>
+        </p:nvSpPr>
+        <p:spPr>
+          <a:xfrm>
+            <a:off x="548640" y="6355080"/>
+            <a:ext cx="11064240" cy="320040"/>
+          </a:xfrm>
+          <a:prstGeom prst="rect">
+            <a:avLst/>
+          </a:prstGeom>
+          <a:noFill/>
+        </p:spPr>
+        <p:txBody>
+          <a:bodyPr wrap="square">
+            <a:noAutofit/>
+          </a:bodyPr>
+          <a:lstStyle/>
+          <a:p>
+            <a:pPr algn="r">
+              <a:lnSpc>
+                <a:spcPts val="2200"/>
+              </a:lnSpc>
+              <a:defRPr sz="1000" b="0">
+                <a:solidFill>
+                  <a:srgbClr val="666666"/>
+                </a:solidFill>
+                <a:latin typeface="Calibri"/>
+              </a:defRPr>
+            </a:pPr>
+            <a:r>
+              <a:t>verification_planning_management / Module 6</a:t>
+            </a:r>
+          </a:p>
+        </p:txBody>
+      </p:sp>
+    </p:spTree>
+  </p:cSld>
+  <p:clrMapOvr>
+    <a:masterClrMapping/>
+  </p:clrMapOvr>
+</p:sld>
+</file>
+
+<file path=ppt/slides/slide39.xml><?xml version="1.0" encoding="utf-8"?>
+<p:sld xmlns:a="http://schemas.openxmlformats.org/drawingml/2006/main" xmlns:p="http://schemas.openxmlformats.org/presentationml/2006/main" xmlns:r="http://schemas.openxmlformats.org/officeDocument/2006/relationships">
+  <p:cSld>
+    <p:spTree>
+      <p:nvGrpSpPr>
+        <p:cNvPr id="1" name=""/>
+        <p:cNvGrpSpPr/>
+        <p:nvPr/>
+      </p:nvGrpSpPr>
+      <p:grpSpPr/>
+      <p:sp>
+        <p:nvSpPr>
+          <p:cNvPr id="2" name="TextBox 1"/>
+          <p:cNvSpPr txBox="1"/>
+          <p:nvPr/>
+        </p:nvSpPr>
+        <p:spPr>
+          <a:xfrm>
+            <a:off x="548640" y="411480"/>
+            <a:ext cx="11064240" cy="777240"/>
+          </a:xfrm>
+          <a:prstGeom prst="rect">
+            <a:avLst/>
+          </a:prstGeom>
+          <a:noFill/>
+        </p:spPr>
+        <p:txBody>
+          <a:bodyPr wrap="square">
+            <a:noAutofit/>
+          </a:bodyPr>
+          <a:lstStyle/>
+          <a:p>
+            <a:pPr>
+              <a:lnSpc>
+                <a:spcPts val="2200"/>
+              </a:lnSpc>
+              <a:defRPr sz="2800" b="1">
+                <a:solidFill>
+                  <a:srgbClr val="1A1A2E"/>
+                </a:solidFill>
+                <a:latin typeface="Calibri"/>
+              </a:defRPr>
+            </a:pPr>
+            <a:r>
+              <a:t>What you should know (2/2)</a:t>
+            </a:r>
+          </a:p>
+        </p:txBody>
+      </p:sp>
+      <p:sp>
+        <p:nvSpPr>
+          <p:cNvPr id="3" name="TextBox 2"/>
+          <p:cNvSpPr txBox="1"/>
+          <p:nvPr/>
+        </p:nvSpPr>
+        <p:spPr>
+          <a:xfrm>
+            <a:off x="548640" y="1234440"/>
+            <a:ext cx="11064240" cy="4937760"/>
+          </a:xfrm>
+          <a:prstGeom prst="rect">
+            <a:avLst/>
+          </a:prstGeom>
+          <a:noFill/>
+        </p:spPr>
+        <p:txBody>
+          <a:bodyPr wrap="square">
+            <a:noAutofit/>
+          </a:bodyPr>
+          <a:lstStyle/>
+          <a:p>
+            <a:pPr>
+              <a:lnSpc>
+                <a:spcPts val="2200"/>
+              </a:lnSpc>
+              <a:spcAft>
+                <a:spcPts val="1000"/>
+              </a:spcAft>
+              <a:defRPr sz="2000" b="0">
+                <a:solidFill>
+                  <a:srgbClr val="333333"/>
+                </a:solidFill>
+                <a:latin typeface="Calibri"/>
+              </a:defRPr>
+            </a:pPr>
+            <a:r>
+              <a:t>• Integration patterns and system-level scenarios</a:t>
+            </a:r>
+          </a:p>
+          <a:p>
+            <a:pPr>
+              <a:lnSpc>
+                <a:spcPts val="2200"/>
+              </a:lnSpc>
+              <a:spcAft>
+                <a:spcPts val="1000"/>
+              </a:spcAft>
+              <a:defRPr sz="2000" b="0">
+                <a:solidFill>
+                  <a:srgbClr val="333333"/>
+                </a:solidFill>
+                <a:latin typeface="Calibri"/>
+              </a:defRPr>
+            </a:pPr>
+            <a:r>
+              <a:t>      documented in `module6/INTEGRATION_PLAN.md`.</a:t>
+            </a:r>
+          </a:p>
+          <a:p>
+            <a:pPr>
+              <a:lnSpc>
+                <a:spcPts val="2200"/>
+              </a:lnSpc>
+              <a:spcAft>
+                <a:spcPts val="1000"/>
+              </a:spcAft>
+              <a:defRPr sz="2000" b="0">
+                <a:solidFill>
+                  <a:srgbClr val="333333"/>
+                </a:solidFill>
+                <a:latin typeface="Calibri"/>
+              </a:defRPr>
+            </a:pPr>
+            <a:r>
+              <a:t>• Complex bench design reviewed; action items captured</a:t>
+            </a:r>
+          </a:p>
+          <a:p>
+            <a:pPr>
+              <a:lnSpc>
+                <a:spcPts val="2200"/>
+              </a:lnSpc>
+              <a:spcAft>
+                <a:spcPts val="1000"/>
+              </a:spcAft>
+              <a:defRPr sz="2000" b="0">
+                <a:solidFill>
+                  <a:srgbClr val="333333"/>
+                </a:solidFill>
+                <a:latin typeface="Calibri"/>
+              </a:defRPr>
+            </a:pPr>
+            <a:r>
+              <a:t>      in the docs.</a:t>
             </a:r>
           </a:p>
         </p:txBody>
@@ -9995,6 +11491,491 @@
 </p:sld>
 </file>
 
+<file path=ppt/slides/slide40.xml><?xml version="1.0" encoding="utf-8"?>
+<p:sld xmlns:a="http://schemas.openxmlformats.org/drawingml/2006/main" xmlns:p="http://schemas.openxmlformats.org/presentationml/2006/main" xmlns:r="http://schemas.openxmlformats.org/officeDocument/2006/relationships">
+  <p:cSld>
+    <p:spTree>
+      <p:nvGrpSpPr>
+        <p:cNvPr id="1" name=""/>
+        <p:cNvGrpSpPr/>
+        <p:nvPr/>
+      </p:nvGrpSpPr>
+      <p:grpSpPr/>
+      <p:sp>
+        <p:nvSpPr>
+          <p:cNvPr id="2" name="TextBox 1"/>
+          <p:cNvSpPr txBox="1"/>
+          <p:nvPr/>
+        </p:nvSpPr>
+        <p:spPr>
+          <a:xfrm>
+            <a:off x="548640" y="411480"/>
+            <a:ext cx="11064240" cy="777240"/>
+          </a:xfrm>
+          <a:prstGeom prst="rect">
+            <a:avLst/>
+          </a:prstGeom>
+          <a:noFill/>
+        </p:spPr>
+        <p:txBody>
+          <a:bodyPr wrap="square">
+            <a:noAutofit/>
+          </a:bodyPr>
+          <a:lstStyle/>
+          <a:p>
+            <a:pPr>
+              <a:lnSpc>
+                <a:spcPts val="2200"/>
+              </a:lnSpc>
+              <a:defRPr sz="2800" b="1">
+                <a:solidFill>
+                  <a:srgbClr val="1A1A2E"/>
+                </a:solidFill>
+                <a:latin typeface="Calibri"/>
+              </a:defRPr>
+            </a:pPr>
+            <a:r>
+              <a:t>Assessment checklist</a:t>
+            </a:r>
+          </a:p>
+        </p:txBody>
+      </p:sp>
+      <p:sp>
+        <p:nvSpPr>
+          <p:cNvPr id="3" name="TextBox 2"/>
+          <p:cNvSpPr txBox="1"/>
+          <p:nvPr/>
+        </p:nvSpPr>
+        <p:spPr>
+          <a:xfrm>
+            <a:off x="548640" y="1234440"/>
+            <a:ext cx="11064240" cy="4937760"/>
+          </a:xfrm>
+          <a:prstGeom prst="rect">
+            <a:avLst/>
+          </a:prstGeom>
+          <a:noFill/>
+        </p:spPr>
+        <p:txBody>
+          <a:bodyPr wrap="square">
+            <a:noAutofit/>
+          </a:bodyPr>
+          <a:lstStyle/>
+          <a:p>
+            <a:pPr>
+              <a:lnSpc>
+                <a:spcPts val="2200"/>
+              </a:lnSpc>
+              <a:spcAft>
+                <a:spcPts val="1000"/>
+              </a:spcAft>
+              <a:defRPr sz="2000" b="0">
+                <a:solidFill>
+                  <a:srgbClr val="333333"/>
+                </a:solidFill>
+                <a:latin typeface="Calibri"/>
+              </a:defRPr>
+            </a:pPr>
+            <a:r>
+              <a:t>• Multi-agent/multi-channel environment design</a:t>
+            </a:r>
+          </a:p>
+          <a:p>
+            <a:pPr>
+              <a:lnSpc>
+                <a:spcPts val="2200"/>
+              </a:lnSpc>
+              <a:spcAft>
+                <a:spcPts val="1000"/>
+              </a:spcAft>
+              <a:defRPr sz="2000" b="0">
+                <a:solidFill>
+                  <a:srgbClr val="333333"/>
+                </a:solidFill>
+                <a:latin typeface="Calibri"/>
+              </a:defRPr>
+            </a:pPr>
+            <a:r>
+              <a:t>      documented in `module6/MULTI_AGENT_ARCHITECTURE.md`.</a:t>
+            </a:r>
+          </a:p>
+          <a:p>
+            <a:pPr>
+              <a:lnSpc>
+                <a:spcPts val="2200"/>
+              </a:lnSpc>
+              <a:spcAft>
+                <a:spcPts val="1000"/>
+              </a:spcAft>
+              <a:defRPr sz="2000" b="0">
+                <a:solidFill>
+                  <a:srgbClr val="333333"/>
+                </a:solidFill>
+                <a:latin typeface="Calibri"/>
+              </a:defRPr>
+            </a:pPr>
+            <a:r>
+              <a:t>• Protocol verification strategy documented in</a:t>
+            </a:r>
+          </a:p>
+          <a:p>
+            <a:pPr>
+              <a:lnSpc>
+                <a:spcPts val="2200"/>
+              </a:lnSpc>
+              <a:spcAft>
+                <a:spcPts val="1000"/>
+              </a:spcAft>
+              <a:defRPr sz="2000" b="0">
+                <a:solidFill>
+                  <a:srgbClr val="333333"/>
+                </a:solidFill>
+                <a:latin typeface="Calibri"/>
+              </a:defRPr>
+            </a:pPr>
+            <a:r>
+              <a:t>      `module6/PROTOCOL_VERIFICATION_PLAN.md`.</a:t>
+            </a:r>
+          </a:p>
+          <a:p>
+            <a:pPr>
+              <a:lnSpc>
+                <a:spcPts val="2200"/>
+              </a:lnSpc>
+              <a:spcAft>
+                <a:spcPts val="1000"/>
+              </a:spcAft>
+              <a:defRPr sz="2000" b="0">
+                <a:solidFill>
+                  <a:srgbClr val="333333"/>
+                </a:solidFill>
+                <a:latin typeface="Calibri"/>
+              </a:defRPr>
+            </a:pPr>
+            <a:r>
+              <a:t>• Integration patterns and system-level scenarios</a:t>
+            </a:r>
+          </a:p>
+          <a:p>
+            <a:pPr>
+              <a:lnSpc>
+                <a:spcPts val="2200"/>
+              </a:lnSpc>
+              <a:spcAft>
+                <a:spcPts val="1000"/>
+              </a:spcAft>
+              <a:defRPr sz="2000" b="0">
+                <a:solidFill>
+                  <a:srgbClr val="333333"/>
+                </a:solidFill>
+                <a:latin typeface="Calibri"/>
+              </a:defRPr>
+            </a:pPr>
+            <a:r>
+              <a:t>      documented in `module6/INTEGRATION_PLAN.md`.</a:t>
+            </a:r>
+          </a:p>
+          <a:p>
+            <a:pPr>
+              <a:lnSpc>
+                <a:spcPts val="2200"/>
+              </a:lnSpc>
+              <a:spcAft>
+                <a:spcPts val="1000"/>
+              </a:spcAft>
+              <a:defRPr sz="2000" b="0">
+                <a:solidFill>
+                  <a:srgbClr val="333333"/>
+                </a:solidFill>
+                <a:latin typeface="Calibri"/>
+              </a:defRPr>
+            </a:pPr>
+            <a:r>
+              <a:t>• Complex bench design reviewed; action items captured</a:t>
+            </a:r>
+          </a:p>
+          <a:p>
+            <a:pPr>
+              <a:lnSpc>
+                <a:spcPts val="2200"/>
+              </a:lnSpc>
+              <a:spcAft>
+                <a:spcPts val="1000"/>
+              </a:spcAft>
+              <a:defRPr sz="2000" b="0">
+                <a:solidFill>
+                  <a:srgbClr val="333333"/>
+                </a:solidFill>
+                <a:latin typeface="Calibri"/>
+              </a:defRPr>
+            </a:pPr>
+            <a:r>
+              <a:t>      in the docs.</a:t>
+            </a:r>
+          </a:p>
+        </p:txBody>
+      </p:sp>
+      <p:sp>
+        <p:nvSpPr>
+          <p:cNvPr id="4" name="TextBox 3"/>
+          <p:cNvSpPr txBox="1"/>
+          <p:nvPr/>
+        </p:nvSpPr>
+        <p:spPr>
+          <a:xfrm>
+            <a:off x="548640" y="6355080"/>
+            <a:ext cx="11064240" cy="320040"/>
+          </a:xfrm>
+          <a:prstGeom prst="rect">
+            <a:avLst/>
+          </a:prstGeom>
+          <a:noFill/>
+        </p:spPr>
+        <p:txBody>
+          <a:bodyPr wrap="square">
+            <a:noAutofit/>
+          </a:bodyPr>
+          <a:lstStyle/>
+          <a:p>
+            <a:pPr algn="r">
+              <a:lnSpc>
+                <a:spcPts val="2200"/>
+              </a:lnSpc>
+              <a:defRPr sz="1000" b="0">
+                <a:solidFill>
+                  <a:srgbClr val="666666"/>
+                </a:solidFill>
+                <a:latin typeface="Calibri"/>
+              </a:defRPr>
+            </a:pPr>
+            <a:r>
+              <a:t>verification_planning_management / Module 6</a:t>
+            </a:r>
+          </a:p>
+        </p:txBody>
+      </p:sp>
+    </p:spTree>
+  </p:cSld>
+  <p:clrMapOvr>
+    <a:masterClrMapping/>
+  </p:clrMapOvr>
+</p:sld>
+</file>
+
+<file path=ppt/slides/slide41.xml><?xml version="1.0" encoding="utf-8"?>
+<p:sld xmlns:a="http://schemas.openxmlformats.org/drawingml/2006/main" xmlns:p="http://schemas.openxmlformats.org/presentationml/2006/main" xmlns:r="http://schemas.openxmlformats.org/officeDocument/2006/relationships">
+  <p:cSld>
+    <p:spTree>
+      <p:nvGrpSpPr>
+        <p:cNvPr id="1" name=""/>
+        <p:cNvGrpSpPr/>
+        <p:nvPr/>
+      </p:nvGrpSpPr>
+      <p:grpSpPr/>
+      <p:sp>
+        <p:nvSpPr>
+          <p:cNvPr id="2" name="TextBox 1"/>
+          <p:cNvSpPr txBox="1"/>
+          <p:nvPr/>
+        </p:nvSpPr>
+        <p:spPr>
+          <a:xfrm>
+            <a:off x="548640" y="411480"/>
+            <a:ext cx="11064240" cy="777240"/>
+          </a:xfrm>
+          <a:prstGeom prst="rect">
+            <a:avLst/>
+          </a:prstGeom>
+          <a:noFill/>
+        </p:spPr>
+        <p:txBody>
+          <a:bodyPr wrap="square">
+            <a:noAutofit/>
+          </a:bodyPr>
+          <a:lstStyle/>
+          <a:p>
+            <a:pPr>
+              <a:lnSpc>
+                <a:spcPts val="2200"/>
+              </a:lnSpc>
+              <a:defRPr sz="2800" b="1">
+                <a:solidFill>
+                  <a:srgbClr val="1A1A2E"/>
+                </a:solidFill>
+                <a:latin typeface="Calibri"/>
+              </a:defRPr>
+            </a:pPr>
+            <a:r>
+              <a:t>Summary &amp; next steps</a:t>
+            </a:r>
+          </a:p>
+        </p:txBody>
+      </p:sp>
+      <p:sp>
+        <p:nvSpPr>
+          <p:cNvPr id="3" name="TextBox 2"/>
+          <p:cNvSpPr txBox="1"/>
+          <p:nvPr/>
+        </p:nvSpPr>
+        <p:spPr>
+          <a:xfrm>
+            <a:off x="548640" y="1234440"/>
+            <a:ext cx="11064240" cy="4937760"/>
+          </a:xfrm>
+          <a:prstGeom prst="rect">
+            <a:avLst/>
+          </a:prstGeom>
+          <a:noFill/>
+        </p:spPr>
+        <p:txBody>
+          <a:bodyPr wrap="square">
+            <a:noAutofit/>
+          </a:bodyPr>
+          <a:lstStyle/>
+          <a:p>
+            <a:pPr>
+              <a:lnSpc>
+                <a:spcPts val="2200"/>
+              </a:lnSpc>
+              <a:spcAft>
+                <a:spcPts val="1000"/>
+              </a:spcAft>
+              <a:defRPr sz="2000" b="0">
+                <a:solidFill>
+                  <a:srgbClr val="333333"/>
+                </a:solidFill>
+                <a:latin typeface="Calibri"/>
+              </a:defRPr>
+            </a:pPr>
+            <a:r>
+              <a:t>• Apply your planning, environment, and regression</a:t>
+            </a:r>
+          </a:p>
+          <a:p>
+            <a:pPr>
+              <a:lnSpc>
+                <a:spcPts val="2200"/>
+              </a:lnSpc>
+              <a:spcAft>
+                <a:spcPts val="1000"/>
+              </a:spcAft>
+              <a:defRPr sz="2000" b="0">
+                <a:solidFill>
+                  <a:srgbClr val="333333"/>
+                </a:solidFill>
+                <a:latin typeface="Calibri"/>
+              </a:defRPr>
+            </a:pPr>
+            <a:r>
+              <a:t>      skills to **complex multi-agent, protocol-heavy te…</a:t>
+            </a:r>
+          </a:p>
+          <a:p>
+            <a:pPr>
+              <a:lnSpc>
+                <a:spcPts val="2200"/>
+              </a:lnSpc>
+              <a:spcAft>
+                <a:spcPts val="1000"/>
+              </a:spcAft>
+              <a:defRPr sz="2000" b="0">
+                <a:solidFill>
+                  <a:srgbClr val="333333"/>
+                </a:solidFill>
+                <a:latin typeface="Calibri"/>
+              </a:defRPr>
+            </a:pPr>
+            <a:r>
+              <a:t>• Complete module6/CHECKLIST.md</a:t>
+            </a:r>
+          </a:p>
+          <a:p>
+            <a:pPr>
+              <a:lnSpc>
+                <a:spcPts val="2200"/>
+              </a:lnSpc>
+              <a:spcAft>
+                <a:spcPts val="1000"/>
+              </a:spcAft>
+              <a:defRPr sz="2000" b="0">
+                <a:solidFill>
+                  <a:srgbClr val="333333"/>
+                </a:solidFill>
+                <a:latin typeface="Calibri"/>
+              </a:defRPr>
+            </a:pPr>
+            <a:r>
+              <a:t>• Review module6/EXAMPLES.md and run each lab</a:t>
+            </a:r>
+          </a:p>
+          <a:p>
+            <a:pPr>
+              <a:lnSpc>
+                <a:spcPts val="2200"/>
+              </a:lnSpc>
+              <a:spcAft>
+                <a:spcPts val="1000"/>
+              </a:spcAft>
+              <a:defRPr sz="2000" b="0">
+                <a:solidFill>
+                  <a:srgbClr val="333333"/>
+                </a:solidFill>
+                <a:latin typeface="Calibri"/>
+              </a:defRPr>
+            </a:pPr>
+            <a:r>
+              <a:t>• Next: Next module in course</a:t>
+            </a:r>
+          </a:p>
+        </p:txBody>
+      </p:sp>
+      <p:sp>
+        <p:nvSpPr>
+          <p:cNvPr id="4" name="TextBox 3"/>
+          <p:cNvSpPr txBox="1"/>
+          <p:nvPr/>
+        </p:nvSpPr>
+        <p:spPr>
+          <a:xfrm>
+            <a:off x="548640" y="6355080"/>
+            <a:ext cx="11064240" cy="320040"/>
+          </a:xfrm>
+          <a:prstGeom prst="rect">
+            <a:avLst/>
+          </a:prstGeom>
+          <a:noFill/>
+        </p:spPr>
+        <p:txBody>
+          <a:bodyPr wrap="square">
+            <a:noAutofit/>
+          </a:bodyPr>
+          <a:lstStyle/>
+          <a:p>
+            <a:pPr algn="r">
+              <a:lnSpc>
+                <a:spcPts val="2200"/>
+              </a:lnSpc>
+              <a:defRPr sz="1000" b="0">
+                <a:solidFill>
+                  <a:srgbClr val="666666"/>
+                </a:solidFill>
+                <a:latin typeface="Calibri"/>
+              </a:defRPr>
+            </a:pPr>
+            <a:r>
+              <a:t>verification_planning_management / Module 6</a:t>
+            </a:r>
+          </a:p>
+        </p:txBody>
+      </p:sp>
+    </p:spTree>
+  </p:cSld>
+  <p:clrMapOvr>
+    <a:masterClrMapping/>
+  </p:clrMapOvr>
+</p:sld>
+</file>
+
 <file path=ppt/slides/slide5.xml><?xml version="1.0" encoding="utf-8"?>
 <p:sld xmlns:a="http://schemas.openxmlformats.org/drawingml/2006/main" xmlns:p="http://schemas.openxmlformats.org/presentationml/2006/main" xmlns:r="http://schemas.openxmlformats.org/officeDocument/2006/relationships">
   <p:cSld>
@@ -10177,7 +12158,7 @@
               </a:defRPr>
             </a:pPr>
             <a:r>
-              <a:t>Design architecture</a:t>
+              <a:t>How to learn this module</a:t>
             </a:r>
           </a:p>
         </p:txBody>
@@ -10273,7 +12254,7 @@
               </a:defRPr>
             </a:pPr>
             <a:r>
-              <a:t>1. Multi-agent / multi-channel TB</a:t>
+              <a:t>Suggested learning path</a:t>
             </a:r>
           </a:p>
         </p:txBody>
@@ -10287,7 +12268,7 @@
         <p:spPr>
           <a:xfrm>
             <a:off x="548640" y="1234440"/>
-            <a:ext cx="5303520" cy="4754880"/>
+            <a:ext cx="11064240" cy="4937760"/>
           </a:xfrm>
           <a:prstGeom prst="rect">
             <a:avLst/>
@@ -10315,7 +12296,7 @@
               </a:defRPr>
             </a:pPr>
             <a:r>
-              <a:t>• Multiple agents (per interface</a:t>
+              <a:t>• Re-read `module4/ENV_DESIGN.md` and</a:t>
             </a:r>
           </a:p>
           <a:p>
@@ -10334,7 +12315,7 @@
               </a:defRPr>
             </a:pPr>
             <a:r>
-              <a:t>      or channel) coordinated by env</a:t>
+              <a:t>      `module5/REGRESSION_OPS.md`.</a:t>
             </a:r>
           </a:p>
           <a:p>
@@ -10353,7 +12334,7 @@
               </a:defRPr>
             </a:pPr>
             <a:r>
-              <a:t>      and virtual sequences.</a:t>
+              <a:t>• Scaffold Module 6 workspace: `./scripts/module6.sh</a:t>
             </a:r>
           </a:p>
           <a:p>
@@ -10372,7 +12353,7 @@
               </a:defRPr>
             </a:pPr>
             <a:r>
-              <a:t>• Layered architecture: block</a:t>
+              <a:t>      --scaffold`</a:t>
             </a:r>
           </a:p>
           <a:p>
@@ -10391,7 +12372,7 @@
               </a:defRPr>
             </a:pPr>
             <a:r>
-              <a:t>      agents → fabric/scoreboard →</a:t>
+              <a:t>• Complete `MULTI_AGENT_ARCHITECTURE.md`,</a:t>
             </a:r>
           </a:p>
           <a:p>
@@ -10410,7 +12391,7 @@
               </a:defRPr>
             </a:pPr>
             <a:r>
-              <a:t>      subsystem scenarios</a:t>
+              <a:t>      `PROTOCOL_VERIFICATION_PLAN.md`, and</a:t>
             </a:r>
           </a:p>
           <a:p>
@@ -10429,38 +12410,71 @@
               </a:defRPr>
             </a:pPr>
             <a:r>
-              <a:t>      (`MULTI_AGENT_ARCHITEC…</a:t>
-            </a:r>
-          </a:p>
-        </p:txBody>
-      </p:sp>
-      <p:pic>
-        <p:nvPicPr>
-          <p:cNvPr id="4" name="Picture 3" descr="rtl_architecture.png"/>
-          <p:cNvPicPr>
-            <a:picLocks noChangeAspect="1"/>
-          </p:cNvPicPr>
-          <p:nvPr/>
-        </p:nvPicPr>
-        <p:blipFill>
-          <a:blip r:embed="rId2"/>
-          <a:stretch>
-            <a:fillRect/>
-          </a:stretch>
-        </p:blipFill>
-        <p:spPr>
-          <a:xfrm>
-            <a:off x="6172200" y="2094547"/>
-            <a:ext cx="5394960" cy="3034665"/>
-          </a:xfrm>
-          <a:prstGeom prst="rect">
-            <a:avLst/>
-          </a:prstGeom>
-        </p:spPr>
-      </p:pic>
-      <p:sp>
-        <p:nvSpPr>
-          <p:cNvPr id="5" name="TextBox 4"/>
+              <a:t>      `INTEGRATION_PLAN.md`.</a:t>
+            </a:r>
+          </a:p>
+          <a:p>
+            <a:pPr>
+              <a:lnSpc>
+                <a:spcPts val="2200"/>
+              </a:lnSpc>
+              <a:spcAft>
+                <a:spcPts val="1000"/>
+              </a:spcAft>
+              <a:defRPr sz="2000" b="0">
+                <a:solidFill>
+                  <a:srgbClr val="333333"/>
+                </a:solidFill>
+                <a:latin typeface="Calibri"/>
+              </a:defRPr>
+            </a:pPr>
+            <a:r>
+              <a:t>• Add or refine multi-agent and protocol checker</a:t>
+            </a:r>
+          </a:p>
+          <a:p>
+            <a:pPr>
+              <a:lnSpc>
+                <a:spcPts val="2200"/>
+              </a:lnSpc>
+              <a:spcAft>
+                <a:spcPts val="1000"/>
+              </a:spcAft>
+              <a:defRPr sz="2000" b="0">
+                <a:solidFill>
+                  <a:srgbClr val="333333"/>
+                </a:solidFill>
+                <a:latin typeface="Calibri"/>
+              </a:defRPr>
+            </a:pPr>
+            <a:r>
+              <a:t>      components in `common_dut/tb/`.</a:t>
+            </a:r>
+          </a:p>
+          <a:p>
+            <a:pPr>
+              <a:lnSpc>
+                <a:spcPts val="2200"/>
+              </a:lnSpc>
+              <a:spcAft>
+                <a:spcPts val="1000"/>
+              </a:spcAft>
+              <a:defRPr sz="2000" b="0">
+                <a:solidFill>
+                  <a:srgbClr val="333333"/>
+                </a:solidFill>
+                <a:latin typeface="Calibri"/>
+              </a:defRPr>
+            </a:pPr>
+            <a:r>
+              <a:t>• Validate: `./scripts/module6.sh --check`</a:t>
+            </a:r>
+          </a:p>
+        </p:txBody>
+      </p:sp>
+      <p:sp>
+        <p:nvSpPr>
+          <p:cNvPr id="4" name="TextBox 3"/>
           <p:cNvSpPr txBox="1"/>
           <p:nvPr/>
         </p:nvSpPr>
@@ -10523,8 +12537,8 @@
         </p:nvSpPr>
         <p:spPr>
           <a:xfrm>
-            <a:off x="548640" y="411480"/>
-            <a:ext cx="11064240" cy="777240"/>
+            <a:off x="548640" y="2743200"/>
+            <a:ext cx="11064240" cy="1371600"/>
           </a:xfrm>
           <a:prstGeom prst="rect">
             <a:avLst/>
@@ -10537,11 +12551,11 @@
           </a:bodyPr>
           <a:lstStyle/>
           <a:p>
-            <a:pPr>
-              <a:lnSpc>
-                <a:spcPts val="2200"/>
-              </a:lnSpc>
-              <a:defRPr sz="2800" b="1">
+            <a:pPr algn="ctr">
+              <a:lnSpc>
+                <a:spcPts val="2200"/>
+              </a:lnSpc>
+              <a:defRPr sz="3600" b="1">
                 <a:solidFill>
                   <a:srgbClr val="1A1A2E"/>
                 </a:solidFill>
@@ -10549,7 +12563,7 @@
               </a:defRPr>
             </a:pPr>
             <a:r>
-              <a:t>2. Protocol verification layer</a:t>
+              <a:t>Design architecture</a:t>
             </a:r>
           </a:p>
         </p:txBody>
@@ -10557,167 +12571,6 @@
       <p:sp>
         <p:nvSpPr>
           <p:cNvPr id="3" name="TextBox 2"/>
-          <p:cNvSpPr txBox="1"/>
-          <p:nvPr/>
-        </p:nvSpPr>
-        <p:spPr>
-          <a:xfrm>
-            <a:off x="548640" y="1234440"/>
-            <a:ext cx="5303520" cy="4754880"/>
-          </a:xfrm>
-          <a:prstGeom prst="rect">
-            <a:avLst/>
-          </a:prstGeom>
-          <a:noFill/>
-        </p:spPr>
-        <p:txBody>
-          <a:bodyPr wrap="square">
-            <a:noAutofit/>
-          </a:bodyPr>
-          <a:lstStyle/>
-          <a:p>
-            <a:pPr>
-              <a:lnSpc>
-                <a:spcPts val="2200"/>
-              </a:lnSpc>
-              <a:spcAft>
-                <a:spcPts val="1000"/>
-              </a:spcAft>
-              <a:defRPr sz="2000" b="0">
-                <a:solidFill>
-                  <a:srgbClr val="333333"/>
-                </a:solidFill>
-                <a:latin typeface="Calibri"/>
-              </a:defRPr>
-            </a:pPr>
-            <a:r>
-              <a:t>• Dedicated protocol checker (SVA</a:t>
-            </a:r>
-          </a:p>
-          <a:p>
-            <a:pPr>
-              <a:lnSpc>
-                <a:spcPts val="2200"/>
-              </a:lnSpc>
-              <a:spcAft>
-                <a:spcPts val="1000"/>
-              </a:spcAft>
-              <a:defRPr sz="2000" b="0">
-                <a:solidFill>
-                  <a:srgbClr val="333333"/>
-                </a:solidFill>
-                <a:latin typeface="Calibri"/>
-              </a:defRPr>
-            </a:pPr>
-            <a:r>
-              <a:t>      or monitor-based) separate from</a:t>
-            </a:r>
-          </a:p>
-          <a:p>
-            <a:pPr>
-              <a:lnSpc>
-                <a:spcPts val="2200"/>
-              </a:lnSpc>
-              <a:spcAft>
-                <a:spcPts val="1000"/>
-              </a:spcAft>
-              <a:defRPr sz="2000" b="0">
-                <a:solidFill>
-                  <a:srgbClr val="333333"/>
-                </a:solidFill>
-                <a:latin typeface="Calibri"/>
-              </a:defRPr>
-            </a:pPr>
-            <a:r>
-              <a:t>      scoreboard data checks.</a:t>
-            </a:r>
-          </a:p>
-          <a:p>
-            <a:pPr>
-              <a:lnSpc>
-                <a:spcPts val="2200"/>
-              </a:lnSpc>
-              <a:spcAft>
-                <a:spcPts val="1000"/>
-              </a:spcAft>
-              <a:defRPr sz="2000" b="0">
-                <a:solidFill>
-                  <a:srgbClr val="333333"/>
-                </a:solidFill>
-                <a:latin typeface="Calibri"/>
-              </a:defRPr>
-            </a:pPr>
-            <a:r>
-              <a:t>• `PROTOCOL_VERIFICATION_PLAN.md`</a:t>
-            </a:r>
-          </a:p>
-          <a:p>
-            <a:pPr>
-              <a:lnSpc>
-                <a:spcPts val="2200"/>
-              </a:lnSpc>
-              <a:spcAft>
-                <a:spcPts val="1000"/>
-              </a:spcAft>
-              <a:defRPr sz="2000" b="0">
-                <a:solidFill>
-                  <a:srgbClr val="333333"/>
-                </a:solidFill>
-                <a:latin typeface="Calibri"/>
-              </a:defRPr>
-            </a:pPr>
-            <a:r>
-              <a:t>      lists rules, coverage, and</a:t>
-            </a:r>
-          </a:p>
-          <a:p>
-            <a:pPr>
-              <a:lnSpc>
-                <a:spcPts val="2200"/>
-              </a:lnSpc>
-              <a:spcAft>
-                <a:spcPts val="1000"/>
-              </a:spcAft>
-              <a:defRPr sz="2000" b="0">
-                <a:solidFill>
-                  <a:srgbClr val="333333"/>
-                </a:solidFill>
-                <a:latin typeface="Calibri"/>
-              </a:defRPr>
-            </a:pPr>
-            <a:r>
-              <a:t>      integration with agents.</a:t>
-            </a:r>
-          </a:p>
-        </p:txBody>
-      </p:sp>
-      <p:pic>
-        <p:nvPicPr>
-          <p:cNvPr id="4" name="Picture 3" descr="verification_architecture.png"/>
-          <p:cNvPicPr>
-            <a:picLocks noChangeAspect="1"/>
-          </p:cNvPicPr>
-          <p:nvPr/>
-        </p:nvPicPr>
-        <p:blipFill>
-          <a:blip r:embed="rId2"/>
-          <a:stretch>
-            <a:fillRect/>
-          </a:stretch>
-        </p:blipFill>
-        <p:spPr>
-          <a:xfrm>
-            <a:off x="6172200" y="2094547"/>
-            <a:ext cx="5394960" cy="3034665"/>
-          </a:xfrm>
-          <a:prstGeom prst="rect">
-            <a:avLst/>
-          </a:prstGeom>
-        </p:spPr>
-      </p:pic>
-      <p:sp>
-        <p:nvSpPr>
-          <p:cNvPr id="5" name="TextBox 4"/>
           <p:cNvSpPr txBox="1"/>
           <p:nvPr/>
         </p:nvSpPr>
@@ -10806,7 +12659,7 @@
               </a:defRPr>
             </a:pPr>
             <a:r>
-              <a:t>3. System integration view</a:t>
+              <a:t>1. Multi-agent / multi-channel TB</a:t>
             </a:r>
           </a:p>
         </p:txBody>
@@ -10820,7 +12673,7 @@
         <p:spPr>
           <a:xfrm>
             <a:off x="548640" y="1234440"/>
-            <a:ext cx="11064240" cy="4937760"/>
+            <a:ext cx="5303520" cy="4754880"/>
           </a:xfrm>
           <a:prstGeom prst="rect">
             <a:avLst/>
@@ -10848,7 +12701,7 @@
               </a:defRPr>
             </a:pPr>
             <a:r>
-              <a:t>• `INTEGRATION_PLAN.md` describes how block-level env</a:t>
+              <a:t>• Multiple agents (per interface</a:t>
             </a:r>
           </a:p>
           <a:p>
@@ -10867,7 +12720,7 @@
               </a:defRPr>
             </a:pPr>
             <a:r>
-              <a:t>      connects to subsystem tests.</a:t>
+              <a:t>      or channel) coordinated by env</a:t>
             </a:r>
           </a:p>
           <a:p>
@@ -10886,7 +12739,7 @@
               </a:defRPr>
             </a:pPr>
             <a:r>
-              <a:t>• Reuse agents/VIP across DUT variants via</a:t>
+              <a:t>      and virtual sequences.</a:t>
             </a:r>
           </a:p>
           <a:p>
@@ -10905,14 +12758,95 @@
               </a:defRPr>
             </a:pPr>
             <a:r>
-              <a:t>      configuration and factory overrides.</a:t>
-            </a:r>
-          </a:p>
-        </p:txBody>
-      </p:sp>
-      <p:sp>
-        <p:nvSpPr>
-          <p:cNvPr id="4" name="TextBox 3"/>
+              <a:t>• Layered architecture: block</a:t>
+            </a:r>
+          </a:p>
+          <a:p>
+            <a:pPr>
+              <a:lnSpc>
+                <a:spcPts val="2200"/>
+              </a:lnSpc>
+              <a:spcAft>
+                <a:spcPts val="1000"/>
+              </a:spcAft>
+              <a:defRPr sz="2000" b="0">
+                <a:solidFill>
+                  <a:srgbClr val="333333"/>
+                </a:solidFill>
+                <a:latin typeface="Calibri"/>
+              </a:defRPr>
+            </a:pPr>
+            <a:r>
+              <a:t>      agents → fabric/scoreboard →</a:t>
+            </a:r>
+          </a:p>
+          <a:p>
+            <a:pPr>
+              <a:lnSpc>
+                <a:spcPts val="2200"/>
+              </a:lnSpc>
+              <a:spcAft>
+                <a:spcPts val="1000"/>
+              </a:spcAft>
+              <a:defRPr sz="2000" b="0">
+                <a:solidFill>
+                  <a:srgbClr val="333333"/>
+                </a:solidFill>
+                <a:latin typeface="Calibri"/>
+              </a:defRPr>
+            </a:pPr>
+            <a:r>
+              <a:t>      subsystem scenarios</a:t>
+            </a:r>
+          </a:p>
+          <a:p>
+            <a:pPr>
+              <a:lnSpc>
+                <a:spcPts val="2200"/>
+              </a:lnSpc>
+              <a:spcAft>
+                <a:spcPts val="1000"/>
+              </a:spcAft>
+              <a:defRPr sz="2000" b="0">
+                <a:solidFill>
+                  <a:srgbClr val="333333"/>
+                </a:solidFill>
+                <a:latin typeface="Calibri"/>
+              </a:defRPr>
+            </a:pPr>
+            <a:r>
+              <a:t>      (`MULTI_AGENT_ARCHITEC…</a:t>
+            </a:r>
+          </a:p>
+        </p:txBody>
+      </p:sp>
+      <p:pic>
+        <p:nvPicPr>
+          <p:cNvPr id="4" name="Picture 3" descr="rtl_architecture.png"/>
+          <p:cNvPicPr>
+            <a:picLocks noChangeAspect="1"/>
+          </p:cNvPicPr>
+          <p:nvPr/>
+        </p:nvPicPr>
+        <p:blipFill>
+          <a:blip r:embed="rId2"/>
+          <a:stretch>
+            <a:fillRect/>
+          </a:stretch>
+        </p:blipFill>
+        <p:spPr>
+          <a:xfrm>
+            <a:off x="6172200" y="2094547"/>
+            <a:ext cx="5394960" cy="3034665"/>
+          </a:xfrm>
+          <a:prstGeom prst="rect">
+            <a:avLst/>
+          </a:prstGeom>
+        </p:spPr>
+      </p:pic>
+      <p:sp>
+        <p:nvSpPr>
+          <p:cNvPr id="5" name="TextBox 4"/>
           <p:cNvSpPr txBox="1"/>
           <p:nvPr/>
         </p:nvSpPr>
